--- a/포트폴리오 및 기타 raw 자료/커리어 메모리 개선 및 고도화.pptx
+++ b/포트폴리오 및 기타 raw 자료/커리어 메모리 개선 및 고도화.pptx
@@ -24,6 +24,13 @@
     <p:sldId id="272" r:id="rId18"/>
     <p:sldId id="273" r:id="rId19"/>
     <p:sldId id="274" r:id="rId20"/>
+    <p:sldId id="275" r:id="rId21"/>
+    <p:sldId id="276" r:id="rId22"/>
+    <p:sldId id="277" r:id="rId23"/>
+    <p:sldId id="278" r:id="rId24"/>
+    <p:sldId id="279" r:id="rId25"/>
+    <p:sldId id="280" r:id="rId26"/>
+    <p:sldId id="281" r:id="rId27"/>
   </p:sldIdLst>
   <p:sldSz cx="12192000" cy="6858000"/>
   <p:notesSz cx="6858000" cy="9144000"/>
@@ -10592,6 +10599,4144 @@
 </p:sld>
 </file>
 
+<file path=ppt/slides/slide20.xml><?xml version="1.0" encoding="utf-8"?>
+<p:sld xmlns:a="http://schemas.openxmlformats.org/drawingml/2006/main" xmlns:r="http://schemas.openxmlformats.org/officeDocument/2006/relationships" xmlns:p="http://schemas.openxmlformats.org/presentationml/2006/main">
+  <p:cSld>
+    <p:spTree>
+      <p:nvGrpSpPr>
+        <p:cNvPr id="1" name=""/>
+        <p:cNvGrpSpPr/>
+        <p:nvPr/>
+      </p:nvGrpSpPr>
+      <p:grpSpPr>
+        <a:xfrm>
+          <a:off x="0" y="0"/>
+          <a:ext cx="0" cy="0"/>
+          <a:chOff x="0" y="0"/>
+          <a:chExt cx="0" cy="0"/>
+        </a:xfrm>
+      </p:grpSpPr>
+      <p:sp>
+        <p:nvSpPr>
+          <p:cNvPr id="7" name="Rectangle 6">
+            <a:extLst>
+              <a:ext uri="{FF2B5EF4-FFF2-40B4-BE49-F238E27FC236}">
+                <a16:creationId xmlns:a16="http://schemas.microsoft.com/office/drawing/2014/main" id="{F01E17CA-6050-4A67-A379-81A98C9C0FE3}"/>
+              </a:ext>
+            </a:extLst>
+          </p:cNvPr>
+          <p:cNvSpPr/>
+          <p:nvPr/>
+        </p:nvSpPr>
+        <p:spPr>
+          <a:xfrm>
+            <a:off x="0" y="0"/>
+            <a:ext cx="12192000" cy="6858000"/>
+          </a:xfrm>
+          <a:prstGeom prst="rect">
+            <a:avLst/>
+          </a:prstGeom>
+          <a:solidFill>
+            <a:schemeClr val="tx1"/>
+          </a:solidFill>
+        </p:spPr>
+        <p:style>
+          <a:lnRef idx="2">
+            <a:schemeClr val="accent1">
+              <a:shade val="50000"/>
+            </a:schemeClr>
+          </a:lnRef>
+          <a:fillRef idx="1">
+            <a:schemeClr val="accent1"/>
+          </a:fillRef>
+          <a:effectRef idx="0">
+            <a:schemeClr val="accent1"/>
+          </a:effectRef>
+          <a:fontRef idx="minor">
+            <a:schemeClr val="lt1"/>
+          </a:fontRef>
+        </p:style>
+        <p:txBody>
+          <a:bodyPr rtlCol="0" anchor="ctr"/>
+          <a:lstStyle/>
+          <a:p>
+            <a:pPr algn="ctr"/>
+            <a:endParaRPr lang="ko-KR" altLang="en-US"/>
+          </a:p>
+        </p:txBody>
+      </p:sp>
+      <p:sp>
+        <p:nvSpPr>
+          <p:cNvPr id="6" name="TextBox 5">
+            <a:extLst>
+              <a:ext uri="{FF2B5EF4-FFF2-40B4-BE49-F238E27FC236}">
+                <a16:creationId xmlns:a16="http://schemas.microsoft.com/office/drawing/2014/main" id="{0479BC34-4582-4771-8576-953731B4FB4C}"/>
+              </a:ext>
+            </a:extLst>
+          </p:cNvPr>
+          <p:cNvSpPr txBox="1"/>
+          <p:nvPr/>
+        </p:nvSpPr>
+        <p:spPr>
+          <a:xfrm>
+            <a:off x="1391920" y="959901"/>
+            <a:ext cx="9408160" cy="3693319"/>
+          </a:xfrm>
+          <a:prstGeom prst="rect">
+            <a:avLst/>
+          </a:prstGeom>
+          <a:noFill/>
+        </p:spPr>
+        <p:txBody>
+          <a:bodyPr wrap="square">
+            <a:spAutoFit/>
+          </a:bodyPr>
+          <a:lstStyle/>
+          <a:p>
+            <a:pPr marL="0" marR="0" lvl="0" indent="0" algn="l" defTabSz="914400" rtl="0" eaLnBrk="0" fontAlgn="base" latinLnBrk="0" hangingPunct="0">
+              <a:lnSpc>
+                <a:spcPct val="100000"/>
+              </a:lnSpc>
+              <a:spcBef>
+                <a:spcPct val="0"/>
+              </a:spcBef>
+              <a:spcAft>
+                <a:spcPct val="0"/>
+              </a:spcAft>
+              <a:buClrTx/>
+              <a:buSzTx/>
+              <a:buFontTx/>
+              <a:buNone/>
+              <a:tabLst/>
+            </a:pPr>
+            <a:r>
+              <a:rPr kumimoji="0" lang="ko-KR" altLang="ko-KR" b="0" i="0" u="none" strike="noStrike" cap="none" normalizeH="0" baseline="0" dirty="0">
+                <a:ln>
+                  <a:noFill/>
+                </a:ln>
+                <a:solidFill>
+                  <a:schemeClr val="bg1"/>
+                </a:solidFill>
+                <a:effectLst/>
+                <a:latin typeface="Arial" panose="020B0604020202020204" pitchFamily="34" charset="0"/>
+              </a:rPr>
+              <a:t>CareerMemory는 현재:</a:t>
+            </a:r>
+            <a:endParaRPr kumimoji="0" lang="en-US" altLang="ko-KR" b="0" i="0" u="none" strike="noStrike" cap="none" normalizeH="0" baseline="0" dirty="0">
+              <a:ln>
+                <a:noFill/>
+              </a:ln>
+              <a:solidFill>
+                <a:schemeClr val="bg1"/>
+              </a:solidFill>
+              <a:effectLst/>
+              <a:latin typeface="Arial" panose="020B0604020202020204" pitchFamily="34" charset="0"/>
+            </a:endParaRPr>
+          </a:p>
+          <a:p>
+            <a:pPr marL="0" marR="0" lvl="0" indent="0" algn="l" defTabSz="914400" rtl="0" eaLnBrk="0" fontAlgn="base" latinLnBrk="0" hangingPunct="0">
+              <a:lnSpc>
+                <a:spcPct val="100000"/>
+              </a:lnSpc>
+              <a:spcBef>
+                <a:spcPct val="0"/>
+              </a:spcBef>
+              <a:spcAft>
+                <a:spcPct val="0"/>
+              </a:spcAft>
+              <a:buClrTx/>
+              <a:buSzTx/>
+              <a:buFontTx/>
+              <a:buNone/>
+              <a:tabLst/>
+            </a:pPr>
+            <a:endParaRPr kumimoji="0" lang="ko-KR" altLang="ko-KR" b="0" i="0" u="none" strike="noStrike" cap="none" normalizeH="0" baseline="0" dirty="0">
+              <a:ln>
+                <a:noFill/>
+              </a:ln>
+              <a:solidFill>
+                <a:schemeClr val="bg1"/>
+              </a:solidFill>
+              <a:effectLst/>
+              <a:latin typeface="Arial" panose="020B0604020202020204" pitchFamily="34" charset="0"/>
+            </a:endParaRPr>
+          </a:p>
+          <a:p>
+            <a:pPr marL="0" marR="0" lvl="0" indent="0" algn="l" defTabSz="914400" rtl="0" eaLnBrk="0" fontAlgn="base" latinLnBrk="0" hangingPunct="0">
+              <a:lnSpc>
+                <a:spcPct val="100000"/>
+              </a:lnSpc>
+              <a:spcBef>
+                <a:spcPct val="0"/>
+              </a:spcBef>
+              <a:spcAft>
+                <a:spcPct val="0"/>
+              </a:spcAft>
+              <a:buClrTx/>
+              <a:buSzTx/>
+              <a:buFontTx/>
+              <a:buChar char="•"/>
+              <a:tabLst/>
+            </a:pPr>
+            <a:r>
+              <a:rPr kumimoji="0" lang="ko-KR" altLang="ko-KR" b="0" i="0" u="none" strike="noStrike" cap="none" normalizeH="0" baseline="0" dirty="0">
+                <a:ln>
+                  <a:noFill/>
+                </a:ln>
+                <a:solidFill>
+                  <a:schemeClr val="bg1"/>
+                </a:solidFill>
+                <a:effectLst/>
+                <a:latin typeface="Arial" panose="020B0604020202020204" pitchFamily="34" charset="0"/>
+              </a:rPr>
+              <a:t>정식 온톨로지를 구축한 상태는 아니지만, </a:t>
+            </a:r>
+            <a:r>
+              <a:rPr kumimoji="0" lang="ko-KR" altLang="ko-KR" b="1" i="0" u="none" strike="noStrike" cap="none" normalizeH="0" baseline="0" dirty="0">
+                <a:ln>
+                  <a:noFill/>
+                </a:ln>
+                <a:solidFill>
+                  <a:schemeClr val="bg1"/>
+                </a:solidFill>
+                <a:effectLst/>
+                <a:latin typeface="Arial" panose="020B0604020202020204" pitchFamily="34" charset="0"/>
+              </a:rPr>
+              <a:t>경량 도메인 온톨로지에 가까운 의미 구조</a:t>
+            </a:r>
+            <a:r>
+              <a:rPr kumimoji="0" lang="ko-KR" altLang="ko-KR" b="0" i="0" u="none" strike="noStrike" cap="none" normalizeH="0" baseline="0" dirty="0">
+                <a:ln>
+                  <a:noFill/>
+                </a:ln>
+                <a:solidFill>
+                  <a:schemeClr val="bg1"/>
+                </a:solidFill>
+                <a:effectLst/>
+                <a:latin typeface="Arial" panose="020B0604020202020204" pitchFamily="34" charset="0"/>
+              </a:rPr>
+              <a:t>를 이미 가지고 있습니다.</a:t>
+            </a:r>
+            <a:endParaRPr kumimoji="0" lang="en-US" altLang="ko-KR" b="0" i="0" u="none" strike="noStrike" cap="none" normalizeH="0" baseline="0" dirty="0">
+              <a:ln>
+                <a:noFill/>
+              </a:ln>
+              <a:solidFill>
+                <a:schemeClr val="bg1"/>
+              </a:solidFill>
+              <a:effectLst/>
+              <a:latin typeface="Arial" panose="020B0604020202020204" pitchFamily="34" charset="0"/>
+            </a:endParaRPr>
+          </a:p>
+          <a:p>
+            <a:pPr marL="0" marR="0" lvl="0" indent="0" algn="l" defTabSz="914400" rtl="0" eaLnBrk="0" fontAlgn="base" latinLnBrk="0" hangingPunct="0">
+              <a:lnSpc>
+                <a:spcPct val="100000"/>
+              </a:lnSpc>
+              <a:spcBef>
+                <a:spcPct val="0"/>
+              </a:spcBef>
+              <a:spcAft>
+                <a:spcPct val="0"/>
+              </a:spcAft>
+              <a:buClrTx/>
+              <a:buSzTx/>
+              <a:buFontTx/>
+              <a:buChar char="•"/>
+              <a:tabLst/>
+            </a:pPr>
+            <a:endParaRPr kumimoji="0" lang="ko-KR" altLang="ko-KR" b="0" i="0" u="none" strike="noStrike" cap="none" normalizeH="0" baseline="0" dirty="0">
+              <a:ln>
+                <a:noFill/>
+              </a:ln>
+              <a:solidFill>
+                <a:schemeClr val="bg1"/>
+              </a:solidFill>
+              <a:effectLst/>
+              <a:latin typeface="Arial" panose="020B0604020202020204" pitchFamily="34" charset="0"/>
+            </a:endParaRPr>
+          </a:p>
+          <a:p>
+            <a:pPr marL="0" marR="0" lvl="0" indent="0" algn="l" defTabSz="914400" rtl="0" eaLnBrk="0" fontAlgn="base" latinLnBrk="0" hangingPunct="0">
+              <a:lnSpc>
+                <a:spcPct val="100000"/>
+              </a:lnSpc>
+              <a:spcBef>
+                <a:spcPct val="0"/>
+              </a:spcBef>
+              <a:spcAft>
+                <a:spcPct val="0"/>
+              </a:spcAft>
+              <a:buClrTx/>
+              <a:buSzTx/>
+              <a:buFontTx/>
+              <a:buChar char="•"/>
+              <a:tabLst/>
+            </a:pPr>
+            <a:r>
+              <a:rPr kumimoji="0" lang="ko-KR" altLang="ko-KR" b="0" i="0" u="none" strike="noStrike" cap="none" normalizeH="0" baseline="0" dirty="0">
+                <a:ln>
+                  <a:noFill/>
+                </a:ln>
+                <a:solidFill>
+                  <a:schemeClr val="bg1"/>
+                </a:solidFill>
+                <a:effectLst/>
+                <a:latin typeface="Arial" panose="020B0604020202020204" pitchFamily="34" charset="0"/>
+              </a:rPr>
+              <a:t>실제 데이터 레이크는 아니지만, </a:t>
+            </a:r>
+            <a:r>
+              <a:rPr kumimoji="0" lang="ko-KR" altLang="ko-KR" b="1" i="0" u="none" strike="noStrike" cap="none" normalizeH="0" baseline="0" dirty="0">
+                <a:ln>
+                  <a:noFill/>
+                </a:ln>
+                <a:solidFill>
+                  <a:schemeClr val="bg1"/>
+                </a:solidFill>
+                <a:effectLst/>
+                <a:latin typeface="Arial" panose="020B0604020202020204" pitchFamily="34" charset="0"/>
+              </a:rPr>
+              <a:t>원본 보존·가공 데이터 분리·계보 추적이라는 데이터 레이크 핵심 원칙</a:t>
+            </a:r>
+            <a:r>
+              <a:rPr kumimoji="0" lang="ko-KR" altLang="ko-KR" b="0" i="0" u="none" strike="noStrike" cap="none" normalizeH="0" baseline="0" dirty="0">
+                <a:ln>
+                  <a:noFill/>
+                </a:ln>
+                <a:solidFill>
+                  <a:schemeClr val="bg1"/>
+                </a:solidFill>
+                <a:effectLst/>
+                <a:latin typeface="Arial" panose="020B0604020202020204" pitchFamily="34" charset="0"/>
+              </a:rPr>
+              <a:t>을 상당 부분 적용하고 있습니다.</a:t>
+            </a:r>
+            <a:endParaRPr kumimoji="0" lang="en-US" altLang="ko-KR" b="0" i="0" u="none" strike="noStrike" cap="none" normalizeH="0" baseline="0" dirty="0">
+              <a:ln>
+                <a:noFill/>
+              </a:ln>
+              <a:solidFill>
+                <a:schemeClr val="bg1"/>
+              </a:solidFill>
+              <a:effectLst/>
+              <a:latin typeface="Arial" panose="020B0604020202020204" pitchFamily="34" charset="0"/>
+            </a:endParaRPr>
+          </a:p>
+          <a:p>
+            <a:pPr marL="0" marR="0" lvl="0" indent="0" algn="l" defTabSz="914400" rtl="0" eaLnBrk="0" fontAlgn="base" latinLnBrk="0" hangingPunct="0">
+              <a:lnSpc>
+                <a:spcPct val="100000"/>
+              </a:lnSpc>
+              <a:spcBef>
+                <a:spcPct val="0"/>
+              </a:spcBef>
+              <a:spcAft>
+                <a:spcPct val="0"/>
+              </a:spcAft>
+              <a:buClrTx/>
+              <a:buSzTx/>
+              <a:buFontTx/>
+              <a:buChar char="•"/>
+              <a:tabLst/>
+            </a:pPr>
+            <a:endParaRPr kumimoji="0" lang="ko-KR" altLang="ko-KR" b="0" i="0" u="none" strike="noStrike" cap="none" normalizeH="0" baseline="0" dirty="0">
+              <a:ln>
+                <a:noFill/>
+              </a:ln>
+              <a:solidFill>
+                <a:schemeClr val="bg1"/>
+              </a:solidFill>
+              <a:effectLst/>
+              <a:latin typeface="Arial" panose="020B0604020202020204" pitchFamily="34" charset="0"/>
+            </a:endParaRPr>
+          </a:p>
+          <a:p>
+            <a:pPr marL="0" marR="0" lvl="0" indent="0" algn="l" defTabSz="914400" rtl="0" eaLnBrk="0" fontAlgn="base" latinLnBrk="0" hangingPunct="0">
+              <a:lnSpc>
+                <a:spcPct val="100000"/>
+              </a:lnSpc>
+              <a:spcBef>
+                <a:spcPct val="0"/>
+              </a:spcBef>
+              <a:spcAft>
+                <a:spcPct val="0"/>
+              </a:spcAft>
+              <a:buClrTx/>
+              <a:buSzTx/>
+              <a:buFontTx/>
+              <a:buChar char="•"/>
+              <a:tabLst/>
+            </a:pPr>
+            <a:r>
+              <a:rPr kumimoji="0" lang="ko-KR" altLang="ko-KR" b="0" i="0" u="none" strike="noStrike" cap="none" normalizeH="0" baseline="0" dirty="0">
+                <a:ln>
+                  <a:noFill/>
+                </a:ln>
+                <a:solidFill>
+                  <a:schemeClr val="bg1"/>
+                </a:solidFill>
+                <a:effectLst/>
+                <a:latin typeface="Arial" panose="020B0604020202020204" pitchFamily="34" charset="0"/>
+              </a:rPr>
+              <a:t>NLP/NLU 기능도 정상 동작합니다. 다만 정확히 표현하면 </a:t>
+            </a:r>
+            <a:r>
+              <a:rPr kumimoji="0" lang="ko-KR" altLang="ko-KR" b="1" i="0" u="none" strike="noStrike" cap="none" normalizeH="0" baseline="0" dirty="0">
+                <a:ln>
+                  <a:noFill/>
+                </a:ln>
+                <a:solidFill>
+                  <a:schemeClr val="bg1"/>
+                </a:solidFill>
+                <a:effectLst/>
+                <a:latin typeface="Arial" panose="020B0604020202020204" pitchFamily="34" charset="0"/>
+              </a:rPr>
+              <a:t>자체 NLP 모델을 학습한 서비스가 아니라, LLM·임베딩·규칙 기반 검증을 결합한 NLU/RAG 시스템</a:t>
+            </a:r>
+            <a:r>
+              <a:rPr kumimoji="0" lang="ko-KR" altLang="ko-KR" b="0" i="0" u="none" strike="noStrike" cap="none" normalizeH="0" baseline="0" dirty="0">
+                <a:ln>
+                  <a:noFill/>
+                </a:ln>
+                <a:solidFill>
+                  <a:schemeClr val="bg1"/>
+                </a:solidFill>
+                <a:effectLst/>
+                <a:latin typeface="Arial" panose="020B0604020202020204" pitchFamily="34" charset="0"/>
+              </a:rPr>
+              <a:t>입니다.</a:t>
+            </a:r>
+            <a:endParaRPr kumimoji="0" lang="en-US" altLang="ko-KR" b="0" i="0" u="none" strike="noStrike" cap="none" normalizeH="0" baseline="0" dirty="0">
+              <a:ln>
+                <a:noFill/>
+              </a:ln>
+              <a:solidFill>
+                <a:schemeClr val="bg1"/>
+              </a:solidFill>
+              <a:effectLst/>
+              <a:latin typeface="Arial" panose="020B0604020202020204" pitchFamily="34" charset="0"/>
+            </a:endParaRPr>
+          </a:p>
+          <a:p>
+            <a:pPr marL="0" marR="0" lvl="0" indent="0" algn="l" defTabSz="914400" rtl="0" eaLnBrk="0" fontAlgn="base" latinLnBrk="0" hangingPunct="0">
+              <a:lnSpc>
+                <a:spcPct val="100000"/>
+              </a:lnSpc>
+              <a:spcBef>
+                <a:spcPct val="0"/>
+              </a:spcBef>
+              <a:spcAft>
+                <a:spcPct val="0"/>
+              </a:spcAft>
+              <a:buClrTx/>
+              <a:buSzTx/>
+              <a:buFontTx/>
+              <a:buChar char="•"/>
+              <a:tabLst/>
+            </a:pPr>
+            <a:endParaRPr kumimoji="0" lang="ko-KR" altLang="ko-KR" b="0" i="0" u="none" strike="noStrike" cap="none" normalizeH="0" baseline="0" dirty="0">
+              <a:ln>
+                <a:noFill/>
+              </a:ln>
+              <a:solidFill>
+                <a:schemeClr val="bg1"/>
+              </a:solidFill>
+              <a:effectLst/>
+              <a:latin typeface="Arial" panose="020B0604020202020204" pitchFamily="34" charset="0"/>
+            </a:endParaRPr>
+          </a:p>
+          <a:p>
+            <a:pPr marL="0" marR="0" lvl="0" indent="0" algn="l" defTabSz="914400" rtl="0" eaLnBrk="0" fontAlgn="base" latinLnBrk="0" hangingPunct="0">
+              <a:lnSpc>
+                <a:spcPct val="100000"/>
+              </a:lnSpc>
+              <a:spcBef>
+                <a:spcPct val="0"/>
+              </a:spcBef>
+              <a:spcAft>
+                <a:spcPct val="0"/>
+              </a:spcAft>
+              <a:buClrTx/>
+              <a:buSzTx/>
+              <a:buFontTx/>
+              <a:buNone/>
+              <a:tabLst/>
+            </a:pPr>
+            <a:r>
+              <a:rPr kumimoji="0" lang="ko-KR" altLang="ko-KR" b="0" i="0" u="none" strike="noStrike" cap="none" normalizeH="0" baseline="0" dirty="0">
+                <a:ln>
+                  <a:noFill/>
+                </a:ln>
+                <a:solidFill>
+                  <a:schemeClr val="bg1"/>
+                </a:solidFill>
+                <a:effectLst/>
+                <a:latin typeface="Arial" panose="020B0604020202020204" pitchFamily="34" charset="0"/>
+              </a:rPr>
+              <a:t>현재 구조를 가장 정확하게 부르면 다음과 같습니다.</a:t>
+            </a:r>
+          </a:p>
+          <a:p>
+            <a:pPr marL="0" marR="0" lvl="0" indent="0" algn="l" defTabSz="914400" rtl="0" eaLnBrk="0" fontAlgn="base" latinLnBrk="0" hangingPunct="0">
+              <a:lnSpc>
+                <a:spcPct val="100000"/>
+              </a:lnSpc>
+              <a:spcBef>
+                <a:spcPct val="0"/>
+              </a:spcBef>
+              <a:spcAft>
+                <a:spcPct val="0"/>
+              </a:spcAft>
+              <a:buClrTx/>
+              <a:buSzTx/>
+              <a:buFontTx/>
+              <a:buNone/>
+              <a:tabLst/>
+            </a:pPr>
+            <a:r>
+              <a:rPr kumimoji="0" lang="ko-KR" altLang="ko-KR" b="0" i="0" u="none" strike="noStrike" cap="none" normalizeH="0" baseline="0" dirty="0">
+                <a:ln>
+                  <a:noFill/>
+                </a:ln>
+                <a:solidFill>
+                  <a:schemeClr val="bg1"/>
+                </a:solidFill>
+                <a:effectLst/>
+                <a:latin typeface="Arial" panose="020B0604020202020204" pitchFamily="34" charset="0"/>
+              </a:rPr>
+              <a:t>원문 근거 중심의 Career Knowledge Base와 경량 온톨로지, RAG 검색 계층을 결합한 구조</a:t>
+            </a:r>
+          </a:p>
+        </p:txBody>
+      </p:sp>
+    </p:spTree>
+    <p:extLst>
+      <p:ext uri="{BB962C8B-B14F-4D97-AF65-F5344CB8AC3E}">
+        <p14:creationId xmlns:p14="http://schemas.microsoft.com/office/powerpoint/2010/main" val="3644723280"/>
+      </p:ext>
+    </p:extLst>
+  </p:cSld>
+  <p:clrMapOvr>
+    <a:masterClrMapping/>
+  </p:clrMapOvr>
+</p:sld>
+</file>
+
+<file path=ppt/slides/slide21.xml><?xml version="1.0" encoding="utf-8"?>
+<p:sld xmlns:a="http://schemas.openxmlformats.org/drawingml/2006/main" xmlns:r="http://schemas.openxmlformats.org/officeDocument/2006/relationships" xmlns:p="http://schemas.openxmlformats.org/presentationml/2006/main">
+  <p:cSld>
+    <p:spTree>
+      <p:nvGrpSpPr>
+        <p:cNvPr id="1" name=""/>
+        <p:cNvGrpSpPr/>
+        <p:nvPr/>
+      </p:nvGrpSpPr>
+      <p:grpSpPr>
+        <a:xfrm>
+          <a:off x="0" y="0"/>
+          <a:ext cx="0" cy="0"/>
+          <a:chOff x="0" y="0"/>
+          <a:chExt cx="0" cy="0"/>
+        </a:xfrm>
+      </p:grpSpPr>
+      <p:graphicFrame>
+        <p:nvGraphicFramePr>
+          <p:cNvPr id="4" name="Table 3">
+            <a:extLst>
+              <a:ext uri="{FF2B5EF4-FFF2-40B4-BE49-F238E27FC236}">
+                <a16:creationId xmlns:a16="http://schemas.microsoft.com/office/drawing/2014/main" id="{F7EACFEA-8513-4523-983A-33C10A217CC3}"/>
+              </a:ext>
+            </a:extLst>
+          </p:cNvPr>
+          <p:cNvGraphicFramePr>
+            <a:graphicFrameLocks noGrp="1"/>
+          </p:cNvGraphicFramePr>
+          <p:nvPr>
+            <p:extLst>
+              <p:ext uri="{D42A27DB-BD31-4B8C-83A1-F6EECF244321}">
+                <p14:modId xmlns:p14="http://schemas.microsoft.com/office/powerpoint/2010/main" val="570660315"/>
+              </p:ext>
+            </p:extLst>
+          </p:nvPr>
+        </p:nvGraphicFramePr>
+        <p:xfrm>
+          <a:off x="301079" y="544525"/>
+          <a:ext cx="7890420" cy="2884475"/>
+        </p:xfrm>
+        <a:graphic>
+          <a:graphicData uri="http://schemas.openxmlformats.org/drawingml/2006/table">
+            <a:tbl>
+              <a:tblPr/>
+              <a:tblGrid>
+                <a:gridCol w="2033156">
+                  <a:extLst>
+                    <a:ext uri="{9D8B030D-6E8A-4147-A177-3AD203B41FA5}">
+                      <a16:colId xmlns:a16="http://schemas.microsoft.com/office/drawing/2014/main" val="3397093076"/>
+                    </a:ext>
+                  </a:extLst>
+                </a:gridCol>
+                <a:gridCol w="5857264">
+                  <a:extLst>
+                    <a:ext uri="{9D8B030D-6E8A-4147-A177-3AD203B41FA5}">
+                      <a16:colId xmlns:a16="http://schemas.microsoft.com/office/drawing/2014/main" val="1679341469"/>
+                    </a:ext>
+                  </a:extLst>
+                </a:gridCol>
+              </a:tblGrid>
+              <a:tr h="193115">
+                <a:tc>
+                  <a:txBody>
+                    <a:bodyPr/>
+                    <a:lstStyle/>
+                    <a:p>
+                      <a:r>
+                        <a:rPr lang="ko-KR" altLang="en-US" sz="1400"/>
+                        <a:t>온톨로지 요소</a:t>
+                      </a:r>
+                    </a:p>
+                  </a:txBody>
+                  <a:tcPr marL="85320" marR="85320" marT="42660" marB="42660" anchor="ctr">
+                    <a:lnL w="12700" cap="flat" cmpd="sng" algn="ctr">
+                      <a:solidFill>
+                        <a:schemeClr val="tx1"/>
+                      </a:solidFill>
+                      <a:prstDash val="solid"/>
+                      <a:round/>
+                      <a:headEnd type="none" w="med" len="med"/>
+                      <a:tailEnd type="none" w="med" len="med"/>
+                    </a:lnL>
+                    <a:lnR w="12700" cap="flat" cmpd="sng" algn="ctr">
+                      <a:solidFill>
+                        <a:schemeClr val="tx1"/>
+                      </a:solidFill>
+                      <a:prstDash val="solid"/>
+                      <a:round/>
+                      <a:headEnd type="none" w="med" len="med"/>
+                      <a:tailEnd type="none" w="med" len="med"/>
+                    </a:lnR>
+                    <a:lnT w="12700" cap="flat" cmpd="sng" algn="ctr">
+                      <a:solidFill>
+                        <a:schemeClr val="tx1"/>
+                      </a:solidFill>
+                      <a:prstDash val="solid"/>
+                      <a:round/>
+                      <a:headEnd type="none" w="med" len="med"/>
+                      <a:tailEnd type="none" w="med" len="med"/>
+                    </a:lnT>
+                    <a:lnB w="12700" cap="flat" cmpd="sng" algn="ctr">
+                      <a:solidFill>
+                        <a:schemeClr val="tx1"/>
+                      </a:solidFill>
+                      <a:prstDash val="solid"/>
+                      <a:round/>
+                      <a:headEnd type="none" w="med" len="med"/>
+                      <a:tailEnd type="none" w="med" len="med"/>
+                    </a:lnB>
+                  </a:tcPr>
+                </a:tc>
+                <a:tc>
+                  <a:txBody>
+                    <a:bodyPr/>
+                    <a:lstStyle/>
+                    <a:p>
+                      <a:r>
+                        <a:rPr lang="ko-KR" altLang="en-US" sz="1400" dirty="0"/>
+                        <a:t>현재 구현</a:t>
+                      </a:r>
+                    </a:p>
+                  </a:txBody>
+                  <a:tcPr marL="85320" marR="85320" marT="42660" marB="42660" anchor="ctr">
+                    <a:lnL w="12700" cap="flat" cmpd="sng" algn="ctr">
+                      <a:solidFill>
+                        <a:schemeClr val="tx1"/>
+                      </a:solidFill>
+                      <a:prstDash val="solid"/>
+                      <a:round/>
+                      <a:headEnd type="none" w="med" len="med"/>
+                      <a:tailEnd type="none" w="med" len="med"/>
+                    </a:lnL>
+                    <a:lnR w="12700" cap="flat" cmpd="sng" algn="ctr">
+                      <a:solidFill>
+                        <a:schemeClr val="tx1"/>
+                      </a:solidFill>
+                      <a:prstDash val="solid"/>
+                      <a:round/>
+                      <a:headEnd type="none" w="med" len="med"/>
+                      <a:tailEnd type="none" w="med" len="med"/>
+                    </a:lnR>
+                    <a:lnT w="12700" cap="flat" cmpd="sng" algn="ctr">
+                      <a:solidFill>
+                        <a:schemeClr val="tx1"/>
+                      </a:solidFill>
+                      <a:prstDash val="solid"/>
+                      <a:round/>
+                      <a:headEnd type="none" w="med" len="med"/>
+                      <a:tailEnd type="none" w="med" len="med"/>
+                    </a:lnT>
+                    <a:lnB w="12700" cap="flat" cmpd="sng" algn="ctr">
+                      <a:solidFill>
+                        <a:schemeClr val="tx1"/>
+                      </a:solidFill>
+                      <a:prstDash val="solid"/>
+                      <a:round/>
+                      <a:headEnd type="none" w="med" len="med"/>
+                      <a:tailEnd type="none" w="med" len="med"/>
+                    </a:lnB>
+                  </a:tcPr>
+                </a:tc>
+                <a:extLst>
+                  <a:ext uri="{0D108BD9-81ED-4DB2-BD59-A6C34878D82A}">
+                    <a16:rowId xmlns:a16="http://schemas.microsoft.com/office/drawing/2014/main" val="1440318229"/>
+                  </a:ext>
+                </a:extLst>
+              </a:tr>
+              <a:tr h="337951">
+                <a:tc>
+                  <a:txBody>
+                    <a:bodyPr/>
+                    <a:lstStyle/>
+                    <a:p>
+                      <a:r>
+                        <a:rPr lang="ko-KR" altLang="en-US" sz="1400"/>
+                        <a:t>개념</a:t>
+                      </a:r>
+                    </a:p>
+                  </a:txBody>
+                  <a:tcPr marL="85320" marR="85320" marT="42660" marB="42660" anchor="ctr">
+                    <a:lnL w="12700" cap="flat" cmpd="sng" algn="ctr">
+                      <a:solidFill>
+                        <a:schemeClr val="tx1"/>
+                      </a:solidFill>
+                      <a:prstDash val="solid"/>
+                      <a:round/>
+                      <a:headEnd type="none" w="med" len="med"/>
+                      <a:tailEnd type="none" w="med" len="med"/>
+                    </a:lnL>
+                    <a:lnR w="12700" cap="flat" cmpd="sng" algn="ctr">
+                      <a:solidFill>
+                        <a:schemeClr val="tx1"/>
+                      </a:solidFill>
+                      <a:prstDash val="solid"/>
+                      <a:round/>
+                      <a:headEnd type="none" w="med" len="med"/>
+                      <a:tailEnd type="none" w="med" len="med"/>
+                    </a:lnR>
+                    <a:lnT w="12700" cap="flat" cmpd="sng" algn="ctr">
+                      <a:solidFill>
+                        <a:schemeClr val="tx1"/>
+                      </a:solidFill>
+                      <a:prstDash val="solid"/>
+                      <a:round/>
+                      <a:headEnd type="none" w="med" len="med"/>
+                      <a:tailEnd type="none" w="med" len="med"/>
+                    </a:lnT>
+                    <a:lnB w="12700" cap="flat" cmpd="sng" algn="ctr">
+                      <a:solidFill>
+                        <a:schemeClr val="tx1"/>
+                      </a:solidFill>
+                      <a:prstDash val="solid"/>
+                      <a:round/>
+                      <a:headEnd type="none" w="med" len="med"/>
+                      <a:tailEnd type="none" w="med" len="med"/>
+                    </a:lnB>
+                  </a:tcPr>
+                </a:tc>
+                <a:tc>
+                  <a:txBody>
+                    <a:bodyPr/>
+                    <a:lstStyle/>
+                    <a:p>
+                      <a:r>
+                        <a:rPr lang="en-US" sz="1400" dirty="0"/>
+                        <a:t>Experience, Project, Skill, Metric, </a:t>
+                      </a:r>
+                      <a:r>
+                        <a:rPr lang="en-US" sz="1400" dirty="0" err="1"/>
+                        <a:t>JobRequirement</a:t>
+                      </a:r>
+                      <a:r>
+                        <a:rPr lang="en-US" sz="1400" dirty="0"/>
+                        <a:t>, Evidence</a:t>
+                      </a:r>
+                    </a:p>
+                  </a:txBody>
+                  <a:tcPr marL="85320" marR="85320" marT="42660" marB="42660" anchor="ctr">
+                    <a:lnL w="12700" cap="flat" cmpd="sng" algn="ctr">
+                      <a:solidFill>
+                        <a:schemeClr val="tx1"/>
+                      </a:solidFill>
+                      <a:prstDash val="solid"/>
+                      <a:round/>
+                      <a:headEnd type="none" w="med" len="med"/>
+                      <a:tailEnd type="none" w="med" len="med"/>
+                    </a:lnL>
+                    <a:lnR w="12700" cap="flat" cmpd="sng" algn="ctr">
+                      <a:solidFill>
+                        <a:schemeClr val="tx1"/>
+                      </a:solidFill>
+                      <a:prstDash val="solid"/>
+                      <a:round/>
+                      <a:headEnd type="none" w="med" len="med"/>
+                      <a:tailEnd type="none" w="med" len="med"/>
+                    </a:lnR>
+                    <a:lnT w="12700" cap="flat" cmpd="sng" algn="ctr">
+                      <a:solidFill>
+                        <a:schemeClr val="tx1"/>
+                      </a:solidFill>
+                      <a:prstDash val="solid"/>
+                      <a:round/>
+                      <a:headEnd type="none" w="med" len="med"/>
+                      <a:tailEnd type="none" w="med" len="med"/>
+                    </a:lnT>
+                    <a:lnB w="12700" cap="flat" cmpd="sng" algn="ctr">
+                      <a:solidFill>
+                        <a:schemeClr val="tx1"/>
+                      </a:solidFill>
+                      <a:prstDash val="solid"/>
+                      <a:round/>
+                      <a:headEnd type="none" w="med" len="med"/>
+                      <a:tailEnd type="none" w="med" len="med"/>
+                    </a:lnB>
+                  </a:tcPr>
+                </a:tc>
+                <a:extLst>
+                  <a:ext uri="{0D108BD9-81ED-4DB2-BD59-A6C34878D82A}">
+                    <a16:rowId xmlns:a16="http://schemas.microsoft.com/office/drawing/2014/main" val="1273743032"/>
+                  </a:ext>
+                </a:extLst>
+              </a:tr>
+              <a:tr h="337951">
+                <a:tc>
+                  <a:txBody>
+                    <a:bodyPr/>
+                    <a:lstStyle/>
+                    <a:p>
+                      <a:r>
+                        <a:rPr lang="ko-KR" altLang="en-US" sz="1400"/>
+                        <a:t>식별자</a:t>
+                      </a:r>
+                    </a:p>
+                  </a:txBody>
+                  <a:tcPr marL="85320" marR="85320" marT="42660" marB="42660" anchor="ctr">
+                    <a:lnL w="12700" cap="flat" cmpd="sng" algn="ctr">
+                      <a:solidFill>
+                        <a:schemeClr val="tx1"/>
+                      </a:solidFill>
+                      <a:prstDash val="solid"/>
+                      <a:round/>
+                      <a:headEnd type="none" w="med" len="med"/>
+                      <a:tailEnd type="none" w="med" len="med"/>
+                    </a:lnL>
+                    <a:lnR w="12700" cap="flat" cmpd="sng" algn="ctr">
+                      <a:solidFill>
+                        <a:schemeClr val="tx1"/>
+                      </a:solidFill>
+                      <a:prstDash val="solid"/>
+                      <a:round/>
+                      <a:headEnd type="none" w="med" len="med"/>
+                      <a:tailEnd type="none" w="med" len="med"/>
+                    </a:lnR>
+                    <a:lnT w="12700" cap="flat" cmpd="sng" algn="ctr">
+                      <a:solidFill>
+                        <a:schemeClr val="tx1"/>
+                      </a:solidFill>
+                      <a:prstDash val="solid"/>
+                      <a:round/>
+                      <a:headEnd type="none" w="med" len="med"/>
+                      <a:tailEnd type="none" w="med" len="med"/>
+                    </a:lnT>
+                    <a:lnB w="12700" cap="flat" cmpd="sng" algn="ctr">
+                      <a:solidFill>
+                        <a:schemeClr val="tx1"/>
+                      </a:solidFill>
+                      <a:prstDash val="solid"/>
+                      <a:round/>
+                      <a:headEnd type="none" w="med" len="med"/>
+                      <a:tailEnd type="none" w="med" len="med"/>
+                    </a:lnB>
+                  </a:tcPr>
+                </a:tc>
+                <a:tc>
+                  <a:txBody>
+                    <a:bodyPr/>
+                    <a:lstStyle/>
+                    <a:p>
+                      <a:r>
+                        <a:rPr lang="en-US" sz="1400"/>
+                        <a:t>Experience ID, source reference ID, canonical skill ID</a:t>
+                      </a:r>
+                    </a:p>
+                  </a:txBody>
+                  <a:tcPr marL="85320" marR="85320" marT="42660" marB="42660" anchor="ctr">
+                    <a:lnL w="12700" cap="flat" cmpd="sng" algn="ctr">
+                      <a:solidFill>
+                        <a:schemeClr val="tx1"/>
+                      </a:solidFill>
+                      <a:prstDash val="solid"/>
+                      <a:round/>
+                      <a:headEnd type="none" w="med" len="med"/>
+                      <a:tailEnd type="none" w="med" len="med"/>
+                    </a:lnL>
+                    <a:lnR w="12700" cap="flat" cmpd="sng" algn="ctr">
+                      <a:solidFill>
+                        <a:schemeClr val="tx1"/>
+                      </a:solidFill>
+                      <a:prstDash val="solid"/>
+                      <a:round/>
+                      <a:headEnd type="none" w="med" len="med"/>
+                      <a:tailEnd type="none" w="med" len="med"/>
+                    </a:lnR>
+                    <a:lnT w="12700" cap="flat" cmpd="sng" algn="ctr">
+                      <a:solidFill>
+                        <a:schemeClr val="tx1"/>
+                      </a:solidFill>
+                      <a:prstDash val="solid"/>
+                      <a:round/>
+                      <a:headEnd type="none" w="med" len="med"/>
+                      <a:tailEnd type="none" w="med" len="med"/>
+                    </a:lnT>
+                    <a:lnB w="12700" cap="flat" cmpd="sng" algn="ctr">
+                      <a:solidFill>
+                        <a:schemeClr val="tx1"/>
+                      </a:solidFill>
+                      <a:prstDash val="solid"/>
+                      <a:round/>
+                      <a:headEnd type="none" w="med" len="med"/>
+                      <a:tailEnd type="none" w="med" len="med"/>
+                    </a:lnB>
+                  </a:tcPr>
+                </a:tc>
+                <a:extLst>
+                  <a:ext uri="{0D108BD9-81ED-4DB2-BD59-A6C34878D82A}">
+                    <a16:rowId xmlns:a16="http://schemas.microsoft.com/office/drawing/2014/main" val="2109516290"/>
+                  </a:ext>
+                </a:extLst>
+              </a:tr>
+              <a:tr h="193115">
+                <a:tc>
+                  <a:txBody>
+                    <a:bodyPr/>
+                    <a:lstStyle/>
+                    <a:p>
+                      <a:r>
+                        <a:rPr lang="ko-KR" altLang="en-US" sz="1400"/>
+                        <a:t>별칭</a:t>
+                      </a:r>
+                    </a:p>
+                  </a:txBody>
+                  <a:tcPr marL="85320" marR="85320" marT="42660" marB="42660" anchor="ctr">
+                    <a:lnL w="12700" cap="flat" cmpd="sng" algn="ctr">
+                      <a:solidFill>
+                        <a:schemeClr val="tx1"/>
+                      </a:solidFill>
+                      <a:prstDash val="solid"/>
+                      <a:round/>
+                      <a:headEnd type="none" w="med" len="med"/>
+                      <a:tailEnd type="none" w="med" len="med"/>
+                    </a:lnL>
+                    <a:lnR w="12700" cap="flat" cmpd="sng" algn="ctr">
+                      <a:solidFill>
+                        <a:schemeClr val="tx1"/>
+                      </a:solidFill>
+                      <a:prstDash val="solid"/>
+                      <a:round/>
+                      <a:headEnd type="none" w="med" len="med"/>
+                      <a:tailEnd type="none" w="med" len="med"/>
+                    </a:lnR>
+                    <a:lnT w="12700" cap="flat" cmpd="sng" algn="ctr">
+                      <a:solidFill>
+                        <a:schemeClr val="tx1"/>
+                      </a:solidFill>
+                      <a:prstDash val="solid"/>
+                      <a:round/>
+                      <a:headEnd type="none" w="med" len="med"/>
+                      <a:tailEnd type="none" w="med" len="med"/>
+                    </a:lnT>
+                    <a:lnB w="12700" cap="flat" cmpd="sng" algn="ctr">
+                      <a:solidFill>
+                        <a:schemeClr val="tx1"/>
+                      </a:solidFill>
+                      <a:prstDash val="solid"/>
+                      <a:round/>
+                      <a:headEnd type="none" w="med" len="med"/>
+                      <a:tailEnd type="none" w="med" len="med"/>
+                    </a:lnB>
+                  </a:tcPr>
+                </a:tc>
+                <a:tc>
+                  <a:txBody>
+                    <a:bodyPr/>
+                    <a:lstStyle/>
+                    <a:p>
+                      <a:r>
+                        <a:rPr lang="ko-KR" altLang="en-US" sz="1400" dirty="0"/>
+                        <a:t>페스트</a:t>
+                      </a:r>
+                      <a:r>
+                        <a:rPr lang="en-US" sz="1400" dirty="0"/>
+                        <a:t>API → </a:t>
+                      </a:r>
+                      <a:r>
+                        <a:rPr lang="en-US" sz="1400" dirty="0" err="1"/>
+                        <a:t>FastAPI</a:t>
+                      </a:r>
+                      <a:r>
+                        <a:rPr lang="en-US" sz="1400" dirty="0"/>
+                        <a:t>, JS → JavaScript</a:t>
+                      </a:r>
+                    </a:p>
+                  </a:txBody>
+                  <a:tcPr marL="85320" marR="85320" marT="42660" marB="42660" anchor="ctr">
+                    <a:lnL w="12700" cap="flat" cmpd="sng" algn="ctr">
+                      <a:solidFill>
+                        <a:schemeClr val="tx1"/>
+                      </a:solidFill>
+                      <a:prstDash val="solid"/>
+                      <a:round/>
+                      <a:headEnd type="none" w="med" len="med"/>
+                      <a:tailEnd type="none" w="med" len="med"/>
+                    </a:lnL>
+                    <a:lnR w="12700" cap="flat" cmpd="sng" algn="ctr">
+                      <a:solidFill>
+                        <a:schemeClr val="tx1"/>
+                      </a:solidFill>
+                      <a:prstDash val="solid"/>
+                      <a:round/>
+                      <a:headEnd type="none" w="med" len="med"/>
+                      <a:tailEnd type="none" w="med" len="med"/>
+                    </a:lnR>
+                    <a:lnT w="12700" cap="flat" cmpd="sng" algn="ctr">
+                      <a:solidFill>
+                        <a:schemeClr val="tx1"/>
+                      </a:solidFill>
+                      <a:prstDash val="solid"/>
+                      <a:round/>
+                      <a:headEnd type="none" w="med" len="med"/>
+                      <a:tailEnd type="none" w="med" len="med"/>
+                    </a:lnT>
+                    <a:lnB w="12700" cap="flat" cmpd="sng" algn="ctr">
+                      <a:solidFill>
+                        <a:schemeClr val="tx1"/>
+                      </a:solidFill>
+                      <a:prstDash val="solid"/>
+                      <a:round/>
+                      <a:headEnd type="none" w="med" len="med"/>
+                      <a:tailEnd type="none" w="med" len="med"/>
+                    </a:lnB>
+                  </a:tcPr>
+                </a:tc>
+                <a:extLst>
+                  <a:ext uri="{0D108BD9-81ED-4DB2-BD59-A6C34878D82A}">
+                    <a16:rowId xmlns:a16="http://schemas.microsoft.com/office/drawing/2014/main" val="1933051644"/>
+                  </a:ext>
+                </a:extLst>
+              </a:tr>
+              <a:tr h="337951">
+                <a:tc>
+                  <a:txBody>
+                    <a:bodyPr/>
+                    <a:lstStyle/>
+                    <a:p>
+                      <a:r>
+                        <a:rPr lang="ko-KR" altLang="en-US" sz="1400"/>
+                        <a:t>관계</a:t>
+                      </a:r>
+                    </a:p>
+                  </a:txBody>
+                  <a:tcPr marL="85320" marR="85320" marT="42660" marB="42660" anchor="ctr">
+                    <a:lnL w="12700" cap="flat" cmpd="sng" algn="ctr">
+                      <a:solidFill>
+                        <a:schemeClr val="tx1"/>
+                      </a:solidFill>
+                      <a:prstDash val="solid"/>
+                      <a:round/>
+                      <a:headEnd type="none" w="med" len="med"/>
+                      <a:tailEnd type="none" w="med" len="med"/>
+                    </a:lnL>
+                    <a:lnR w="12700" cap="flat" cmpd="sng" algn="ctr">
+                      <a:solidFill>
+                        <a:schemeClr val="tx1"/>
+                      </a:solidFill>
+                      <a:prstDash val="solid"/>
+                      <a:round/>
+                      <a:headEnd type="none" w="med" len="med"/>
+                      <a:tailEnd type="none" w="med" len="med"/>
+                    </a:lnR>
+                    <a:lnT w="12700" cap="flat" cmpd="sng" algn="ctr">
+                      <a:solidFill>
+                        <a:schemeClr val="tx1"/>
+                      </a:solidFill>
+                      <a:prstDash val="solid"/>
+                      <a:round/>
+                      <a:headEnd type="none" w="med" len="med"/>
+                      <a:tailEnd type="none" w="med" len="med"/>
+                    </a:lnT>
+                    <a:lnB w="12700" cap="flat" cmpd="sng" algn="ctr">
+                      <a:solidFill>
+                        <a:schemeClr val="tx1"/>
+                      </a:solidFill>
+                      <a:prstDash val="solid"/>
+                      <a:round/>
+                      <a:headEnd type="none" w="med" len="med"/>
+                      <a:tailEnd type="none" w="med" len="med"/>
+                    </a:lnB>
+                  </a:tcPr>
+                </a:tc>
+                <a:tc>
+                  <a:txBody>
+                    <a:bodyPr/>
+                    <a:lstStyle/>
+                    <a:p>
+                      <a:r>
+                        <a:rPr lang="en-US" sz="1400" dirty="0"/>
+                        <a:t>Experience–Skill, Requirement–Skill, Requirement–Experience</a:t>
+                      </a:r>
+                    </a:p>
+                  </a:txBody>
+                  <a:tcPr marL="85320" marR="85320" marT="42660" marB="42660" anchor="ctr">
+                    <a:lnL w="12700" cap="flat" cmpd="sng" algn="ctr">
+                      <a:solidFill>
+                        <a:schemeClr val="tx1"/>
+                      </a:solidFill>
+                      <a:prstDash val="solid"/>
+                      <a:round/>
+                      <a:headEnd type="none" w="med" len="med"/>
+                      <a:tailEnd type="none" w="med" len="med"/>
+                    </a:lnL>
+                    <a:lnR w="12700" cap="flat" cmpd="sng" algn="ctr">
+                      <a:solidFill>
+                        <a:schemeClr val="tx1"/>
+                      </a:solidFill>
+                      <a:prstDash val="solid"/>
+                      <a:round/>
+                      <a:headEnd type="none" w="med" len="med"/>
+                      <a:tailEnd type="none" w="med" len="med"/>
+                    </a:lnR>
+                    <a:lnT w="12700" cap="flat" cmpd="sng" algn="ctr">
+                      <a:solidFill>
+                        <a:schemeClr val="tx1"/>
+                      </a:solidFill>
+                      <a:prstDash val="solid"/>
+                      <a:round/>
+                      <a:headEnd type="none" w="med" len="med"/>
+                      <a:tailEnd type="none" w="med" len="med"/>
+                    </a:lnT>
+                    <a:lnB w="12700" cap="flat" cmpd="sng" algn="ctr">
+                      <a:solidFill>
+                        <a:schemeClr val="tx1"/>
+                      </a:solidFill>
+                      <a:prstDash val="solid"/>
+                      <a:round/>
+                      <a:headEnd type="none" w="med" len="med"/>
+                      <a:tailEnd type="none" w="med" len="med"/>
+                    </a:lnB>
+                  </a:tcPr>
+                </a:tc>
+                <a:extLst>
+                  <a:ext uri="{0D108BD9-81ED-4DB2-BD59-A6C34878D82A}">
+                    <a16:rowId xmlns:a16="http://schemas.microsoft.com/office/drawing/2014/main" val="3785490773"/>
+                  </a:ext>
+                </a:extLst>
+              </a:tr>
+              <a:tr h="193115">
+                <a:tc>
+                  <a:txBody>
+                    <a:bodyPr/>
+                    <a:lstStyle/>
+                    <a:p>
+                      <a:r>
+                        <a:rPr lang="ko-KR" altLang="en-US" sz="1400"/>
+                        <a:t>관계 유형</a:t>
+                      </a:r>
+                    </a:p>
+                  </a:txBody>
+                  <a:tcPr marL="85320" marR="85320" marT="42660" marB="42660" anchor="ctr">
+                    <a:lnL w="12700" cap="flat" cmpd="sng" algn="ctr">
+                      <a:solidFill>
+                        <a:schemeClr val="tx1"/>
+                      </a:solidFill>
+                      <a:prstDash val="solid"/>
+                      <a:round/>
+                      <a:headEnd type="none" w="med" len="med"/>
+                      <a:tailEnd type="none" w="med" len="med"/>
+                    </a:lnL>
+                    <a:lnR w="12700" cap="flat" cmpd="sng" algn="ctr">
+                      <a:solidFill>
+                        <a:schemeClr val="tx1"/>
+                      </a:solidFill>
+                      <a:prstDash val="solid"/>
+                      <a:round/>
+                      <a:headEnd type="none" w="med" len="med"/>
+                      <a:tailEnd type="none" w="med" len="med"/>
+                    </a:lnR>
+                    <a:lnT w="12700" cap="flat" cmpd="sng" algn="ctr">
+                      <a:solidFill>
+                        <a:schemeClr val="tx1"/>
+                      </a:solidFill>
+                      <a:prstDash val="solid"/>
+                      <a:round/>
+                      <a:headEnd type="none" w="med" len="med"/>
+                      <a:tailEnd type="none" w="med" len="med"/>
+                    </a:lnT>
+                    <a:lnB w="12700" cap="flat" cmpd="sng" algn="ctr">
+                      <a:solidFill>
+                        <a:schemeClr val="tx1"/>
+                      </a:solidFill>
+                      <a:prstDash val="solid"/>
+                      <a:round/>
+                      <a:headEnd type="none" w="med" len="med"/>
+                      <a:tailEnd type="none" w="med" len="med"/>
+                    </a:lnB>
+                  </a:tcPr>
+                </a:tc>
+                <a:tc>
+                  <a:txBody>
+                    <a:bodyPr/>
+                    <a:lstStyle/>
+                    <a:p>
+                      <a:r>
+                        <a:rPr lang="en-US" sz="1400"/>
+                        <a:t>exact, alias, related, unresolved</a:t>
+                      </a:r>
+                    </a:p>
+                  </a:txBody>
+                  <a:tcPr marL="85320" marR="85320" marT="42660" marB="42660" anchor="ctr">
+                    <a:lnL w="12700" cap="flat" cmpd="sng" algn="ctr">
+                      <a:solidFill>
+                        <a:schemeClr val="tx1"/>
+                      </a:solidFill>
+                      <a:prstDash val="solid"/>
+                      <a:round/>
+                      <a:headEnd type="none" w="med" len="med"/>
+                      <a:tailEnd type="none" w="med" len="med"/>
+                    </a:lnL>
+                    <a:lnR w="12700" cap="flat" cmpd="sng" algn="ctr">
+                      <a:solidFill>
+                        <a:schemeClr val="tx1"/>
+                      </a:solidFill>
+                      <a:prstDash val="solid"/>
+                      <a:round/>
+                      <a:headEnd type="none" w="med" len="med"/>
+                      <a:tailEnd type="none" w="med" len="med"/>
+                    </a:lnR>
+                    <a:lnT w="12700" cap="flat" cmpd="sng" algn="ctr">
+                      <a:solidFill>
+                        <a:schemeClr val="tx1"/>
+                      </a:solidFill>
+                      <a:prstDash val="solid"/>
+                      <a:round/>
+                      <a:headEnd type="none" w="med" len="med"/>
+                      <a:tailEnd type="none" w="med" len="med"/>
+                    </a:lnT>
+                    <a:lnB w="12700" cap="flat" cmpd="sng" algn="ctr">
+                      <a:solidFill>
+                        <a:schemeClr val="tx1"/>
+                      </a:solidFill>
+                      <a:prstDash val="solid"/>
+                      <a:round/>
+                      <a:headEnd type="none" w="med" len="med"/>
+                      <a:tailEnd type="none" w="med" len="med"/>
+                    </a:lnB>
+                  </a:tcPr>
+                </a:tc>
+                <a:extLst>
+                  <a:ext uri="{0D108BD9-81ED-4DB2-BD59-A6C34878D82A}">
+                    <a16:rowId xmlns:a16="http://schemas.microsoft.com/office/drawing/2014/main" val="1802225374"/>
+                  </a:ext>
+                </a:extLst>
+              </a:tr>
+              <a:tr h="337951">
+                <a:tc>
+                  <a:txBody>
+                    <a:bodyPr/>
+                    <a:lstStyle/>
+                    <a:p>
+                      <a:r>
+                        <a:rPr lang="ko-KR" altLang="en-US" sz="1400"/>
+                        <a:t>제약 규칙</a:t>
+                      </a:r>
+                    </a:p>
+                  </a:txBody>
+                  <a:tcPr marL="85320" marR="85320" marT="42660" marB="42660" anchor="ctr">
+                    <a:lnL w="12700" cap="flat" cmpd="sng" algn="ctr">
+                      <a:solidFill>
+                        <a:schemeClr val="tx1"/>
+                      </a:solidFill>
+                      <a:prstDash val="solid"/>
+                      <a:round/>
+                      <a:headEnd type="none" w="med" len="med"/>
+                      <a:tailEnd type="none" w="med" len="med"/>
+                    </a:lnL>
+                    <a:lnR w="12700" cap="flat" cmpd="sng" algn="ctr">
+                      <a:solidFill>
+                        <a:schemeClr val="tx1"/>
+                      </a:solidFill>
+                      <a:prstDash val="solid"/>
+                      <a:round/>
+                      <a:headEnd type="none" w="med" len="med"/>
+                      <a:tailEnd type="none" w="med" len="med"/>
+                    </a:lnR>
+                    <a:lnT w="12700" cap="flat" cmpd="sng" algn="ctr">
+                      <a:solidFill>
+                        <a:schemeClr val="tx1"/>
+                      </a:solidFill>
+                      <a:prstDash val="solid"/>
+                      <a:round/>
+                      <a:headEnd type="none" w="med" len="med"/>
+                      <a:tailEnd type="none" w="med" len="med"/>
+                    </a:lnT>
+                    <a:lnB w="12700" cap="flat" cmpd="sng" algn="ctr">
+                      <a:solidFill>
+                        <a:schemeClr val="tx1"/>
+                      </a:solidFill>
+                      <a:prstDash val="solid"/>
+                      <a:round/>
+                      <a:headEnd type="none" w="med" len="med"/>
+                      <a:tailEnd type="none" w="med" len="med"/>
+                    </a:lnB>
+                  </a:tcPr>
+                </a:tc>
+                <a:tc>
+                  <a:txBody>
+                    <a:bodyPr/>
+                    <a:lstStyle/>
+                    <a:p>
+                      <a:r>
+                        <a:rPr lang="en-US" altLang="ko-KR" sz="1400"/>
+                        <a:t>related </a:t>
+                      </a:r>
+                      <a:r>
+                        <a:rPr lang="ko-KR" altLang="en-US" sz="1400"/>
+                        <a:t>기술은 필수 기술 충족으로 인정하지 않음</a:t>
+                      </a:r>
+                    </a:p>
+                  </a:txBody>
+                  <a:tcPr marL="85320" marR="85320" marT="42660" marB="42660" anchor="ctr">
+                    <a:lnL w="12700" cap="flat" cmpd="sng" algn="ctr">
+                      <a:solidFill>
+                        <a:schemeClr val="tx1"/>
+                      </a:solidFill>
+                      <a:prstDash val="solid"/>
+                      <a:round/>
+                      <a:headEnd type="none" w="med" len="med"/>
+                      <a:tailEnd type="none" w="med" len="med"/>
+                    </a:lnL>
+                    <a:lnR w="12700" cap="flat" cmpd="sng" algn="ctr">
+                      <a:solidFill>
+                        <a:schemeClr val="tx1"/>
+                      </a:solidFill>
+                      <a:prstDash val="solid"/>
+                      <a:round/>
+                      <a:headEnd type="none" w="med" len="med"/>
+                      <a:tailEnd type="none" w="med" len="med"/>
+                    </a:lnR>
+                    <a:lnT w="12700" cap="flat" cmpd="sng" algn="ctr">
+                      <a:solidFill>
+                        <a:schemeClr val="tx1"/>
+                      </a:solidFill>
+                      <a:prstDash val="solid"/>
+                      <a:round/>
+                      <a:headEnd type="none" w="med" len="med"/>
+                      <a:tailEnd type="none" w="med" len="med"/>
+                    </a:lnT>
+                    <a:lnB w="12700" cap="flat" cmpd="sng" algn="ctr">
+                      <a:solidFill>
+                        <a:schemeClr val="tx1"/>
+                      </a:solidFill>
+                      <a:prstDash val="solid"/>
+                      <a:round/>
+                      <a:headEnd type="none" w="med" len="med"/>
+                      <a:tailEnd type="none" w="med" len="med"/>
+                    </a:lnB>
+                  </a:tcPr>
+                </a:tc>
+                <a:extLst>
+                  <a:ext uri="{0D108BD9-81ED-4DB2-BD59-A6C34878D82A}">
+                    <a16:rowId xmlns:a16="http://schemas.microsoft.com/office/drawing/2014/main" val="1874357343"/>
+                  </a:ext>
+                </a:extLst>
+              </a:tr>
+              <a:tr h="337951">
+                <a:tc>
+                  <a:txBody>
+                    <a:bodyPr/>
+                    <a:lstStyle/>
+                    <a:p>
+                      <a:r>
+                        <a:rPr lang="ko-KR" altLang="en-US" sz="1400"/>
+                        <a:t>출처</a:t>
+                      </a:r>
+                      <a:r>
+                        <a:rPr lang="en-US" altLang="ko-KR" sz="1400"/>
+                        <a:t>·</a:t>
+                      </a:r>
+                      <a:r>
+                        <a:rPr lang="ko-KR" altLang="en-US" sz="1400"/>
+                        <a:t>계보</a:t>
+                      </a:r>
+                    </a:p>
+                  </a:txBody>
+                  <a:tcPr marL="85320" marR="85320" marT="42660" marB="42660" anchor="ctr">
+                    <a:lnL w="12700" cap="flat" cmpd="sng" algn="ctr">
+                      <a:solidFill>
+                        <a:schemeClr val="tx1"/>
+                      </a:solidFill>
+                      <a:prstDash val="solid"/>
+                      <a:round/>
+                      <a:headEnd type="none" w="med" len="med"/>
+                      <a:tailEnd type="none" w="med" len="med"/>
+                    </a:lnL>
+                    <a:lnR w="12700" cap="flat" cmpd="sng" algn="ctr">
+                      <a:solidFill>
+                        <a:schemeClr val="tx1"/>
+                      </a:solidFill>
+                      <a:prstDash val="solid"/>
+                      <a:round/>
+                      <a:headEnd type="none" w="med" len="med"/>
+                      <a:tailEnd type="none" w="med" len="med"/>
+                    </a:lnR>
+                    <a:lnT w="12700" cap="flat" cmpd="sng" algn="ctr">
+                      <a:solidFill>
+                        <a:schemeClr val="tx1"/>
+                      </a:solidFill>
+                      <a:prstDash val="solid"/>
+                      <a:round/>
+                      <a:headEnd type="none" w="med" len="med"/>
+                      <a:tailEnd type="none" w="med" len="med"/>
+                    </a:lnT>
+                    <a:lnB w="12700" cap="flat" cmpd="sng" algn="ctr">
+                      <a:solidFill>
+                        <a:schemeClr val="tx1"/>
+                      </a:solidFill>
+                      <a:prstDash val="solid"/>
+                      <a:round/>
+                      <a:headEnd type="none" w="med" len="med"/>
+                      <a:tailEnd type="none" w="med" len="med"/>
+                    </a:lnB>
+                  </a:tcPr>
+                </a:tc>
+                <a:tc>
+                  <a:txBody>
+                    <a:bodyPr/>
+                    <a:lstStyle/>
+                    <a:p>
+                      <a:r>
+                        <a:rPr lang="en-US" sz="1400"/>
+                        <a:t>source reference, exact quote, citation, model/schema/index version</a:t>
+                      </a:r>
+                    </a:p>
+                  </a:txBody>
+                  <a:tcPr marL="85320" marR="85320" marT="42660" marB="42660" anchor="ctr">
+                    <a:lnL w="12700" cap="flat" cmpd="sng" algn="ctr">
+                      <a:solidFill>
+                        <a:schemeClr val="tx1"/>
+                      </a:solidFill>
+                      <a:prstDash val="solid"/>
+                      <a:round/>
+                      <a:headEnd type="none" w="med" len="med"/>
+                      <a:tailEnd type="none" w="med" len="med"/>
+                    </a:lnL>
+                    <a:lnR w="12700" cap="flat" cmpd="sng" algn="ctr">
+                      <a:solidFill>
+                        <a:schemeClr val="tx1"/>
+                      </a:solidFill>
+                      <a:prstDash val="solid"/>
+                      <a:round/>
+                      <a:headEnd type="none" w="med" len="med"/>
+                      <a:tailEnd type="none" w="med" len="med"/>
+                    </a:lnR>
+                    <a:lnT w="12700" cap="flat" cmpd="sng" algn="ctr">
+                      <a:solidFill>
+                        <a:schemeClr val="tx1"/>
+                      </a:solidFill>
+                      <a:prstDash val="solid"/>
+                      <a:round/>
+                      <a:headEnd type="none" w="med" len="med"/>
+                      <a:tailEnd type="none" w="med" len="med"/>
+                    </a:lnT>
+                    <a:lnB w="12700" cap="flat" cmpd="sng" algn="ctr">
+                      <a:solidFill>
+                        <a:schemeClr val="tx1"/>
+                      </a:solidFill>
+                      <a:prstDash val="solid"/>
+                      <a:round/>
+                      <a:headEnd type="none" w="med" len="med"/>
+                      <a:tailEnd type="none" w="med" len="med"/>
+                    </a:lnB>
+                  </a:tcPr>
+                </a:tc>
+                <a:extLst>
+                  <a:ext uri="{0D108BD9-81ED-4DB2-BD59-A6C34878D82A}">
+                    <a16:rowId xmlns:a16="http://schemas.microsoft.com/office/drawing/2014/main" val="2155232753"/>
+                  </a:ext>
+                </a:extLst>
+              </a:tr>
+              <a:tr h="193115">
+                <a:tc>
+                  <a:txBody>
+                    <a:bodyPr/>
+                    <a:lstStyle/>
+                    <a:p>
+                      <a:r>
+                        <a:rPr lang="ko-KR" altLang="en-US" sz="1400"/>
+                        <a:t>미분류 개념</a:t>
+                      </a:r>
+                    </a:p>
+                  </a:txBody>
+                  <a:tcPr marL="85320" marR="85320" marT="42660" marB="42660" anchor="ctr">
+                    <a:lnL w="12700" cap="flat" cmpd="sng" algn="ctr">
+                      <a:solidFill>
+                        <a:schemeClr val="tx1"/>
+                      </a:solidFill>
+                      <a:prstDash val="solid"/>
+                      <a:round/>
+                      <a:headEnd type="none" w="med" len="med"/>
+                      <a:tailEnd type="none" w="med" len="med"/>
+                    </a:lnL>
+                    <a:lnR w="12700" cap="flat" cmpd="sng" algn="ctr">
+                      <a:solidFill>
+                        <a:schemeClr val="tx1"/>
+                      </a:solidFill>
+                      <a:prstDash val="solid"/>
+                      <a:round/>
+                      <a:headEnd type="none" w="med" len="med"/>
+                      <a:tailEnd type="none" w="med" len="med"/>
+                    </a:lnR>
+                    <a:lnT w="12700" cap="flat" cmpd="sng" algn="ctr">
+                      <a:solidFill>
+                        <a:schemeClr val="tx1"/>
+                      </a:solidFill>
+                      <a:prstDash val="solid"/>
+                      <a:round/>
+                      <a:headEnd type="none" w="med" len="med"/>
+                      <a:tailEnd type="none" w="med" len="med"/>
+                    </a:lnT>
+                    <a:lnB w="12700" cap="flat" cmpd="sng" algn="ctr">
+                      <a:solidFill>
+                        <a:schemeClr val="tx1"/>
+                      </a:solidFill>
+                      <a:prstDash val="solid"/>
+                      <a:round/>
+                      <a:headEnd type="none" w="med" len="med"/>
+                      <a:tailEnd type="none" w="med" len="med"/>
+                    </a:lnB>
+                  </a:tcPr>
+                </a:tc>
+                <a:tc>
+                  <a:txBody>
+                    <a:bodyPr/>
+                    <a:lstStyle/>
+                    <a:p>
+                      <a:r>
+                        <a:rPr lang="en-US" altLang="ko-KR" sz="1400" dirty="0"/>
+                        <a:t>unresolved</a:t>
+                      </a:r>
+                      <a:r>
+                        <a:rPr lang="ko-KR" altLang="en-US" sz="1400" dirty="0"/>
+                        <a:t>로 원문을 보존</a:t>
+                      </a:r>
+                    </a:p>
+                  </a:txBody>
+                  <a:tcPr marL="85320" marR="85320" marT="42660" marB="42660" anchor="ctr">
+                    <a:lnL w="12700" cap="flat" cmpd="sng" algn="ctr">
+                      <a:solidFill>
+                        <a:schemeClr val="tx1"/>
+                      </a:solidFill>
+                      <a:prstDash val="solid"/>
+                      <a:round/>
+                      <a:headEnd type="none" w="med" len="med"/>
+                      <a:tailEnd type="none" w="med" len="med"/>
+                    </a:lnL>
+                    <a:lnR w="12700" cap="flat" cmpd="sng" algn="ctr">
+                      <a:solidFill>
+                        <a:schemeClr val="tx1"/>
+                      </a:solidFill>
+                      <a:prstDash val="solid"/>
+                      <a:round/>
+                      <a:headEnd type="none" w="med" len="med"/>
+                      <a:tailEnd type="none" w="med" len="med"/>
+                    </a:lnR>
+                    <a:lnT w="12700" cap="flat" cmpd="sng" algn="ctr">
+                      <a:solidFill>
+                        <a:schemeClr val="tx1"/>
+                      </a:solidFill>
+                      <a:prstDash val="solid"/>
+                      <a:round/>
+                      <a:headEnd type="none" w="med" len="med"/>
+                      <a:tailEnd type="none" w="med" len="med"/>
+                    </a:lnT>
+                    <a:lnB w="12700" cap="flat" cmpd="sng" algn="ctr">
+                      <a:solidFill>
+                        <a:schemeClr val="tx1"/>
+                      </a:solidFill>
+                      <a:prstDash val="solid"/>
+                      <a:round/>
+                      <a:headEnd type="none" w="med" len="med"/>
+                      <a:tailEnd type="none" w="med" len="med"/>
+                    </a:lnB>
+                  </a:tcPr>
+                </a:tc>
+                <a:extLst>
+                  <a:ext uri="{0D108BD9-81ED-4DB2-BD59-A6C34878D82A}">
+                    <a16:rowId xmlns:a16="http://schemas.microsoft.com/office/drawing/2014/main" val="2216876417"/>
+                  </a:ext>
+                </a:extLst>
+              </a:tr>
+            </a:tbl>
+          </a:graphicData>
+        </a:graphic>
+      </p:graphicFrame>
+      <p:pic>
+        <p:nvPicPr>
+          <p:cNvPr id="6" name="Picture 5">
+            <a:extLst>
+              <a:ext uri="{FF2B5EF4-FFF2-40B4-BE49-F238E27FC236}">
+                <a16:creationId xmlns:a16="http://schemas.microsoft.com/office/drawing/2014/main" id="{0F08FCC7-86E7-4043-A643-0954FF9A88BD}"/>
+              </a:ext>
+            </a:extLst>
+          </p:cNvPr>
+          <p:cNvPicPr>
+            <a:picLocks noChangeAspect="1"/>
+          </p:cNvPicPr>
+          <p:nvPr/>
+        </p:nvPicPr>
+        <p:blipFill>
+          <a:blip r:embed="rId2"/>
+          <a:stretch>
+            <a:fillRect/>
+          </a:stretch>
+        </p:blipFill>
+        <p:spPr>
+          <a:xfrm>
+            <a:off x="8646977" y="414917"/>
+            <a:ext cx="1933845" cy="3143689"/>
+          </a:xfrm>
+          <a:prstGeom prst="rect">
+            <a:avLst/>
+          </a:prstGeom>
+        </p:spPr>
+      </p:pic>
+      <p:sp>
+        <p:nvSpPr>
+          <p:cNvPr id="9" name="TextBox 8">
+            <a:extLst>
+              <a:ext uri="{FF2B5EF4-FFF2-40B4-BE49-F238E27FC236}">
+                <a16:creationId xmlns:a16="http://schemas.microsoft.com/office/drawing/2014/main" id="{FB2B2ADD-D4F5-4224-910B-1C58865E9219}"/>
+              </a:ext>
+            </a:extLst>
+          </p:cNvPr>
+          <p:cNvSpPr txBox="1"/>
+          <p:nvPr/>
+        </p:nvSpPr>
+        <p:spPr>
+          <a:xfrm>
+            <a:off x="301079" y="3686162"/>
+            <a:ext cx="10913021" cy="2893100"/>
+          </a:xfrm>
+          <a:prstGeom prst="rect">
+            <a:avLst/>
+          </a:prstGeom>
+          <a:noFill/>
+        </p:spPr>
+        <p:txBody>
+          <a:bodyPr wrap="square">
+            <a:spAutoFit/>
+          </a:bodyPr>
+          <a:lstStyle/>
+          <a:p>
+            <a:pPr marL="0" marR="0" lvl="0" indent="0" algn="l" defTabSz="914400" rtl="0" eaLnBrk="0" fontAlgn="base" latinLnBrk="0" hangingPunct="0">
+              <a:lnSpc>
+                <a:spcPct val="100000"/>
+              </a:lnSpc>
+              <a:spcBef>
+                <a:spcPct val="0"/>
+              </a:spcBef>
+              <a:spcAft>
+                <a:spcPct val="0"/>
+              </a:spcAft>
+              <a:buClrTx/>
+              <a:buSzTx/>
+              <a:buFontTx/>
+              <a:buNone/>
+              <a:tabLst/>
+            </a:pPr>
+            <a:r>
+              <a:rPr kumimoji="0" lang="ko-KR" altLang="ko-KR" sz="1400" b="0" i="0" u="none" strike="noStrike" cap="none" normalizeH="0" baseline="0" dirty="0">
+                <a:ln>
+                  <a:noFill/>
+                </a:ln>
+                <a:solidFill>
+                  <a:schemeClr val="tx1"/>
+                </a:solidFill>
+                <a:effectLst/>
+                <a:latin typeface="Arial" panose="020B0604020202020204" pitchFamily="34" charset="0"/>
+              </a:rPr>
+              <a:t>아직 “정식 온톨로지”라고 부르기에는 부족한 부분이 있습니다.</a:t>
+            </a:r>
+            <a:endParaRPr kumimoji="0" lang="en-US" altLang="ko-KR" sz="1400" b="0" i="0" u="none" strike="noStrike" cap="none" normalizeH="0" baseline="0" dirty="0">
+              <a:ln>
+                <a:noFill/>
+              </a:ln>
+              <a:solidFill>
+                <a:schemeClr val="tx1"/>
+              </a:solidFill>
+              <a:effectLst/>
+              <a:latin typeface="Arial" panose="020B0604020202020204" pitchFamily="34" charset="0"/>
+            </a:endParaRPr>
+          </a:p>
+          <a:p>
+            <a:pPr marL="0" marR="0" lvl="0" indent="0" algn="l" defTabSz="914400" rtl="0" eaLnBrk="0" fontAlgn="base" latinLnBrk="0" hangingPunct="0">
+              <a:lnSpc>
+                <a:spcPct val="100000"/>
+              </a:lnSpc>
+              <a:spcBef>
+                <a:spcPct val="0"/>
+              </a:spcBef>
+              <a:spcAft>
+                <a:spcPct val="0"/>
+              </a:spcAft>
+              <a:buClrTx/>
+              <a:buSzTx/>
+              <a:buFontTx/>
+              <a:buNone/>
+              <a:tabLst/>
+            </a:pPr>
+            <a:endParaRPr kumimoji="0" lang="ko-KR" altLang="ko-KR" sz="1400" b="0" i="0" u="none" strike="noStrike" cap="none" normalizeH="0" baseline="0" dirty="0">
+              <a:ln>
+                <a:noFill/>
+              </a:ln>
+              <a:solidFill>
+                <a:schemeClr val="tx1"/>
+              </a:solidFill>
+              <a:effectLst/>
+              <a:latin typeface="Arial" panose="020B0604020202020204" pitchFamily="34" charset="0"/>
+            </a:endParaRPr>
+          </a:p>
+          <a:p>
+            <a:pPr marL="0" marR="0" lvl="0" indent="0" algn="l" defTabSz="914400" rtl="0" eaLnBrk="0" fontAlgn="base" latinLnBrk="0" hangingPunct="0">
+              <a:lnSpc>
+                <a:spcPct val="100000"/>
+              </a:lnSpc>
+              <a:spcBef>
+                <a:spcPct val="0"/>
+              </a:spcBef>
+              <a:spcAft>
+                <a:spcPct val="0"/>
+              </a:spcAft>
+              <a:buClrTx/>
+              <a:buSzTx/>
+              <a:buFontTx/>
+              <a:buChar char="•"/>
+              <a:tabLst/>
+            </a:pPr>
+            <a:r>
+              <a:rPr kumimoji="0" lang="ko-KR" altLang="ko-KR" sz="1400" b="0" i="0" u="none" strike="noStrike" cap="none" normalizeH="0" baseline="0" dirty="0">
+                <a:ln>
+                  <a:noFill/>
+                </a:ln>
+                <a:solidFill>
+                  <a:schemeClr val="tx1"/>
+                </a:solidFill>
+                <a:effectLst/>
+                <a:latin typeface="Arial" panose="020B0604020202020204" pitchFamily="34" charset="0"/>
+              </a:rPr>
+              <a:t>기술 개념이 DB가 아니라 코드 레지스트리에 고정돼 있음</a:t>
+            </a:r>
+          </a:p>
+          <a:p>
+            <a:pPr marL="0" marR="0" lvl="0" indent="0" algn="l" defTabSz="914400" rtl="0" eaLnBrk="0" fontAlgn="base" latinLnBrk="0" hangingPunct="0">
+              <a:lnSpc>
+                <a:spcPct val="100000"/>
+              </a:lnSpc>
+              <a:spcBef>
+                <a:spcPct val="0"/>
+              </a:spcBef>
+              <a:spcAft>
+                <a:spcPct val="0"/>
+              </a:spcAft>
+              <a:buClrTx/>
+              <a:buSzTx/>
+              <a:buFontTx/>
+              <a:buChar char="•"/>
+              <a:tabLst/>
+            </a:pPr>
+            <a:r>
+              <a:rPr kumimoji="0" lang="ko-KR" altLang="ko-KR" sz="1400" b="0" i="0" u="none" strike="noStrike" cap="none" normalizeH="0" baseline="0" dirty="0">
+                <a:ln>
+                  <a:noFill/>
+                </a:ln>
+                <a:solidFill>
+                  <a:schemeClr val="tx1"/>
+                </a:solidFill>
+                <a:effectLst/>
+                <a:latin typeface="Arial" panose="020B0604020202020204" pitchFamily="34" charset="0"/>
+              </a:rPr>
+              <a:t>Skill, Role, Organization 등이 독립적인 영속 엔티티가 아님</a:t>
+            </a:r>
+          </a:p>
+          <a:p>
+            <a:pPr marL="0" marR="0" lvl="0" indent="0" algn="l" defTabSz="914400" rtl="0" eaLnBrk="0" fontAlgn="base" latinLnBrk="0" hangingPunct="0">
+              <a:lnSpc>
+                <a:spcPct val="100000"/>
+              </a:lnSpc>
+              <a:spcBef>
+                <a:spcPct val="0"/>
+              </a:spcBef>
+              <a:spcAft>
+                <a:spcPct val="0"/>
+              </a:spcAft>
+              <a:buClrTx/>
+              <a:buSzTx/>
+              <a:buFontTx/>
+              <a:buChar char="•"/>
+              <a:tabLst/>
+            </a:pPr>
+            <a:r>
+              <a:rPr kumimoji="0" lang="ko-KR" altLang="ko-KR" sz="1400" b="0" i="0" u="none" strike="noStrike" cap="none" normalizeH="0" baseline="0" dirty="0">
+                <a:ln>
+                  <a:noFill/>
+                </a:ln>
+                <a:solidFill>
+                  <a:schemeClr val="tx1"/>
+                </a:solidFill>
+                <a:effectLst/>
+                <a:latin typeface="Arial" panose="020B0604020202020204" pitchFamily="34" charset="0"/>
+              </a:rPr>
+              <a:t>개념 계층과 관계 유형이 아직 제한적임</a:t>
+            </a:r>
+          </a:p>
+          <a:p>
+            <a:pPr marL="0" marR="0" lvl="0" indent="0" algn="l" defTabSz="914400" rtl="0" eaLnBrk="0" fontAlgn="base" latinLnBrk="0" hangingPunct="0">
+              <a:lnSpc>
+                <a:spcPct val="100000"/>
+              </a:lnSpc>
+              <a:spcBef>
+                <a:spcPct val="0"/>
+              </a:spcBef>
+              <a:spcAft>
+                <a:spcPct val="0"/>
+              </a:spcAft>
+              <a:buClrTx/>
+              <a:buSzTx/>
+              <a:buFontTx/>
+              <a:buChar char="•"/>
+              <a:tabLst/>
+            </a:pPr>
+            <a:r>
+              <a:rPr kumimoji="0" lang="ko-KR" altLang="ko-KR" sz="1400" b="0" i="0" u="none" strike="noStrike" cap="none" normalizeH="0" baseline="0" dirty="0">
+                <a:ln>
+                  <a:noFill/>
+                </a:ln>
+                <a:solidFill>
+                  <a:schemeClr val="tx1"/>
+                </a:solidFill>
+                <a:effectLst/>
+                <a:latin typeface="Arial" panose="020B0604020202020204" pitchFamily="34" charset="0"/>
+              </a:rPr>
+              <a:t>온톨로지 버전과 변경 이력이 별도로 관리되지 않음</a:t>
+            </a:r>
+          </a:p>
+          <a:p>
+            <a:pPr marL="0" marR="0" lvl="0" indent="0" algn="l" defTabSz="914400" rtl="0" eaLnBrk="0" fontAlgn="base" latinLnBrk="0" hangingPunct="0">
+              <a:lnSpc>
+                <a:spcPct val="100000"/>
+              </a:lnSpc>
+              <a:spcBef>
+                <a:spcPct val="0"/>
+              </a:spcBef>
+              <a:spcAft>
+                <a:spcPct val="0"/>
+              </a:spcAft>
+              <a:buClrTx/>
+              <a:buSzTx/>
+              <a:buFontTx/>
+              <a:buChar char="•"/>
+              <a:tabLst/>
+            </a:pPr>
+            <a:r>
+              <a:rPr kumimoji="0" lang="ko-KR" altLang="ko-KR" sz="1400" b="0" i="0" u="none" strike="noStrike" cap="none" normalizeH="0" baseline="0" dirty="0">
+                <a:ln>
+                  <a:noFill/>
+                </a:ln>
+                <a:solidFill>
+                  <a:schemeClr val="tx1"/>
+                </a:solidFill>
+                <a:effectLst/>
+                <a:latin typeface="Arial" panose="020B0604020202020204" pitchFamily="34" charset="0"/>
+              </a:rPr>
+              <a:t>추론 엔진이나 그래프 질의가 없음</a:t>
+            </a:r>
+          </a:p>
+          <a:p>
+            <a:pPr marL="0" marR="0" lvl="0" indent="0" algn="l" defTabSz="914400" rtl="0" eaLnBrk="0" fontAlgn="base" latinLnBrk="0" hangingPunct="0">
+              <a:lnSpc>
+                <a:spcPct val="100000"/>
+              </a:lnSpc>
+              <a:spcBef>
+                <a:spcPct val="0"/>
+              </a:spcBef>
+              <a:spcAft>
+                <a:spcPct val="0"/>
+              </a:spcAft>
+              <a:buClrTx/>
+              <a:buSzTx/>
+              <a:buFontTx/>
+              <a:buChar char="•"/>
+              <a:tabLst/>
+            </a:pPr>
+            <a:r>
+              <a:rPr kumimoji="0" lang="ko-KR" altLang="ko-KR" sz="1400" b="0" i="0" u="none" strike="noStrike" cap="none" normalizeH="0" baseline="0" dirty="0">
+                <a:ln>
+                  <a:noFill/>
+                </a:ln>
+                <a:solidFill>
+                  <a:schemeClr val="tx1"/>
+                </a:solidFill>
+                <a:effectLst/>
+                <a:latin typeface="Arial" panose="020B0604020202020204" pitchFamily="34" charset="0"/>
+              </a:rPr>
+              <a:t>RDF, OWL, SKOS와 같은 표준 온톨로지 표현을 사용하지 않음</a:t>
+            </a:r>
+            <a:endParaRPr kumimoji="0" lang="en-US" altLang="ko-KR" sz="1400" b="0" i="0" u="none" strike="noStrike" cap="none" normalizeH="0" baseline="0" dirty="0">
+              <a:ln>
+                <a:noFill/>
+              </a:ln>
+              <a:solidFill>
+                <a:schemeClr val="tx1"/>
+              </a:solidFill>
+              <a:effectLst/>
+              <a:latin typeface="Arial" panose="020B0604020202020204" pitchFamily="34" charset="0"/>
+            </a:endParaRPr>
+          </a:p>
+          <a:p>
+            <a:pPr marL="0" marR="0" lvl="0" indent="0" algn="l" defTabSz="914400" rtl="0" eaLnBrk="0" fontAlgn="base" latinLnBrk="0" hangingPunct="0">
+              <a:lnSpc>
+                <a:spcPct val="100000"/>
+              </a:lnSpc>
+              <a:spcBef>
+                <a:spcPct val="0"/>
+              </a:spcBef>
+              <a:spcAft>
+                <a:spcPct val="0"/>
+              </a:spcAft>
+              <a:buClrTx/>
+              <a:buSzTx/>
+              <a:tabLst/>
+            </a:pPr>
+            <a:endParaRPr kumimoji="0" lang="ko-KR" altLang="ko-KR" sz="1400" b="0" i="0" u="none" strike="noStrike" cap="none" normalizeH="0" baseline="0" dirty="0">
+              <a:ln>
+                <a:noFill/>
+              </a:ln>
+              <a:solidFill>
+                <a:schemeClr val="tx1"/>
+              </a:solidFill>
+              <a:effectLst/>
+              <a:latin typeface="Arial" panose="020B0604020202020204" pitchFamily="34" charset="0"/>
+            </a:endParaRPr>
+          </a:p>
+          <a:p>
+            <a:pPr marL="0" marR="0" lvl="0" indent="0" algn="l" defTabSz="914400" rtl="0" eaLnBrk="0" fontAlgn="base" latinLnBrk="0" hangingPunct="0">
+              <a:lnSpc>
+                <a:spcPct val="100000"/>
+              </a:lnSpc>
+              <a:spcBef>
+                <a:spcPct val="0"/>
+              </a:spcBef>
+              <a:spcAft>
+                <a:spcPct val="0"/>
+              </a:spcAft>
+              <a:buClrTx/>
+              <a:buSzTx/>
+              <a:buFontTx/>
+              <a:buNone/>
+              <a:tabLst/>
+            </a:pPr>
+            <a:r>
+              <a:rPr kumimoji="0" lang="ko-KR" altLang="ko-KR" sz="1400" b="0" i="0" u="none" strike="noStrike" cap="none" normalizeH="0" baseline="0" dirty="0">
+                <a:ln>
+                  <a:noFill/>
+                </a:ln>
+                <a:solidFill>
+                  <a:schemeClr val="tx1"/>
+                </a:solidFill>
+                <a:effectLst/>
+                <a:latin typeface="Arial" panose="020B0604020202020204" pitchFamily="34" charset="0"/>
+              </a:rPr>
+              <a:t>따라서 포트폴리오에서는 다음처럼 표현하는 게 정확합니다.</a:t>
+            </a:r>
+          </a:p>
+          <a:p>
+            <a:pPr marL="0" marR="0" lvl="0" indent="0" algn="l" defTabSz="914400" rtl="0" eaLnBrk="0" fontAlgn="base" latinLnBrk="0" hangingPunct="0">
+              <a:lnSpc>
+                <a:spcPct val="100000"/>
+              </a:lnSpc>
+              <a:spcBef>
+                <a:spcPct val="0"/>
+              </a:spcBef>
+              <a:spcAft>
+                <a:spcPct val="0"/>
+              </a:spcAft>
+              <a:buClrTx/>
+              <a:buSzTx/>
+              <a:buFontTx/>
+              <a:buNone/>
+              <a:tabLst/>
+            </a:pPr>
+            <a:r>
+              <a:rPr kumimoji="0" lang="ko-KR" altLang="ko-KR" sz="1400" b="0" i="0" u="none" strike="noStrike" cap="none" normalizeH="0" baseline="0" dirty="0">
+                <a:ln>
+                  <a:noFill/>
+                </a:ln>
+                <a:solidFill>
+                  <a:schemeClr val="tx1"/>
+                </a:solidFill>
+                <a:effectLst/>
+                <a:latin typeface="Arial" panose="020B0604020202020204" pitchFamily="34" charset="0"/>
+              </a:rPr>
+              <a:t>기술 별칭·관련 관계·미해결 표현을 관리하는 경량 도메인 온톨로지와 원문 근거 기반 의미 모델을 설계했다.</a:t>
+            </a:r>
+          </a:p>
+          <a:p>
+            <a:pPr marL="0" marR="0" lvl="0" indent="0" algn="l" defTabSz="914400" rtl="0" eaLnBrk="0" fontAlgn="base" latinLnBrk="0" hangingPunct="0">
+              <a:lnSpc>
+                <a:spcPct val="100000"/>
+              </a:lnSpc>
+              <a:spcBef>
+                <a:spcPct val="0"/>
+              </a:spcBef>
+              <a:spcAft>
+                <a:spcPct val="0"/>
+              </a:spcAft>
+              <a:buClrTx/>
+              <a:buSzTx/>
+              <a:buFontTx/>
+              <a:buNone/>
+              <a:tabLst/>
+            </a:pPr>
+            <a:r>
+              <a:rPr kumimoji="0" lang="ko-KR" altLang="ko-KR" sz="1400" b="0" i="0" u="none" strike="noStrike" cap="none" normalizeH="0" baseline="0" dirty="0">
+                <a:ln>
+                  <a:noFill/>
+                </a:ln>
+                <a:solidFill>
+                  <a:schemeClr val="tx1"/>
+                </a:solidFill>
+                <a:effectLst/>
+                <a:latin typeface="Arial" panose="020B0604020202020204" pitchFamily="34" charset="0"/>
+              </a:rPr>
+              <a:t>“온톨로지를 완성했다” 또는 “지식 그래프를 구축했다”는 아직 과한 표현입니다. 그리고 LangGraph는 분석 절차를 연결하는 워크플로 그래프이지, 지식 그래프는 아닙니다.</a:t>
+            </a:r>
+          </a:p>
+        </p:txBody>
+      </p:sp>
+      <p:sp>
+        <p:nvSpPr>
+          <p:cNvPr id="10" name="TextBox 9">
+            <a:extLst>
+              <a:ext uri="{FF2B5EF4-FFF2-40B4-BE49-F238E27FC236}">
+                <a16:creationId xmlns:a16="http://schemas.microsoft.com/office/drawing/2014/main" id="{76BFD3E9-50C1-4039-A262-663ED86A6D19}"/>
+              </a:ext>
+            </a:extLst>
+          </p:cNvPr>
+          <p:cNvSpPr txBox="1"/>
+          <p:nvPr/>
+        </p:nvSpPr>
+        <p:spPr>
+          <a:xfrm>
+            <a:off x="301079" y="177800"/>
+            <a:ext cx="1651414" cy="369332"/>
+          </a:xfrm>
+          <a:prstGeom prst="rect">
+            <a:avLst/>
+          </a:prstGeom>
+          <a:noFill/>
+        </p:spPr>
+        <p:txBody>
+          <a:bodyPr wrap="none" rtlCol="0">
+            <a:spAutoFit/>
+          </a:bodyPr>
+          <a:lstStyle/>
+          <a:p>
+            <a:r>
+              <a:rPr lang="ko-KR" altLang="en-US" b="1" dirty="0">
+                <a:highlight>
+                  <a:srgbClr val="FFFF00"/>
+                </a:highlight>
+              </a:rPr>
+              <a:t>온톨로지 관점</a:t>
+            </a:r>
+          </a:p>
+        </p:txBody>
+      </p:sp>
+    </p:spTree>
+    <p:extLst>
+      <p:ext uri="{BB962C8B-B14F-4D97-AF65-F5344CB8AC3E}">
+        <p14:creationId xmlns:p14="http://schemas.microsoft.com/office/powerpoint/2010/main" val="3274704943"/>
+      </p:ext>
+    </p:extLst>
+  </p:cSld>
+  <p:clrMapOvr>
+    <a:masterClrMapping/>
+  </p:clrMapOvr>
+</p:sld>
+</file>
+
+<file path=ppt/slides/slide22.xml><?xml version="1.0" encoding="utf-8"?>
+<p:sld xmlns:a="http://schemas.openxmlformats.org/drawingml/2006/main" xmlns:r="http://schemas.openxmlformats.org/officeDocument/2006/relationships" xmlns:p="http://schemas.openxmlformats.org/presentationml/2006/main">
+  <p:cSld>
+    <p:spTree>
+      <p:nvGrpSpPr>
+        <p:cNvPr id="1" name=""/>
+        <p:cNvGrpSpPr/>
+        <p:nvPr/>
+      </p:nvGrpSpPr>
+      <p:grpSpPr>
+        <a:xfrm>
+          <a:off x="0" y="0"/>
+          <a:ext cx="0" cy="0"/>
+          <a:chOff x="0" y="0"/>
+          <a:chExt cx="0" cy="0"/>
+        </a:xfrm>
+      </p:grpSpPr>
+      <p:sp>
+        <p:nvSpPr>
+          <p:cNvPr id="10" name="TextBox 9">
+            <a:extLst>
+              <a:ext uri="{FF2B5EF4-FFF2-40B4-BE49-F238E27FC236}">
+                <a16:creationId xmlns:a16="http://schemas.microsoft.com/office/drawing/2014/main" id="{76BFD3E9-50C1-4039-A262-663ED86A6D19}"/>
+              </a:ext>
+            </a:extLst>
+          </p:cNvPr>
+          <p:cNvSpPr txBox="1"/>
+          <p:nvPr/>
+        </p:nvSpPr>
+        <p:spPr>
+          <a:xfrm>
+            <a:off x="301079" y="177800"/>
+            <a:ext cx="2194832" cy="369332"/>
+          </a:xfrm>
+          <a:prstGeom prst="rect">
+            <a:avLst/>
+          </a:prstGeom>
+          <a:noFill/>
+        </p:spPr>
+        <p:txBody>
+          <a:bodyPr wrap="none" rtlCol="0">
+            <a:spAutoFit/>
+          </a:bodyPr>
+          <a:lstStyle/>
+          <a:p>
+            <a:r>
+              <a:rPr lang="ko-KR" altLang="en-US" b="1" dirty="0">
+                <a:highlight>
+                  <a:srgbClr val="FFFF00"/>
+                </a:highlight>
+              </a:rPr>
+              <a:t>데이터 레이크 관점</a:t>
+            </a:r>
+          </a:p>
+        </p:txBody>
+      </p:sp>
+      <p:sp>
+        <p:nvSpPr>
+          <p:cNvPr id="7" name="TextBox 6">
+            <a:extLst>
+              <a:ext uri="{FF2B5EF4-FFF2-40B4-BE49-F238E27FC236}">
+                <a16:creationId xmlns:a16="http://schemas.microsoft.com/office/drawing/2014/main" id="{958478B6-C347-49D3-AA68-A125163FEDEA}"/>
+              </a:ext>
+            </a:extLst>
+          </p:cNvPr>
+          <p:cNvSpPr txBox="1"/>
+          <p:nvPr/>
+        </p:nvSpPr>
+        <p:spPr>
+          <a:xfrm>
+            <a:off x="301079" y="547132"/>
+            <a:ext cx="10325100" cy="646331"/>
+          </a:xfrm>
+          <a:prstGeom prst="rect">
+            <a:avLst/>
+          </a:prstGeom>
+          <a:noFill/>
+        </p:spPr>
+        <p:txBody>
+          <a:bodyPr wrap="square">
+            <a:spAutoFit/>
+          </a:bodyPr>
+          <a:lstStyle/>
+          <a:p>
+            <a:r>
+              <a:rPr lang="en-US" altLang="ko-KR"/>
+              <a:t>CareerMemory</a:t>
+            </a:r>
+            <a:r>
+              <a:rPr lang="ko-KR" altLang="en-US"/>
+              <a:t>는 데이터 레이크와 잘 맞는 도메인</a:t>
+            </a:r>
+            <a:endParaRPr lang="en-US" altLang="ko-KR"/>
+          </a:p>
+          <a:p>
+            <a:r>
+              <a:rPr lang="ko-KR" altLang="en-US"/>
+              <a:t>한 사용자의 커리어 정보에는 다음처럼 이질적인 데이터가 계속 쌓이기 때문</a:t>
+            </a:r>
+            <a:endParaRPr lang="ko-KR" altLang="en-US" dirty="0"/>
+          </a:p>
+        </p:txBody>
+      </p:sp>
+      <p:sp>
+        <p:nvSpPr>
+          <p:cNvPr id="11" name="TextBox 10">
+            <a:extLst>
+              <a:ext uri="{FF2B5EF4-FFF2-40B4-BE49-F238E27FC236}">
+                <a16:creationId xmlns:a16="http://schemas.microsoft.com/office/drawing/2014/main" id="{DCB66CF0-48E5-4D4A-B262-5C4390F0F7BF}"/>
+              </a:ext>
+            </a:extLst>
+          </p:cNvPr>
+          <p:cNvSpPr txBox="1"/>
+          <p:nvPr/>
+        </p:nvSpPr>
+        <p:spPr>
+          <a:xfrm>
+            <a:off x="301079" y="1193463"/>
+            <a:ext cx="6096000" cy="2246769"/>
+          </a:xfrm>
+          <a:prstGeom prst="rect">
+            <a:avLst/>
+          </a:prstGeom>
+          <a:noFill/>
+        </p:spPr>
+        <p:txBody>
+          <a:bodyPr wrap="square">
+            <a:spAutoFit/>
+          </a:bodyPr>
+          <a:lstStyle/>
+          <a:p>
+            <a:pPr>
+              <a:buFont typeface="Arial" panose="020B0604020202020204" pitchFamily="34" charset="0"/>
+              <a:buChar char="•"/>
+            </a:pPr>
+            <a:r>
+              <a:rPr lang="ko-KR" altLang="en-US" sz="1400" dirty="0"/>
+              <a:t>대화 원문</a:t>
+            </a:r>
+          </a:p>
+          <a:p>
+            <a:pPr>
+              <a:buFont typeface="Arial" panose="020B0604020202020204" pitchFamily="34" charset="0"/>
+              <a:buChar char="•"/>
+            </a:pPr>
+            <a:r>
+              <a:rPr lang="en-US" altLang="ko-KR" sz="1400" dirty="0"/>
+              <a:t>PDF·TXT·</a:t>
+            </a:r>
+            <a:r>
+              <a:rPr lang="ko-KR" altLang="en-US" sz="1400" dirty="0"/>
+              <a:t>이미지</a:t>
+            </a:r>
+          </a:p>
+          <a:p>
+            <a:pPr>
+              <a:buFont typeface="Arial" panose="020B0604020202020204" pitchFamily="34" charset="0"/>
+              <a:buChar char="•"/>
+            </a:pPr>
+            <a:r>
+              <a:rPr lang="ko-KR" altLang="en-US" sz="1400" dirty="0"/>
+              <a:t>채용공고</a:t>
+            </a:r>
+          </a:p>
+          <a:p>
+            <a:pPr>
+              <a:buFont typeface="Arial" panose="020B0604020202020204" pitchFamily="34" charset="0"/>
+              <a:buChar char="•"/>
+            </a:pPr>
+            <a:r>
+              <a:rPr lang="en-US" altLang="ko-KR" sz="1400" dirty="0"/>
+              <a:t>OCR·</a:t>
+            </a:r>
+            <a:r>
+              <a:rPr lang="ko-KR" altLang="en-US" sz="1400" dirty="0"/>
+              <a:t>파싱 결과</a:t>
+            </a:r>
+          </a:p>
+          <a:p>
+            <a:pPr>
+              <a:buFont typeface="Arial" panose="020B0604020202020204" pitchFamily="34" charset="0"/>
+              <a:buChar char="•"/>
+            </a:pPr>
+            <a:r>
+              <a:rPr lang="en-US" altLang="ko-KR" sz="1400" dirty="0"/>
+              <a:t>AI </a:t>
+            </a:r>
+            <a:r>
+              <a:rPr lang="ko-KR" altLang="en-US" sz="1400" dirty="0"/>
+              <a:t>분석 결과</a:t>
+            </a:r>
+          </a:p>
+          <a:p>
+            <a:pPr>
+              <a:buFont typeface="Arial" panose="020B0604020202020204" pitchFamily="34" charset="0"/>
+              <a:buChar char="•"/>
+            </a:pPr>
+            <a:r>
+              <a:rPr lang="ko-KR" altLang="en-US" sz="1400" dirty="0"/>
+              <a:t>구조화된 경험</a:t>
+            </a:r>
+          </a:p>
+          <a:p>
+            <a:pPr>
+              <a:buFont typeface="Arial" panose="020B0604020202020204" pitchFamily="34" charset="0"/>
+              <a:buChar char="•"/>
+            </a:pPr>
+            <a:r>
+              <a:rPr lang="ko-KR" altLang="en-US" sz="1400" dirty="0"/>
+              <a:t>기술</a:t>
+            </a:r>
+            <a:r>
+              <a:rPr lang="en-US" altLang="ko-KR" sz="1400" dirty="0"/>
+              <a:t>·</a:t>
+            </a:r>
+            <a:r>
+              <a:rPr lang="ko-KR" altLang="en-US" sz="1400" dirty="0"/>
+              <a:t>성과 지표</a:t>
+            </a:r>
+          </a:p>
+          <a:p>
+            <a:pPr>
+              <a:buFont typeface="Arial" panose="020B0604020202020204" pitchFamily="34" charset="0"/>
+              <a:buChar char="•"/>
+            </a:pPr>
+            <a:r>
+              <a:rPr lang="ko-KR" altLang="en-US" sz="1400" dirty="0"/>
+              <a:t>임베딩 벡터</a:t>
+            </a:r>
+          </a:p>
+          <a:p>
+            <a:pPr>
+              <a:buFont typeface="Arial" panose="020B0604020202020204" pitchFamily="34" charset="0"/>
+              <a:buChar char="•"/>
+            </a:pPr>
+            <a:r>
+              <a:rPr lang="ko-KR" altLang="en-US" sz="1400" dirty="0"/>
+              <a:t>경험과 공고의 연결 관계</a:t>
+            </a:r>
+          </a:p>
+          <a:p>
+            <a:r>
+              <a:rPr lang="ko-KR" altLang="en-US" sz="1400" dirty="0"/>
+              <a:t>현재도 원본과 가공 데이터를 분리</a:t>
+            </a:r>
+          </a:p>
+        </p:txBody>
+      </p:sp>
+      <p:pic>
+        <p:nvPicPr>
+          <p:cNvPr id="8" name="Picture 7">
+            <a:extLst>
+              <a:ext uri="{FF2B5EF4-FFF2-40B4-BE49-F238E27FC236}">
+                <a16:creationId xmlns:a16="http://schemas.microsoft.com/office/drawing/2014/main" id="{B4B7E45A-1AEA-4ED0-A202-27C906734B5C}"/>
+              </a:ext>
+            </a:extLst>
+          </p:cNvPr>
+          <p:cNvPicPr>
+            <a:picLocks noChangeAspect="1"/>
+          </p:cNvPicPr>
+          <p:nvPr/>
+        </p:nvPicPr>
+        <p:blipFill>
+          <a:blip r:embed="rId2"/>
+          <a:stretch>
+            <a:fillRect/>
+          </a:stretch>
+        </p:blipFill>
+        <p:spPr>
+          <a:xfrm>
+            <a:off x="4715421" y="1464041"/>
+            <a:ext cx="5029902" cy="2876951"/>
+          </a:xfrm>
+          <a:prstGeom prst="rect">
+            <a:avLst/>
+          </a:prstGeom>
+        </p:spPr>
+      </p:pic>
+      <p:grpSp>
+        <p:nvGrpSpPr>
+          <p:cNvPr id="17" name="Group 16">
+            <a:extLst>
+              <a:ext uri="{FF2B5EF4-FFF2-40B4-BE49-F238E27FC236}">
+                <a16:creationId xmlns:a16="http://schemas.microsoft.com/office/drawing/2014/main" id="{0FDDD2CA-296E-4868-91C5-BF98EAF3EDCB}"/>
+              </a:ext>
+            </a:extLst>
+          </p:cNvPr>
+          <p:cNvGrpSpPr/>
+          <p:nvPr/>
+        </p:nvGrpSpPr>
+        <p:grpSpPr>
+          <a:xfrm>
+            <a:off x="301079" y="4479491"/>
+            <a:ext cx="6096000" cy="1969770"/>
+            <a:chOff x="301079" y="4717534"/>
+            <a:chExt cx="6096000" cy="1969770"/>
+          </a:xfrm>
+        </p:grpSpPr>
+        <p:sp>
+          <p:nvSpPr>
+            <p:cNvPr id="13" name="TextBox 12">
+              <a:extLst>
+                <a:ext uri="{FF2B5EF4-FFF2-40B4-BE49-F238E27FC236}">
+                  <a16:creationId xmlns:a16="http://schemas.microsoft.com/office/drawing/2014/main" id="{BD55ACEC-6896-4ABB-BE22-AF63CB2CEA01}"/>
+                </a:ext>
+              </a:extLst>
+            </p:cNvPr>
+            <p:cNvSpPr txBox="1"/>
+            <p:nvPr/>
+          </p:nvSpPr>
+          <p:spPr>
+            <a:xfrm>
+              <a:off x="301079" y="4717534"/>
+              <a:ext cx="6096000" cy="369332"/>
+            </a:xfrm>
+            <a:prstGeom prst="rect">
+              <a:avLst/>
+            </a:prstGeom>
+            <a:noFill/>
+          </p:spPr>
+          <p:txBody>
+            <a:bodyPr wrap="square">
+              <a:spAutoFit/>
+            </a:bodyPr>
+            <a:lstStyle/>
+            <a:p>
+              <a:r>
+                <a:rPr lang="ko-KR" altLang="en-US" dirty="0"/>
+                <a:t>데이터 레이크 친화적인 기반</a:t>
+              </a:r>
+            </a:p>
+          </p:txBody>
+        </p:sp>
+        <p:sp>
+          <p:nvSpPr>
+            <p:cNvPr id="16" name="TextBox 15">
+              <a:extLst>
+                <a:ext uri="{FF2B5EF4-FFF2-40B4-BE49-F238E27FC236}">
+                  <a16:creationId xmlns:a16="http://schemas.microsoft.com/office/drawing/2014/main" id="{2CCB04E5-8FF8-4F8A-AF76-80D1F2D9200B}"/>
+                </a:ext>
+              </a:extLst>
+            </p:cNvPr>
+            <p:cNvSpPr txBox="1"/>
+            <p:nvPr/>
+          </p:nvSpPr>
+          <p:spPr>
+            <a:xfrm>
+              <a:off x="301079" y="5086866"/>
+              <a:ext cx="6096000" cy="1600438"/>
+            </a:xfrm>
+            <a:prstGeom prst="rect">
+              <a:avLst/>
+            </a:prstGeom>
+            <a:noFill/>
+          </p:spPr>
+          <p:txBody>
+            <a:bodyPr wrap="square">
+              <a:spAutoFit/>
+            </a:bodyPr>
+            <a:lstStyle/>
+            <a:p>
+              <a:pPr marL="0" marR="0" lvl="0" indent="0" algn="l" defTabSz="914400" rtl="0" eaLnBrk="0" fontAlgn="base" latinLnBrk="0" hangingPunct="0">
+                <a:lnSpc>
+                  <a:spcPct val="100000"/>
+                </a:lnSpc>
+                <a:spcBef>
+                  <a:spcPct val="0"/>
+                </a:spcBef>
+                <a:spcAft>
+                  <a:spcPct val="0"/>
+                </a:spcAft>
+                <a:buClrTx/>
+                <a:buSzTx/>
+                <a:buFontTx/>
+                <a:buChar char="•"/>
+                <a:tabLst/>
+              </a:pPr>
+              <a:r>
+                <a:rPr kumimoji="0" lang="ko-KR" altLang="ko-KR" sz="1400" b="0" i="0" u="none" strike="noStrike" cap="none" normalizeH="0" baseline="0" dirty="0">
+                  <a:ln>
+                    <a:noFill/>
+                  </a:ln>
+                  <a:solidFill>
+                    <a:schemeClr val="tx1"/>
+                  </a:solidFill>
+                  <a:effectLst/>
+                  <a:latin typeface="Arial" panose="020B0604020202020204" pitchFamily="34" charset="0"/>
+                </a:rPr>
+                <a:t>첨부파일 원본 바이너리와 추출 텍스트를 함께 보존</a:t>
+              </a:r>
+            </a:p>
+            <a:p>
+              <a:pPr marL="0" marR="0" lvl="0" indent="0" algn="l" defTabSz="914400" rtl="0" eaLnBrk="0" fontAlgn="base" latinLnBrk="0" hangingPunct="0">
+                <a:lnSpc>
+                  <a:spcPct val="100000"/>
+                </a:lnSpc>
+                <a:spcBef>
+                  <a:spcPct val="0"/>
+                </a:spcBef>
+                <a:spcAft>
+                  <a:spcPct val="0"/>
+                </a:spcAft>
+                <a:buClrTx/>
+                <a:buSzTx/>
+                <a:buFontTx/>
+                <a:buChar char="•"/>
+                <a:tabLst/>
+              </a:pPr>
+              <a:r>
+                <a:rPr kumimoji="0" lang="ko-KR" altLang="ko-KR" sz="1400" b="0" i="0" u="none" strike="noStrike" cap="none" normalizeH="0" baseline="0" dirty="0">
+                  <a:ln>
+                    <a:noFill/>
+                  </a:ln>
+                  <a:solidFill>
+                    <a:schemeClr val="tx1"/>
+                  </a:solidFill>
+                  <a:effectLst/>
+                  <a:latin typeface="Arial" panose="020B0604020202020204" pitchFamily="34" charset="0"/>
+                </a:rPr>
+                <a:t>SHA-256 해시와 파서 버전 관리</a:t>
+              </a:r>
+            </a:p>
+            <a:p>
+              <a:pPr marL="0" marR="0" lvl="0" indent="0" algn="l" defTabSz="914400" rtl="0" eaLnBrk="0" fontAlgn="base" latinLnBrk="0" hangingPunct="0">
+                <a:lnSpc>
+                  <a:spcPct val="100000"/>
+                </a:lnSpc>
+                <a:spcBef>
+                  <a:spcPct val="0"/>
+                </a:spcBef>
+                <a:spcAft>
+                  <a:spcPct val="0"/>
+                </a:spcAft>
+                <a:buClrTx/>
+                <a:buSzTx/>
+                <a:buFontTx/>
+                <a:buChar char="•"/>
+                <a:tabLst/>
+              </a:pPr>
+              <a:r>
+                <a:rPr kumimoji="0" lang="ko-KR" altLang="ko-KR" sz="1400" b="0" i="0" u="none" strike="noStrike" cap="none" normalizeH="0" baseline="0" dirty="0">
+                  <a:ln>
+                    <a:noFill/>
+                  </a:ln>
+                  <a:solidFill>
+                    <a:schemeClr val="tx1"/>
+                  </a:solidFill>
+                  <a:effectLst/>
+                  <a:latin typeface="Arial" panose="020B0604020202020204" pitchFamily="34" charset="0"/>
+                </a:rPr>
+                <a:t>AI 요약이 원문을 대체하지 않음</a:t>
+              </a:r>
+            </a:p>
+            <a:p>
+              <a:pPr marL="0" marR="0" lvl="0" indent="0" algn="l" defTabSz="914400" rtl="0" eaLnBrk="0" fontAlgn="base" latinLnBrk="0" hangingPunct="0">
+                <a:lnSpc>
+                  <a:spcPct val="100000"/>
+                </a:lnSpc>
+                <a:spcBef>
+                  <a:spcPct val="0"/>
+                </a:spcBef>
+                <a:spcAft>
+                  <a:spcPct val="0"/>
+                </a:spcAft>
+                <a:buClrTx/>
+                <a:buSzTx/>
+                <a:buFontTx/>
+                <a:buChar char="•"/>
+                <a:tabLst/>
+              </a:pPr>
+              <a:r>
+                <a:rPr kumimoji="0" lang="ko-KR" altLang="ko-KR" sz="1400" b="0" i="0" u="none" strike="noStrike" cap="none" normalizeH="0" baseline="0" dirty="0">
+                  <a:ln>
+                    <a:noFill/>
+                  </a:ln>
+                  <a:solidFill>
+                    <a:schemeClr val="tx1"/>
+                  </a:solidFill>
+                  <a:effectLst/>
+                  <a:latin typeface="Arial" panose="020B0604020202020204" pitchFamily="34" charset="0"/>
+                </a:rPr>
+                <a:t>exact quote와 source ID로 결과를 역추적</a:t>
+              </a:r>
+            </a:p>
+            <a:p>
+              <a:pPr marL="0" marR="0" lvl="0" indent="0" algn="l" defTabSz="914400" rtl="0" eaLnBrk="0" fontAlgn="base" latinLnBrk="0" hangingPunct="0">
+                <a:lnSpc>
+                  <a:spcPct val="100000"/>
+                </a:lnSpc>
+                <a:spcBef>
+                  <a:spcPct val="0"/>
+                </a:spcBef>
+                <a:spcAft>
+                  <a:spcPct val="0"/>
+                </a:spcAft>
+                <a:buClrTx/>
+                <a:buSzTx/>
+                <a:buFontTx/>
+                <a:buChar char="•"/>
+                <a:tabLst/>
+              </a:pPr>
+              <a:r>
+                <a:rPr kumimoji="0" lang="ko-KR" altLang="ko-KR" sz="1400" b="0" i="0" u="none" strike="noStrike" cap="none" normalizeH="0" baseline="0" dirty="0">
+                  <a:ln>
+                    <a:noFill/>
+                  </a:ln>
+                  <a:solidFill>
+                    <a:schemeClr val="tx1"/>
+                  </a:solidFill>
+                  <a:effectLst/>
+                  <a:latin typeface="Arial" panose="020B0604020202020204" pitchFamily="34" charset="0"/>
+                </a:rPr>
+                <a:t>모델·프롬프트·스키마·인덱스 버전 기록</a:t>
+              </a:r>
+            </a:p>
+            <a:p>
+              <a:pPr marL="0" marR="0" lvl="0" indent="0" algn="l" defTabSz="914400" rtl="0" eaLnBrk="0" fontAlgn="base" latinLnBrk="0" hangingPunct="0">
+                <a:lnSpc>
+                  <a:spcPct val="100000"/>
+                </a:lnSpc>
+                <a:spcBef>
+                  <a:spcPct val="0"/>
+                </a:spcBef>
+                <a:spcAft>
+                  <a:spcPct val="0"/>
+                </a:spcAft>
+                <a:buClrTx/>
+                <a:buSzTx/>
+                <a:buFontTx/>
+                <a:buChar char="•"/>
+                <a:tabLst/>
+              </a:pPr>
+              <a:r>
+                <a:rPr kumimoji="0" lang="ko-KR" altLang="ko-KR" sz="1400" b="0" i="0" u="none" strike="noStrike" cap="none" normalizeH="0" baseline="0" dirty="0">
+                  <a:ln>
+                    <a:noFill/>
+                  </a:ln>
+                  <a:solidFill>
+                    <a:schemeClr val="tx1"/>
+                  </a:solidFill>
+                  <a:effectLst/>
+                  <a:latin typeface="Arial" panose="020B0604020202020204" pitchFamily="34" charset="0"/>
+                </a:rPr>
+                <a:t>원문과 정규화 projection을 동시에 보존</a:t>
+              </a:r>
+            </a:p>
+            <a:p>
+              <a:pPr marL="0" marR="0" lvl="0" indent="0" algn="l" defTabSz="914400" rtl="0" eaLnBrk="0" fontAlgn="base" latinLnBrk="0" hangingPunct="0">
+                <a:lnSpc>
+                  <a:spcPct val="100000"/>
+                </a:lnSpc>
+                <a:spcBef>
+                  <a:spcPct val="0"/>
+                </a:spcBef>
+                <a:spcAft>
+                  <a:spcPct val="0"/>
+                </a:spcAft>
+                <a:buClrTx/>
+                <a:buSzTx/>
+                <a:buFontTx/>
+                <a:buChar char="•"/>
+                <a:tabLst/>
+              </a:pPr>
+              <a:r>
+                <a:rPr kumimoji="0" lang="ko-KR" altLang="ko-KR" sz="1400" b="0" i="0" u="none" strike="noStrike" cap="none" normalizeH="0" baseline="0" dirty="0">
+                  <a:ln>
+                    <a:noFill/>
+                  </a:ln>
+                  <a:solidFill>
+                    <a:schemeClr val="tx1"/>
+                  </a:solidFill>
+                  <a:effectLst/>
+                  <a:latin typeface="Arial" panose="020B0604020202020204" pitchFamily="34" charset="0"/>
+                </a:rPr>
+                <a:t>경험 검색 인덱스와 근거 검색 인덱스 분리 </a:t>
+              </a:r>
+            </a:p>
+          </p:txBody>
+        </p:sp>
+      </p:grpSp>
+      <p:sp>
+        <p:nvSpPr>
+          <p:cNvPr id="20" name="TextBox 19">
+            <a:extLst>
+              <a:ext uri="{FF2B5EF4-FFF2-40B4-BE49-F238E27FC236}">
+                <a16:creationId xmlns:a16="http://schemas.microsoft.com/office/drawing/2014/main" id="{0320CB37-57A6-4CAA-B4D5-A78C3F505BB5}"/>
+              </a:ext>
+            </a:extLst>
+          </p:cNvPr>
+          <p:cNvSpPr txBox="1"/>
+          <p:nvPr/>
+        </p:nvSpPr>
+        <p:spPr>
+          <a:xfrm>
+            <a:off x="4715421" y="4510269"/>
+            <a:ext cx="7175500" cy="2123658"/>
+          </a:xfrm>
+          <a:prstGeom prst="rect">
+            <a:avLst/>
+          </a:prstGeom>
+          <a:noFill/>
+        </p:spPr>
+        <p:txBody>
+          <a:bodyPr wrap="square">
+            <a:spAutoFit/>
+          </a:bodyPr>
+          <a:lstStyle/>
+          <a:p>
+            <a:pPr marL="0" marR="0" lvl="0" indent="0" algn="l" defTabSz="914400" rtl="0" eaLnBrk="0" fontAlgn="base" latinLnBrk="0" hangingPunct="0">
+              <a:lnSpc>
+                <a:spcPct val="100000"/>
+              </a:lnSpc>
+              <a:spcBef>
+                <a:spcPct val="0"/>
+              </a:spcBef>
+              <a:spcAft>
+                <a:spcPct val="0"/>
+              </a:spcAft>
+              <a:buClrTx/>
+              <a:buSzTx/>
+              <a:buFontTx/>
+              <a:buNone/>
+              <a:tabLst/>
+            </a:pPr>
+            <a:r>
+              <a:rPr kumimoji="0" lang="ko-KR" altLang="ko-KR" sz="1200" b="0" i="0" u="none" strike="noStrike" cap="none" normalizeH="0" baseline="0" dirty="0">
+                <a:ln>
+                  <a:noFill/>
+                </a:ln>
+                <a:solidFill>
+                  <a:srgbClr val="FF0000"/>
+                </a:solidFill>
+                <a:effectLst/>
+                <a:latin typeface="Arial" panose="020B0604020202020204" pitchFamily="34" charset="0"/>
+              </a:rPr>
+              <a:t>하지만 현재는 엄밀한 의미의 데이터 레이크는 아닙니다.</a:t>
+            </a:r>
+          </a:p>
+          <a:p>
+            <a:pPr marL="0" marR="0" lvl="0" indent="0" algn="l" defTabSz="914400" rtl="0" eaLnBrk="0" fontAlgn="base" latinLnBrk="0" hangingPunct="0">
+              <a:lnSpc>
+                <a:spcPct val="100000"/>
+              </a:lnSpc>
+              <a:spcBef>
+                <a:spcPct val="0"/>
+              </a:spcBef>
+              <a:spcAft>
+                <a:spcPct val="0"/>
+              </a:spcAft>
+              <a:buClrTx/>
+              <a:buSzTx/>
+              <a:buFontTx/>
+              <a:buChar char="•"/>
+              <a:tabLst/>
+            </a:pPr>
+            <a:r>
+              <a:rPr kumimoji="0" lang="ko-KR" altLang="ko-KR" sz="1200" b="0" i="0" u="none" strike="noStrike" cap="none" normalizeH="0" baseline="0" dirty="0">
+                <a:ln>
+                  <a:noFill/>
+                </a:ln>
+                <a:solidFill>
+                  <a:schemeClr val="tx1"/>
+                </a:solidFill>
+                <a:effectLst/>
+                <a:latin typeface="Arial" panose="020B0604020202020204" pitchFamily="34" charset="0"/>
+              </a:rPr>
+              <a:t>원본이 S3·MinIO 같은 객체 저장소가 아니라 SQLite BLOB 및 DB에 저장됨</a:t>
+            </a:r>
+          </a:p>
+          <a:p>
+            <a:pPr marL="0" marR="0" lvl="0" indent="0" algn="l" defTabSz="914400" rtl="0" eaLnBrk="0" fontAlgn="base" latinLnBrk="0" hangingPunct="0">
+              <a:lnSpc>
+                <a:spcPct val="100000"/>
+              </a:lnSpc>
+              <a:spcBef>
+                <a:spcPct val="0"/>
+              </a:spcBef>
+              <a:spcAft>
+                <a:spcPct val="0"/>
+              </a:spcAft>
+              <a:buClrTx/>
+              <a:buSzTx/>
+              <a:buFontTx/>
+              <a:buChar char="•"/>
+              <a:tabLst/>
+            </a:pPr>
+            <a:r>
+              <a:rPr kumimoji="0" lang="ko-KR" altLang="ko-KR" sz="1200" b="0" i="0" u="none" strike="noStrike" cap="none" normalizeH="0" baseline="0" dirty="0">
+                <a:ln>
+                  <a:noFill/>
+                </a:ln>
+                <a:solidFill>
+                  <a:schemeClr val="tx1"/>
+                </a:solidFill>
+                <a:effectLst/>
+                <a:latin typeface="Arial" panose="020B0604020202020204" pitchFamily="34" charset="0"/>
+              </a:rPr>
+              <a:t>Bronze/Silver/Gold 영역이 물리적으로 분리되지 않음</a:t>
+            </a:r>
+          </a:p>
+          <a:p>
+            <a:pPr marL="0" marR="0" lvl="0" indent="0" algn="l" defTabSz="914400" rtl="0" eaLnBrk="0" fontAlgn="base" latinLnBrk="0" hangingPunct="0">
+              <a:lnSpc>
+                <a:spcPct val="100000"/>
+              </a:lnSpc>
+              <a:spcBef>
+                <a:spcPct val="0"/>
+              </a:spcBef>
+              <a:spcAft>
+                <a:spcPct val="0"/>
+              </a:spcAft>
+              <a:buClrTx/>
+              <a:buSzTx/>
+              <a:buFontTx/>
+              <a:buChar char="•"/>
+              <a:tabLst/>
+            </a:pPr>
+            <a:r>
+              <a:rPr kumimoji="0" lang="ko-KR" altLang="ko-KR" sz="1200" b="0" i="0" u="none" strike="noStrike" cap="none" normalizeH="0" baseline="0" dirty="0">
+                <a:ln>
+                  <a:noFill/>
+                </a:ln>
+                <a:solidFill>
+                  <a:schemeClr val="tx1"/>
+                </a:solidFill>
+                <a:effectLst/>
+                <a:latin typeface="Arial" panose="020B0604020202020204" pitchFamily="34" charset="0"/>
+              </a:rPr>
+              <a:t>데이터 카탈로그가 없음</a:t>
+            </a:r>
+          </a:p>
+          <a:p>
+            <a:pPr marL="0" marR="0" lvl="0" indent="0" algn="l" defTabSz="914400" rtl="0" eaLnBrk="0" fontAlgn="base" latinLnBrk="0" hangingPunct="0">
+              <a:lnSpc>
+                <a:spcPct val="100000"/>
+              </a:lnSpc>
+              <a:spcBef>
+                <a:spcPct val="0"/>
+              </a:spcBef>
+              <a:spcAft>
+                <a:spcPct val="0"/>
+              </a:spcAft>
+              <a:buClrTx/>
+              <a:buSzTx/>
+              <a:buFontTx/>
+              <a:buChar char="•"/>
+              <a:tabLst/>
+            </a:pPr>
+            <a:r>
+              <a:rPr kumimoji="0" lang="ko-KR" altLang="ko-KR" sz="1200" b="0" i="0" u="none" strike="noStrike" cap="none" normalizeH="0" baseline="0" dirty="0">
+                <a:ln>
+                  <a:noFill/>
+                </a:ln>
+                <a:solidFill>
+                  <a:schemeClr val="tx1"/>
+                </a:solidFill>
+                <a:effectLst/>
+                <a:latin typeface="Arial" panose="020B0604020202020204" pitchFamily="34" charset="0"/>
+              </a:rPr>
+              <a:t>EvidenceDocument, EvidenceChunk, EmbeddingRecord가 정규 DB 엔티티로 완전히 승격되지 않음</a:t>
+            </a:r>
+          </a:p>
+          <a:p>
+            <a:pPr marL="0" marR="0" lvl="0" indent="0" algn="l" defTabSz="914400" rtl="0" eaLnBrk="0" fontAlgn="base" latinLnBrk="0" hangingPunct="0">
+              <a:lnSpc>
+                <a:spcPct val="100000"/>
+              </a:lnSpc>
+              <a:spcBef>
+                <a:spcPct val="0"/>
+              </a:spcBef>
+              <a:spcAft>
+                <a:spcPct val="0"/>
+              </a:spcAft>
+              <a:buClrTx/>
+              <a:buSzTx/>
+              <a:buFontTx/>
+              <a:buChar char="•"/>
+              <a:tabLst/>
+            </a:pPr>
+            <a:r>
+              <a:rPr kumimoji="0" lang="ko-KR" altLang="ko-KR" sz="1200" b="0" i="0" u="none" strike="noStrike" cap="none" normalizeH="0" baseline="0" dirty="0">
+                <a:ln>
+                  <a:noFill/>
+                </a:ln>
+                <a:solidFill>
+                  <a:schemeClr val="tx1"/>
+                </a:solidFill>
+                <a:effectLst/>
+                <a:latin typeface="Arial" panose="020B0604020202020204" pitchFamily="34" charset="0"/>
+              </a:rPr>
+              <a:t>대규모 분산 수집·변환 파이프라인 구조는 아님</a:t>
+            </a:r>
+            <a:endParaRPr kumimoji="0" lang="en-US" altLang="ko-KR" sz="1200" b="0" i="0" u="none" strike="noStrike" cap="none" normalizeH="0" baseline="0" dirty="0">
+              <a:ln>
+                <a:noFill/>
+              </a:ln>
+              <a:solidFill>
+                <a:schemeClr val="tx1"/>
+              </a:solidFill>
+              <a:effectLst/>
+              <a:latin typeface="Arial" panose="020B0604020202020204" pitchFamily="34" charset="0"/>
+            </a:endParaRPr>
+          </a:p>
+          <a:p>
+            <a:pPr marL="0" marR="0" lvl="0" indent="0" algn="l" defTabSz="914400" rtl="0" eaLnBrk="0" fontAlgn="base" latinLnBrk="0" hangingPunct="0">
+              <a:lnSpc>
+                <a:spcPct val="100000"/>
+              </a:lnSpc>
+              <a:spcBef>
+                <a:spcPct val="0"/>
+              </a:spcBef>
+              <a:spcAft>
+                <a:spcPct val="0"/>
+              </a:spcAft>
+              <a:buClrTx/>
+              <a:buSzTx/>
+              <a:buFontTx/>
+              <a:buChar char="•"/>
+              <a:tabLst/>
+            </a:pPr>
+            <a:endParaRPr kumimoji="0" lang="ko-KR" altLang="ko-KR" sz="1200" b="0" i="0" u="none" strike="noStrike" cap="none" normalizeH="0" baseline="0" dirty="0">
+              <a:ln>
+                <a:noFill/>
+              </a:ln>
+              <a:solidFill>
+                <a:schemeClr val="tx1"/>
+              </a:solidFill>
+              <a:effectLst/>
+              <a:latin typeface="Arial" panose="020B0604020202020204" pitchFamily="34" charset="0"/>
+            </a:endParaRPr>
+          </a:p>
+          <a:p>
+            <a:pPr marL="0" marR="0" lvl="0" indent="0" algn="l" defTabSz="914400" rtl="0" eaLnBrk="0" fontAlgn="base" latinLnBrk="0" hangingPunct="0">
+              <a:lnSpc>
+                <a:spcPct val="100000"/>
+              </a:lnSpc>
+              <a:spcBef>
+                <a:spcPct val="0"/>
+              </a:spcBef>
+              <a:spcAft>
+                <a:spcPct val="0"/>
+              </a:spcAft>
+              <a:buClrTx/>
+              <a:buSzTx/>
+              <a:buFontTx/>
+              <a:buNone/>
+              <a:tabLst/>
+            </a:pPr>
+            <a:r>
+              <a:rPr kumimoji="0" lang="ko-KR" altLang="ko-KR" sz="1200" b="0" i="0" u="none" strike="noStrike" cap="none" normalizeH="0" baseline="0" dirty="0">
+                <a:ln>
+                  <a:noFill/>
+                </a:ln>
+                <a:solidFill>
+                  <a:schemeClr val="tx1"/>
+                </a:solidFill>
+                <a:effectLst/>
+                <a:latin typeface="Arial" panose="020B0604020202020204" pitchFamily="34" charset="0"/>
+              </a:rPr>
+              <a:t>현재 구조는 데이터 레이크보다는 다음에 더 가깝습니다.</a:t>
+            </a:r>
+          </a:p>
+          <a:p>
+            <a:pPr marL="0" marR="0" lvl="0" indent="0" algn="l" defTabSz="914400" rtl="0" eaLnBrk="0" fontAlgn="base" latinLnBrk="0" hangingPunct="0">
+              <a:lnSpc>
+                <a:spcPct val="100000"/>
+              </a:lnSpc>
+              <a:spcBef>
+                <a:spcPct val="0"/>
+              </a:spcBef>
+              <a:spcAft>
+                <a:spcPct val="0"/>
+              </a:spcAft>
+              <a:buClrTx/>
+              <a:buSzTx/>
+              <a:buFontTx/>
+              <a:buNone/>
+              <a:tabLst/>
+            </a:pPr>
+            <a:r>
+              <a:rPr kumimoji="0" lang="ko-KR" altLang="ko-KR" sz="1200" b="0" i="0" u="none" strike="noStrike" cap="none" normalizeH="0" baseline="0" dirty="0">
+                <a:ln>
+                  <a:noFill/>
+                </a:ln>
+                <a:solidFill>
+                  <a:srgbClr val="FF0000"/>
+                </a:solidFill>
+                <a:effectLst/>
+                <a:latin typeface="Arial" panose="020B0604020202020204" pitchFamily="34" charset="0"/>
+              </a:rPr>
+              <a:t>관계형 DB + JSON 문서 + 벡터 인덱스를 결합한 다중 저장소 기반 지식 시스템</a:t>
+            </a:r>
+          </a:p>
+          <a:p>
+            <a:pPr marL="0" marR="0" lvl="0" indent="0" algn="l" defTabSz="914400" rtl="0" eaLnBrk="0" fontAlgn="base" latinLnBrk="0" hangingPunct="0">
+              <a:lnSpc>
+                <a:spcPct val="100000"/>
+              </a:lnSpc>
+              <a:spcBef>
+                <a:spcPct val="0"/>
+              </a:spcBef>
+              <a:spcAft>
+                <a:spcPct val="0"/>
+              </a:spcAft>
+              <a:buClrTx/>
+              <a:buSzTx/>
+              <a:buFontTx/>
+              <a:buNone/>
+              <a:tabLst/>
+            </a:pPr>
+            <a:r>
+              <a:rPr kumimoji="0" lang="ko-KR" altLang="ko-KR" sz="1200" b="0" i="0" u="none" strike="noStrike" cap="none" normalizeH="0" baseline="0" dirty="0">
+                <a:ln>
+                  <a:noFill/>
+                </a:ln>
+                <a:solidFill>
+                  <a:schemeClr val="tx1"/>
+                </a:solidFill>
+                <a:effectLst/>
+                <a:latin typeface="Arial" panose="020B0604020202020204" pitchFamily="34" charset="0"/>
+              </a:rPr>
+              <a:t>즉, “데이터 레이크를 구축했다”보다는 다음 표현이 좋습니다.</a:t>
+            </a:r>
+          </a:p>
+          <a:p>
+            <a:pPr marL="0" marR="0" lvl="0" indent="0" algn="l" defTabSz="914400" rtl="0" eaLnBrk="0" fontAlgn="base" latinLnBrk="0" hangingPunct="0">
+              <a:lnSpc>
+                <a:spcPct val="100000"/>
+              </a:lnSpc>
+              <a:spcBef>
+                <a:spcPct val="0"/>
+              </a:spcBef>
+              <a:spcAft>
+                <a:spcPct val="0"/>
+              </a:spcAft>
+              <a:buClrTx/>
+              <a:buSzTx/>
+              <a:buFontTx/>
+              <a:buNone/>
+              <a:tabLst/>
+            </a:pPr>
+            <a:r>
+              <a:rPr kumimoji="0" lang="ko-KR" altLang="ko-KR" sz="1200" b="0" i="0" u="none" strike="noStrike" cap="none" normalizeH="0" baseline="0" dirty="0">
+                <a:ln>
+                  <a:noFill/>
+                </a:ln>
+                <a:solidFill>
+                  <a:srgbClr val="FF0000"/>
+                </a:solidFill>
+                <a:effectLst/>
+                <a:latin typeface="Arial" panose="020B0604020202020204" pitchFamily="34" charset="0"/>
+              </a:rPr>
+              <a:t>데이터 레이크의 원본 보존·계층화·데이터 계보 원칙을 적용한 근거 중심 데이터 구조를 설계했다.</a:t>
+            </a:r>
+          </a:p>
+        </p:txBody>
+      </p:sp>
+    </p:spTree>
+    <p:extLst>
+      <p:ext uri="{BB962C8B-B14F-4D97-AF65-F5344CB8AC3E}">
+        <p14:creationId xmlns:p14="http://schemas.microsoft.com/office/powerpoint/2010/main" val="2360086599"/>
+      </p:ext>
+    </p:extLst>
+  </p:cSld>
+  <p:clrMapOvr>
+    <a:masterClrMapping/>
+  </p:clrMapOvr>
+</p:sld>
+</file>
+
+<file path=ppt/slides/slide23.xml><?xml version="1.0" encoding="utf-8"?>
+<p:sld xmlns:a="http://schemas.openxmlformats.org/drawingml/2006/main" xmlns:r="http://schemas.openxmlformats.org/officeDocument/2006/relationships" xmlns:p="http://schemas.openxmlformats.org/presentationml/2006/main">
+  <p:cSld>
+    <p:spTree>
+      <p:nvGrpSpPr>
+        <p:cNvPr id="1" name=""/>
+        <p:cNvGrpSpPr/>
+        <p:nvPr/>
+      </p:nvGrpSpPr>
+      <p:grpSpPr>
+        <a:xfrm>
+          <a:off x="0" y="0"/>
+          <a:ext cx="0" cy="0"/>
+          <a:chOff x="0" y="0"/>
+          <a:chExt cx="0" cy="0"/>
+        </a:xfrm>
+      </p:grpSpPr>
+      <p:sp>
+        <p:nvSpPr>
+          <p:cNvPr id="5" name="TextBox 4">
+            <a:extLst>
+              <a:ext uri="{FF2B5EF4-FFF2-40B4-BE49-F238E27FC236}">
+                <a16:creationId xmlns:a16="http://schemas.microsoft.com/office/drawing/2014/main" id="{87C0E572-3575-451B-B81C-336C3E80E788}"/>
+              </a:ext>
+            </a:extLst>
+          </p:cNvPr>
+          <p:cNvSpPr txBox="1"/>
+          <p:nvPr/>
+        </p:nvSpPr>
+        <p:spPr>
+          <a:xfrm>
+            <a:off x="3048000" y="751344"/>
+            <a:ext cx="6096000" cy="5355312"/>
+          </a:xfrm>
+          <a:prstGeom prst="rect">
+            <a:avLst/>
+          </a:prstGeom>
+          <a:noFill/>
+        </p:spPr>
+        <p:txBody>
+          <a:bodyPr wrap="square">
+            <a:spAutoFit/>
+          </a:bodyPr>
+          <a:lstStyle/>
+          <a:p>
+            <a:r>
+              <a:rPr lang="en-US" altLang="ko-KR" b="1" dirty="0"/>
+              <a:t>NLP</a:t>
+            </a:r>
+            <a:r>
+              <a:rPr lang="ko-KR" altLang="en-US" b="1" dirty="0"/>
+              <a:t>와 </a:t>
+            </a:r>
+            <a:r>
+              <a:rPr lang="en-US" altLang="ko-KR" b="1" dirty="0"/>
+              <a:t>NLU</a:t>
+            </a:r>
+            <a:r>
+              <a:rPr lang="ko-KR" altLang="en-US" b="1" dirty="0"/>
+              <a:t>는 정상적으로 동작하는가</a:t>
+            </a:r>
+            <a:r>
+              <a:rPr lang="en-US" altLang="ko-KR" b="1" dirty="0"/>
+              <a:t>?</a:t>
+            </a:r>
+          </a:p>
+          <a:p>
+            <a:r>
+              <a:rPr lang="ko-KR" altLang="en-US" dirty="0"/>
+              <a:t>현재 구현은 </a:t>
+            </a:r>
+            <a:r>
+              <a:rPr lang="en-US" altLang="ko-KR" dirty="0"/>
+              <a:t>NLP</a:t>
+            </a:r>
+            <a:r>
+              <a:rPr lang="ko-KR" altLang="en-US" dirty="0"/>
+              <a:t>와 </a:t>
+            </a:r>
+            <a:r>
+              <a:rPr lang="en-US" altLang="ko-KR" dirty="0"/>
+              <a:t>NLU </a:t>
+            </a:r>
+            <a:r>
+              <a:rPr lang="ko-KR" altLang="en-US" dirty="0"/>
+              <a:t>기능을 모두 포함하고 있으며</a:t>
+            </a:r>
+            <a:r>
+              <a:rPr lang="en-US" altLang="ko-KR" dirty="0"/>
+              <a:t>, </a:t>
+            </a:r>
+            <a:r>
+              <a:rPr lang="ko-KR" altLang="en-US" dirty="0"/>
+              <a:t>현 단계에서는 정상 동작한다고 판단할 수 있습니다</a:t>
+            </a:r>
+            <a:r>
+              <a:rPr lang="en-US" altLang="ko-KR" dirty="0"/>
+              <a:t>.</a:t>
+            </a:r>
+          </a:p>
+          <a:p>
+            <a:r>
+              <a:rPr lang="en-US" altLang="ko-KR" dirty="0"/>
+              <a:t>NLP</a:t>
+            </a:r>
+            <a:r>
+              <a:rPr lang="ko-KR" altLang="en-US" dirty="0"/>
+              <a:t>에 해당하는 부분</a:t>
+            </a:r>
+            <a:r>
+              <a:rPr lang="en-US" altLang="ko-KR" dirty="0"/>
+              <a:t>:</a:t>
+            </a:r>
+          </a:p>
+          <a:p>
+            <a:pPr>
+              <a:buFont typeface="Arial" panose="020B0604020202020204" pitchFamily="34" charset="0"/>
+              <a:buChar char="•"/>
+            </a:pPr>
+            <a:r>
+              <a:rPr lang="en-US" altLang="ko-KR" dirty="0"/>
+              <a:t>PDF·TXT·</a:t>
+            </a:r>
+            <a:r>
+              <a:rPr lang="ko-KR" altLang="en-US" dirty="0"/>
+              <a:t>이미지 텍스트 추출</a:t>
+            </a:r>
+          </a:p>
+          <a:p>
+            <a:pPr>
+              <a:buFont typeface="Arial" panose="020B0604020202020204" pitchFamily="34" charset="0"/>
+              <a:buChar char="•"/>
+            </a:pPr>
+            <a:r>
+              <a:rPr lang="ko-KR" altLang="en-US" dirty="0"/>
+              <a:t>긴 문서 청킹</a:t>
+            </a:r>
+          </a:p>
+          <a:p>
+            <a:pPr>
+              <a:buFont typeface="Arial" panose="020B0604020202020204" pitchFamily="34" charset="0"/>
+              <a:buChar char="•"/>
+            </a:pPr>
+            <a:r>
+              <a:rPr lang="ko-KR" altLang="en-US" dirty="0"/>
+              <a:t>임베딩 및 유사도 검색</a:t>
+            </a:r>
+          </a:p>
+          <a:p>
+            <a:pPr>
+              <a:buFont typeface="Arial" panose="020B0604020202020204" pitchFamily="34" charset="0"/>
+              <a:buChar char="•"/>
+            </a:pPr>
+            <a:r>
+              <a:rPr lang="ko-KR" altLang="en-US" dirty="0"/>
+              <a:t>키워드와 기술명 정규화</a:t>
+            </a:r>
+          </a:p>
+          <a:p>
+            <a:pPr>
+              <a:buFont typeface="Arial" panose="020B0604020202020204" pitchFamily="34" charset="0"/>
+              <a:buChar char="•"/>
+            </a:pPr>
+            <a:r>
+              <a:rPr lang="ko-KR" altLang="en-US" dirty="0"/>
+              <a:t>한국어 수치 표현 파싱</a:t>
+            </a:r>
+          </a:p>
+          <a:p>
+            <a:pPr>
+              <a:buFont typeface="Arial" panose="020B0604020202020204" pitchFamily="34" charset="0"/>
+              <a:buChar char="•"/>
+            </a:pPr>
+            <a:r>
+              <a:rPr lang="en-US" altLang="ko-KR" dirty="0"/>
+              <a:t>lexical fallback </a:t>
+            </a:r>
+            <a:r>
+              <a:rPr lang="ko-KR" altLang="en-US" dirty="0"/>
+              <a:t>검색</a:t>
+            </a:r>
+          </a:p>
+          <a:p>
+            <a:r>
+              <a:rPr lang="en-US" altLang="ko-KR" dirty="0"/>
+              <a:t>NLU</a:t>
+            </a:r>
+            <a:r>
+              <a:rPr lang="ko-KR" altLang="en-US" dirty="0"/>
+              <a:t>에 해당하는 부분</a:t>
+            </a:r>
+            <a:r>
+              <a:rPr lang="en-US" altLang="ko-KR" dirty="0"/>
+              <a:t>:</a:t>
+            </a:r>
+          </a:p>
+          <a:p>
+            <a:pPr>
+              <a:buFont typeface="Arial" panose="020B0604020202020204" pitchFamily="34" charset="0"/>
+              <a:buChar char="•"/>
+            </a:pPr>
+            <a:r>
+              <a:rPr lang="ko-KR" altLang="en-US" dirty="0"/>
+              <a:t>일반 대화</a:t>
+            </a:r>
+            <a:r>
+              <a:rPr lang="en-US" altLang="ko-KR" dirty="0"/>
+              <a:t>·</a:t>
+            </a:r>
+            <a:r>
+              <a:rPr lang="ko-KR" altLang="en-US" dirty="0"/>
+              <a:t>경험 정리</a:t>
+            </a:r>
+            <a:r>
+              <a:rPr lang="en-US" altLang="ko-KR" dirty="0"/>
+              <a:t>·</a:t>
+            </a:r>
+            <a:r>
+              <a:rPr lang="ko-KR" altLang="en-US" dirty="0"/>
+              <a:t>공고 분석 의도 분류</a:t>
+            </a:r>
+          </a:p>
+          <a:p>
+            <a:pPr>
+              <a:buFont typeface="Arial" panose="020B0604020202020204" pitchFamily="34" charset="0"/>
+              <a:buChar char="•"/>
+            </a:pPr>
+            <a:r>
+              <a:rPr lang="ko-KR" altLang="en-US" dirty="0"/>
+              <a:t>경험</a:t>
+            </a:r>
+            <a:r>
+              <a:rPr lang="en-US" altLang="ko-KR" dirty="0"/>
+              <a:t>·</a:t>
+            </a:r>
+            <a:r>
+              <a:rPr lang="ko-KR" altLang="en-US" dirty="0"/>
+              <a:t>공고</a:t>
+            </a:r>
+            <a:r>
+              <a:rPr lang="en-US" altLang="ko-KR" dirty="0"/>
+              <a:t>·</a:t>
+            </a:r>
+            <a:r>
+              <a:rPr lang="ko-KR" altLang="en-US" dirty="0"/>
+              <a:t>혼합</a:t>
+            </a:r>
+            <a:r>
+              <a:rPr lang="en-US" altLang="ko-KR" dirty="0"/>
+              <a:t>·</a:t>
+            </a:r>
+            <a:r>
+              <a:rPr lang="ko-KR" altLang="en-US" dirty="0"/>
+              <a:t>무관</a:t>
+            </a:r>
+            <a:r>
+              <a:rPr lang="en-US" altLang="ko-KR" dirty="0"/>
+              <a:t>·</a:t>
+            </a:r>
+            <a:r>
+              <a:rPr lang="ko-KR" altLang="en-US" dirty="0"/>
+              <a:t>불확실 콘텐츠 분류</a:t>
+            </a:r>
+          </a:p>
+          <a:p>
+            <a:pPr>
+              <a:buFont typeface="Arial" panose="020B0604020202020204" pitchFamily="34" charset="0"/>
+              <a:buChar char="•"/>
+            </a:pPr>
+            <a:r>
+              <a:rPr lang="ko-KR" altLang="en-US" dirty="0"/>
+              <a:t>짧은 사용자 답변의 문맥 복원</a:t>
+            </a:r>
+          </a:p>
+          <a:p>
+            <a:pPr>
+              <a:buFont typeface="Arial" panose="020B0604020202020204" pitchFamily="34" charset="0"/>
+              <a:buChar char="•"/>
+            </a:pPr>
+            <a:r>
+              <a:rPr lang="ko-KR" altLang="en-US" dirty="0"/>
+              <a:t>경험 사실 및 역할</a:t>
+            </a:r>
+            <a:r>
+              <a:rPr lang="en-US" altLang="ko-KR" dirty="0"/>
+              <a:t>·</a:t>
+            </a:r>
+            <a:r>
+              <a:rPr lang="ko-KR" altLang="en-US" dirty="0"/>
+              <a:t>행동</a:t>
+            </a:r>
+            <a:r>
+              <a:rPr lang="en-US" altLang="ko-KR" dirty="0"/>
+              <a:t>·</a:t>
+            </a:r>
+            <a:r>
+              <a:rPr lang="ko-KR" altLang="en-US" dirty="0"/>
+              <a:t>성과 추출</a:t>
+            </a:r>
+          </a:p>
+          <a:p>
+            <a:pPr>
+              <a:buFont typeface="Arial" panose="020B0604020202020204" pitchFamily="34" charset="0"/>
+              <a:buChar char="•"/>
+            </a:pPr>
+            <a:r>
+              <a:rPr lang="ko-KR" altLang="en-US" dirty="0"/>
+              <a:t>채용공고 요구사항 이해</a:t>
+            </a:r>
+          </a:p>
+          <a:p>
+            <a:pPr>
+              <a:buFont typeface="Arial" panose="020B0604020202020204" pitchFamily="34" charset="0"/>
+              <a:buChar char="•"/>
+            </a:pPr>
+            <a:r>
+              <a:rPr lang="ko-KR" altLang="en-US" dirty="0"/>
+              <a:t>기술 별칭과 관련 기술 구분</a:t>
+            </a:r>
+          </a:p>
+          <a:p>
+            <a:pPr>
+              <a:buFont typeface="Arial" panose="020B0604020202020204" pitchFamily="34" charset="0"/>
+              <a:buChar char="•"/>
+            </a:pPr>
+            <a:r>
+              <a:rPr lang="ko-KR" altLang="en-US" dirty="0"/>
+              <a:t>정량 조건 해석</a:t>
+            </a:r>
+          </a:p>
+          <a:p>
+            <a:pPr>
+              <a:buFont typeface="Arial" panose="020B0604020202020204" pitchFamily="34" charset="0"/>
+              <a:buChar char="•"/>
+            </a:pPr>
+            <a:r>
+              <a:rPr lang="ko-KR" altLang="en-US" dirty="0"/>
+              <a:t>공고 요구사항과 경험의 의미적 연결</a:t>
+            </a:r>
+          </a:p>
+        </p:txBody>
+      </p:sp>
+    </p:spTree>
+    <p:extLst>
+      <p:ext uri="{BB962C8B-B14F-4D97-AF65-F5344CB8AC3E}">
+        <p14:creationId xmlns:p14="http://schemas.microsoft.com/office/powerpoint/2010/main" val="2272454848"/>
+      </p:ext>
+    </p:extLst>
+  </p:cSld>
+  <p:clrMapOvr>
+    <a:masterClrMapping/>
+  </p:clrMapOvr>
+</p:sld>
+</file>
+
+<file path=ppt/slides/slide24.xml><?xml version="1.0" encoding="utf-8"?>
+<p:sld xmlns:a="http://schemas.openxmlformats.org/drawingml/2006/main" xmlns:r="http://schemas.openxmlformats.org/officeDocument/2006/relationships" xmlns:p="http://schemas.openxmlformats.org/presentationml/2006/main">
+  <p:cSld>
+    <p:spTree>
+      <p:nvGrpSpPr>
+        <p:cNvPr id="1" name=""/>
+        <p:cNvGrpSpPr/>
+        <p:nvPr/>
+      </p:nvGrpSpPr>
+      <p:grpSpPr>
+        <a:xfrm>
+          <a:off x="0" y="0"/>
+          <a:ext cx="0" cy="0"/>
+          <a:chOff x="0" y="0"/>
+          <a:chExt cx="0" cy="0"/>
+        </a:xfrm>
+      </p:grpSpPr>
+      <p:sp>
+        <p:nvSpPr>
+          <p:cNvPr id="6" name="TextBox 5">
+            <a:extLst>
+              <a:ext uri="{FF2B5EF4-FFF2-40B4-BE49-F238E27FC236}">
+                <a16:creationId xmlns:a16="http://schemas.microsoft.com/office/drawing/2014/main" id="{C009E9D6-6035-4A00-BDCC-06E922EB7598}"/>
+              </a:ext>
+            </a:extLst>
+          </p:cNvPr>
+          <p:cNvSpPr txBox="1"/>
+          <p:nvPr/>
+        </p:nvSpPr>
+        <p:spPr>
+          <a:xfrm>
+            <a:off x="3048000" y="1030456"/>
+            <a:ext cx="6096000" cy="5262979"/>
+          </a:xfrm>
+          <a:prstGeom prst="rect">
+            <a:avLst/>
+          </a:prstGeom>
+          <a:noFill/>
+        </p:spPr>
+        <p:txBody>
+          <a:bodyPr wrap="square">
+            <a:spAutoFit/>
+          </a:bodyPr>
+          <a:lstStyle/>
+          <a:p>
+            <a:pPr marL="0" marR="0" lvl="0" indent="0" algn="l" defTabSz="914400" rtl="0" eaLnBrk="0" fontAlgn="base" latinLnBrk="0" hangingPunct="0">
+              <a:lnSpc>
+                <a:spcPct val="100000"/>
+              </a:lnSpc>
+              <a:spcBef>
+                <a:spcPct val="0"/>
+              </a:spcBef>
+              <a:spcAft>
+                <a:spcPct val="0"/>
+              </a:spcAft>
+              <a:buClrTx/>
+              <a:buSzTx/>
+              <a:buFontTx/>
+              <a:buNone/>
+              <a:tabLst/>
+            </a:pPr>
+            <a:r>
+              <a:rPr kumimoji="0" lang="ko-KR" altLang="ko-KR" sz="1400" b="1" i="0" u="none" strike="noStrike" cap="none" normalizeH="0" baseline="0" dirty="0">
+                <a:ln>
+                  <a:noFill/>
+                </a:ln>
+                <a:solidFill>
+                  <a:srgbClr val="FF0000"/>
+                </a:solidFill>
+                <a:effectLst/>
+                <a:latin typeface="Arial" panose="020B0604020202020204" pitchFamily="34" charset="0"/>
+              </a:rPr>
+              <a:t>포트폴리오로 제출해도 되는가?</a:t>
+            </a:r>
+          </a:p>
+          <a:p>
+            <a:pPr marL="0" marR="0" lvl="0" indent="0" algn="l" defTabSz="914400" rtl="0" eaLnBrk="0" fontAlgn="base" latinLnBrk="0" hangingPunct="0">
+              <a:lnSpc>
+                <a:spcPct val="100000"/>
+              </a:lnSpc>
+              <a:spcBef>
+                <a:spcPct val="0"/>
+              </a:spcBef>
+              <a:spcAft>
+                <a:spcPct val="0"/>
+              </a:spcAft>
+              <a:buClrTx/>
+              <a:buSzTx/>
+              <a:buFontTx/>
+              <a:buNone/>
+              <a:tabLst/>
+            </a:pPr>
+            <a:r>
+              <a:rPr kumimoji="0" lang="ko-KR" altLang="ko-KR" sz="1400" b="0" i="0" u="none" strike="noStrike" cap="none" normalizeH="0" baseline="0" dirty="0">
+                <a:ln>
+                  <a:noFill/>
+                </a:ln>
+                <a:solidFill>
+                  <a:schemeClr val="tx1"/>
+                </a:solidFill>
+                <a:effectLst/>
+                <a:latin typeface="Arial" panose="020B0604020202020204" pitchFamily="34" charset="0"/>
+              </a:rPr>
+              <a:t>충분히 제출할 만합니다. 특히 단순한 LLM API 호출 프로젝트와 구분되는 장점이 분명합니다.</a:t>
+            </a:r>
+            <a:endParaRPr kumimoji="0" lang="en-US" altLang="ko-KR" sz="1400" b="0" i="0" u="none" strike="noStrike" cap="none" normalizeH="0" baseline="0" dirty="0">
+              <a:ln>
+                <a:noFill/>
+              </a:ln>
+              <a:solidFill>
+                <a:schemeClr val="tx1"/>
+              </a:solidFill>
+              <a:effectLst/>
+              <a:latin typeface="Arial" panose="020B0604020202020204" pitchFamily="34" charset="0"/>
+            </a:endParaRPr>
+          </a:p>
+          <a:p>
+            <a:pPr marL="0" marR="0" lvl="0" indent="0" algn="l" defTabSz="914400" rtl="0" eaLnBrk="0" fontAlgn="base" latinLnBrk="0" hangingPunct="0">
+              <a:lnSpc>
+                <a:spcPct val="100000"/>
+              </a:lnSpc>
+              <a:spcBef>
+                <a:spcPct val="0"/>
+              </a:spcBef>
+              <a:spcAft>
+                <a:spcPct val="0"/>
+              </a:spcAft>
+              <a:buClrTx/>
+              <a:buSzTx/>
+              <a:buFontTx/>
+              <a:buNone/>
+              <a:tabLst/>
+            </a:pPr>
+            <a:endParaRPr kumimoji="0" lang="ko-KR" altLang="ko-KR" sz="1400" b="0" i="0" u="none" strike="noStrike" cap="none" normalizeH="0" baseline="0" dirty="0">
+              <a:ln>
+                <a:noFill/>
+              </a:ln>
+              <a:solidFill>
+                <a:schemeClr val="tx1"/>
+              </a:solidFill>
+              <a:effectLst/>
+              <a:latin typeface="Arial" panose="020B0604020202020204" pitchFamily="34" charset="0"/>
+            </a:endParaRPr>
+          </a:p>
+          <a:p>
+            <a:pPr marL="0" marR="0" lvl="0" indent="0" algn="l" defTabSz="914400" rtl="0" eaLnBrk="0" fontAlgn="base" latinLnBrk="0" hangingPunct="0">
+              <a:lnSpc>
+                <a:spcPct val="100000"/>
+              </a:lnSpc>
+              <a:spcBef>
+                <a:spcPct val="0"/>
+              </a:spcBef>
+              <a:spcAft>
+                <a:spcPct val="0"/>
+              </a:spcAft>
+              <a:buClrTx/>
+              <a:buSzTx/>
+              <a:buFontTx/>
+              <a:buChar char="•"/>
+              <a:tabLst/>
+            </a:pPr>
+            <a:r>
+              <a:rPr kumimoji="0" lang="ko-KR" altLang="ko-KR" sz="1400" b="0" i="0" u="none" strike="noStrike" cap="none" normalizeH="0" baseline="0" dirty="0">
+                <a:ln>
+                  <a:noFill/>
+                </a:ln>
+                <a:solidFill>
+                  <a:schemeClr val="tx1"/>
+                </a:solidFill>
+                <a:effectLst/>
+                <a:latin typeface="Arial" panose="020B0604020202020204" pitchFamily="34" charset="0"/>
+              </a:rPr>
+              <a:t>원문과 AI 생성 데이터를 분리함</a:t>
+            </a:r>
+          </a:p>
+          <a:p>
+            <a:pPr marL="0" marR="0" lvl="0" indent="0" algn="l" defTabSz="914400" rtl="0" eaLnBrk="0" fontAlgn="base" latinLnBrk="0" hangingPunct="0">
+              <a:lnSpc>
+                <a:spcPct val="100000"/>
+              </a:lnSpc>
+              <a:spcBef>
+                <a:spcPct val="0"/>
+              </a:spcBef>
+              <a:spcAft>
+                <a:spcPct val="0"/>
+              </a:spcAft>
+              <a:buClrTx/>
+              <a:buSzTx/>
+              <a:buFontTx/>
+              <a:buChar char="•"/>
+              <a:tabLst/>
+            </a:pPr>
+            <a:r>
+              <a:rPr kumimoji="0" lang="ko-KR" altLang="ko-KR" sz="1400" b="0" i="0" u="none" strike="noStrike" cap="none" normalizeH="0" baseline="0" dirty="0">
+                <a:ln>
+                  <a:noFill/>
+                </a:ln>
+                <a:solidFill>
+                  <a:schemeClr val="tx1"/>
+                </a:solidFill>
+                <a:effectLst/>
+                <a:latin typeface="Arial" panose="020B0604020202020204" pitchFamily="34" charset="0"/>
+              </a:rPr>
+              <a:t>근거 없는 주장을 차단함</a:t>
+            </a:r>
+          </a:p>
+          <a:p>
+            <a:pPr marL="0" marR="0" lvl="0" indent="0" algn="l" defTabSz="914400" rtl="0" eaLnBrk="0" fontAlgn="base" latinLnBrk="0" hangingPunct="0">
+              <a:lnSpc>
+                <a:spcPct val="100000"/>
+              </a:lnSpc>
+              <a:spcBef>
+                <a:spcPct val="0"/>
+              </a:spcBef>
+              <a:spcAft>
+                <a:spcPct val="0"/>
+              </a:spcAft>
+              <a:buClrTx/>
+              <a:buSzTx/>
+              <a:buFontTx/>
+              <a:buChar char="•"/>
+              <a:tabLst/>
+            </a:pPr>
+            <a:r>
+              <a:rPr kumimoji="0" lang="ko-KR" altLang="ko-KR" sz="1400" b="0" i="0" u="none" strike="noStrike" cap="none" normalizeH="0" baseline="0" dirty="0">
+                <a:ln>
+                  <a:noFill/>
+                </a:ln>
+                <a:solidFill>
+                  <a:schemeClr val="tx1"/>
+                </a:solidFill>
+                <a:effectLst/>
+                <a:latin typeface="Arial" panose="020B0604020202020204" pitchFamily="34" charset="0"/>
+              </a:rPr>
+              <a:t>정형·비정형 데이터를 함께 처리함</a:t>
+            </a:r>
+          </a:p>
+          <a:p>
+            <a:pPr marL="0" marR="0" lvl="0" indent="0" algn="l" defTabSz="914400" rtl="0" eaLnBrk="0" fontAlgn="base" latinLnBrk="0" hangingPunct="0">
+              <a:lnSpc>
+                <a:spcPct val="100000"/>
+              </a:lnSpc>
+              <a:spcBef>
+                <a:spcPct val="0"/>
+              </a:spcBef>
+              <a:spcAft>
+                <a:spcPct val="0"/>
+              </a:spcAft>
+              <a:buClrTx/>
+              <a:buSzTx/>
+              <a:buFontTx/>
+              <a:buChar char="•"/>
+              <a:tabLst/>
+            </a:pPr>
+            <a:r>
+              <a:rPr kumimoji="0" lang="ko-KR" altLang="ko-KR" sz="1400" b="0" i="0" u="none" strike="noStrike" cap="none" normalizeH="0" baseline="0" dirty="0">
+                <a:ln>
+                  <a:noFill/>
+                </a:ln>
+                <a:solidFill>
+                  <a:schemeClr val="tx1"/>
+                </a:solidFill>
+                <a:effectLst/>
+                <a:latin typeface="Arial" panose="020B0604020202020204" pitchFamily="34" charset="0"/>
+              </a:rPr>
+              <a:t>의미 검색과 정확한 규칙 판정을 분리함</a:t>
+            </a:r>
+          </a:p>
+          <a:p>
+            <a:pPr marL="0" marR="0" lvl="0" indent="0" algn="l" defTabSz="914400" rtl="0" eaLnBrk="0" fontAlgn="base" latinLnBrk="0" hangingPunct="0">
+              <a:lnSpc>
+                <a:spcPct val="100000"/>
+              </a:lnSpc>
+              <a:spcBef>
+                <a:spcPct val="0"/>
+              </a:spcBef>
+              <a:spcAft>
+                <a:spcPct val="0"/>
+              </a:spcAft>
+              <a:buClrTx/>
+              <a:buSzTx/>
+              <a:buFontTx/>
+              <a:buChar char="•"/>
+              <a:tabLst/>
+            </a:pPr>
+            <a:r>
+              <a:rPr kumimoji="0" lang="ko-KR" altLang="ko-KR" sz="1400" b="0" i="0" u="none" strike="noStrike" cap="none" normalizeH="0" baseline="0" dirty="0">
+                <a:ln>
+                  <a:noFill/>
+                </a:ln>
+                <a:solidFill>
+                  <a:schemeClr val="tx1"/>
+                </a:solidFill>
+                <a:effectLst/>
+                <a:latin typeface="Arial" panose="020B0604020202020204" pitchFamily="34" charset="0"/>
+              </a:rPr>
+              <a:t>기술 별칭과 관계를 명시적으로 모델링함</a:t>
+            </a:r>
+          </a:p>
+          <a:p>
+            <a:pPr marL="0" marR="0" lvl="0" indent="0" algn="l" defTabSz="914400" rtl="0" eaLnBrk="0" fontAlgn="base" latinLnBrk="0" hangingPunct="0">
+              <a:lnSpc>
+                <a:spcPct val="100000"/>
+              </a:lnSpc>
+              <a:spcBef>
+                <a:spcPct val="0"/>
+              </a:spcBef>
+              <a:spcAft>
+                <a:spcPct val="0"/>
+              </a:spcAft>
+              <a:buClrTx/>
+              <a:buSzTx/>
+              <a:buFontTx/>
+              <a:buChar char="•"/>
+              <a:tabLst/>
+            </a:pPr>
+            <a:r>
+              <a:rPr kumimoji="0" lang="ko-KR" altLang="ko-KR" sz="1400" b="0" i="0" u="none" strike="noStrike" cap="none" normalizeH="0" baseline="0" dirty="0">
+                <a:ln>
+                  <a:noFill/>
+                </a:ln>
+                <a:solidFill>
+                  <a:schemeClr val="tx1"/>
+                </a:solidFill>
+                <a:effectLst/>
+                <a:latin typeface="Arial" panose="020B0604020202020204" pitchFamily="34" charset="0"/>
+              </a:rPr>
+              <a:t>수치를 LLM에 맡기지 않고 재검증함</a:t>
+            </a:r>
+          </a:p>
+          <a:p>
+            <a:pPr marL="0" marR="0" lvl="0" indent="0" algn="l" defTabSz="914400" rtl="0" eaLnBrk="0" fontAlgn="base" latinLnBrk="0" hangingPunct="0">
+              <a:lnSpc>
+                <a:spcPct val="100000"/>
+              </a:lnSpc>
+              <a:spcBef>
+                <a:spcPct val="0"/>
+              </a:spcBef>
+              <a:spcAft>
+                <a:spcPct val="0"/>
+              </a:spcAft>
+              <a:buClrTx/>
+              <a:buSzTx/>
+              <a:buFontTx/>
+              <a:buChar char="•"/>
+              <a:tabLst/>
+            </a:pPr>
+            <a:r>
+              <a:rPr kumimoji="0" lang="ko-KR" altLang="ko-KR" sz="1400" b="0" i="0" u="none" strike="noStrike" cap="none" normalizeH="0" baseline="0" dirty="0">
+                <a:ln>
+                  <a:noFill/>
+                </a:ln>
+                <a:solidFill>
+                  <a:schemeClr val="tx1"/>
+                </a:solidFill>
+                <a:effectLst/>
+                <a:latin typeface="Arial" panose="020B0604020202020204" pitchFamily="34" charset="0"/>
+              </a:rPr>
+              <a:t>비용·속도·품질을 실제 usage로 측정함</a:t>
+            </a:r>
+          </a:p>
+          <a:p>
+            <a:pPr marL="0" marR="0" lvl="0" indent="0" algn="l" defTabSz="914400" rtl="0" eaLnBrk="0" fontAlgn="base" latinLnBrk="0" hangingPunct="0">
+              <a:lnSpc>
+                <a:spcPct val="100000"/>
+              </a:lnSpc>
+              <a:spcBef>
+                <a:spcPct val="0"/>
+              </a:spcBef>
+              <a:spcAft>
+                <a:spcPct val="0"/>
+              </a:spcAft>
+              <a:buClrTx/>
+              <a:buSzTx/>
+              <a:buFontTx/>
+              <a:buChar char="•"/>
+              <a:tabLst/>
+            </a:pPr>
+            <a:r>
+              <a:rPr kumimoji="0" lang="ko-KR" altLang="ko-KR" sz="1400" b="0" i="0" u="none" strike="noStrike" cap="none" normalizeH="0" baseline="0" dirty="0">
+                <a:ln>
+                  <a:noFill/>
+                </a:ln>
+                <a:solidFill>
+                  <a:schemeClr val="tx1"/>
+                </a:solidFill>
+                <a:effectLst/>
+                <a:latin typeface="Arial" panose="020B0604020202020204" pitchFamily="34" charset="0"/>
+              </a:rPr>
+              <a:t>테스트와 정답 세트 평가가 존재함</a:t>
+            </a:r>
+            <a:endParaRPr kumimoji="0" lang="en-US" altLang="ko-KR" sz="1400" b="0" i="0" u="none" strike="noStrike" cap="none" normalizeH="0" baseline="0" dirty="0">
+              <a:ln>
+                <a:noFill/>
+              </a:ln>
+              <a:solidFill>
+                <a:schemeClr val="tx1"/>
+              </a:solidFill>
+              <a:effectLst/>
+              <a:latin typeface="Arial" panose="020B0604020202020204" pitchFamily="34" charset="0"/>
+            </a:endParaRPr>
+          </a:p>
+          <a:p>
+            <a:pPr marL="0" marR="0" lvl="0" indent="0" algn="l" defTabSz="914400" rtl="0" eaLnBrk="0" fontAlgn="base" latinLnBrk="0" hangingPunct="0">
+              <a:lnSpc>
+                <a:spcPct val="100000"/>
+              </a:lnSpc>
+              <a:spcBef>
+                <a:spcPct val="0"/>
+              </a:spcBef>
+              <a:spcAft>
+                <a:spcPct val="0"/>
+              </a:spcAft>
+              <a:buClrTx/>
+              <a:buSzTx/>
+              <a:buFontTx/>
+              <a:buChar char="•"/>
+              <a:tabLst/>
+            </a:pPr>
+            <a:endParaRPr kumimoji="0" lang="ko-KR" altLang="ko-KR" sz="1400" b="0" i="0" u="none" strike="noStrike" cap="none" normalizeH="0" baseline="0" dirty="0">
+              <a:ln>
+                <a:noFill/>
+              </a:ln>
+              <a:solidFill>
+                <a:schemeClr val="tx1"/>
+              </a:solidFill>
+              <a:effectLst/>
+              <a:latin typeface="Arial" panose="020B0604020202020204" pitchFamily="34" charset="0"/>
+            </a:endParaRPr>
+          </a:p>
+          <a:p>
+            <a:pPr marL="0" marR="0" lvl="0" indent="0" algn="l" defTabSz="914400" rtl="0" eaLnBrk="0" fontAlgn="base" latinLnBrk="0" hangingPunct="0">
+              <a:lnSpc>
+                <a:spcPct val="100000"/>
+              </a:lnSpc>
+              <a:spcBef>
+                <a:spcPct val="0"/>
+              </a:spcBef>
+              <a:spcAft>
+                <a:spcPct val="0"/>
+              </a:spcAft>
+              <a:buClrTx/>
+              <a:buSzTx/>
+              <a:buFontTx/>
+              <a:buNone/>
+              <a:tabLst/>
+            </a:pPr>
+            <a:r>
+              <a:rPr kumimoji="0" lang="ko-KR" altLang="ko-KR" sz="1400" b="0" i="0" u="none" strike="noStrike" cap="none" normalizeH="0" baseline="0" dirty="0">
+                <a:ln>
+                  <a:noFill/>
+                </a:ln>
+                <a:solidFill>
+                  <a:schemeClr val="tx1"/>
+                </a:solidFill>
+                <a:effectLst/>
+                <a:latin typeface="Arial" panose="020B0604020202020204" pitchFamily="34" charset="0"/>
+              </a:rPr>
+              <a:t>포트폴리오에는 다음처럼 적는 것을 추천합니다.</a:t>
+            </a:r>
+          </a:p>
+          <a:p>
+            <a:pPr marL="0" marR="0" lvl="0" indent="0" algn="l" defTabSz="914400" rtl="0" eaLnBrk="0" fontAlgn="base" latinLnBrk="0" hangingPunct="0">
+              <a:lnSpc>
+                <a:spcPct val="100000"/>
+              </a:lnSpc>
+              <a:spcBef>
+                <a:spcPct val="0"/>
+              </a:spcBef>
+              <a:spcAft>
+                <a:spcPct val="0"/>
+              </a:spcAft>
+              <a:buClrTx/>
+              <a:buSzTx/>
+              <a:buFontTx/>
+              <a:buNone/>
+              <a:tabLst/>
+            </a:pPr>
+            <a:r>
+              <a:rPr kumimoji="0" lang="ko-KR" altLang="ko-KR" sz="1400" b="0" i="0" u="none" strike="noStrike" cap="none" normalizeH="0" baseline="0" dirty="0">
+                <a:ln>
+                  <a:noFill/>
+                </a:ln>
+                <a:solidFill>
+                  <a:srgbClr val="FF0000"/>
+                </a:solidFill>
+                <a:effectLst/>
+                <a:latin typeface="Arial" panose="020B0604020202020204" pitchFamily="34" charset="0"/>
+              </a:rPr>
+              <a:t>커리어 대화·문서·채용공고 원문을 손실 없이 보존하고, 경험·기술·정량 성과·공고 요구사항 간 관계를 구조화하는 경량 도메인 온톨로지를 설계했습니다. 임베딩은 후보 검색에만 사용하고, canonical 기술 ID·정량 조건·원문 인용 검증으로 최종 매칭을 결정하는 하이브리드 NLU/RAG 파이프라인을 구현했습니다.</a:t>
+            </a:r>
+            <a:endParaRPr kumimoji="0" lang="en-US" altLang="ko-KR" sz="1400" b="0" i="0" u="none" strike="noStrike" cap="none" normalizeH="0" baseline="0" dirty="0">
+              <a:ln>
+                <a:noFill/>
+              </a:ln>
+              <a:solidFill>
+                <a:srgbClr val="FF0000"/>
+              </a:solidFill>
+              <a:effectLst/>
+              <a:latin typeface="Arial" panose="020B0604020202020204" pitchFamily="34" charset="0"/>
+            </a:endParaRPr>
+          </a:p>
+          <a:p>
+            <a:pPr marL="0" marR="0" lvl="0" indent="0" algn="l" defTabSz="914400" rtl="0" eaLnBrk="0" fontAlgn="base" latinLnBrk="0" hangingPunct="0">
+              <a:lnSpc>
+                <a:spcPct val="100000"/>
+              </a:lnSpc>
+              <a:spcBef>
+                <a:spcPct val="0"/>
+              </a:spcBef>
+              <a:spcAft>
+                <a:spcPct val="0"/>
+              </a:spcAft>
+              <a:buClrTx/>
+              <a:buSzTx/>
+              <a:buFontTx/>
+              <a:buNone/>
+              <a:tabLst/>
+            </a:pPr>
+            <a:endParaRPr kumimoji="0" lang="ko-KR" altLang="ko-KR" sz="1400" b="0" i="0" u="none" strike="noStrike" cap="none" normalizeH="0" baseline="0" dirty="0">
+              <a:ln>
+                <a:noFill/>
+              </a:ln>
+              <a:solidFill>
+                <a:srgbClr val="FF0000"/>
+              </a:solidFill>
+              <a:effectLst/>
+              <a:latin typeface="Arial" panose="020B0604020202020204" pitchFamily="34" charset="0"/>
+            </a:endParaRPr>
+          </a:p>
+          <a:p>
+            <a:pPr marL="0" marR="0" lvl="0" indent="0" algn="l" defTabSz="914400" rtl="0" eaLnBrk="0" fontAlgn="base" latinLnBrk="0" hangingPunct="0">
+              <a:lnSpc>
+                <a:spcPct val="100000"/>
+              </a:lnSpc>
+              <a:spcBef>
+                <a:spcPct val="0"/>
+              </a:spcBef>
+              <a:spcAft>
+                <a:spcPct val="0"/>
+              </a:spcAft>
+              <a:buClrTx/>
+              <a:buSzTx/>
+              <a:buFontTx/>
+              <a:buNone/>
+              <a:tabLst/>
+            </a:pPr>
+            <a:r>
+              <a:rPr kumimoji="0" lang="ko-KR" altLang="ko-KR" sz="1400" b="0" i="0" u="none" strike="noStrike" cap="none" normalizeH="0" baseline="0" dirty="0">
+                <a:ln>
+                  <a:noFill/>
+                </a:ln>
+                <a:solidFill>
+                  <a:schemeClr val="tx1"/>
+                </a:solidFill>
+                <a:effectLst/>
+                <a:latin typeface="Arial" panose="020B0604020202020204" pitchFamily="34" charset="0"/>
+              </a:rPr>
+              <a:t>데이터 구조에 대해서는:</a:t>
+            </a:r>
+          </a:p>
+          <a:p>
+            <a:pPr marL="0" marR="0" lvl="0" indent="0" algn="l" defTabSz="914400" rtl="0" eaLnBrk="0" fontAlgn="base" latinLnBrk="0" hangingPunct="0">
+              <a:lnSpc>
+                <a:spcPct val="100000"/>
+              </a:lnSpc>
+              <a:spcBef>
+                <a:spcPct val="0"/>
+              </a:spcBef>
+              <a:spcAft>
+                <a:spcPct val="0"/>
+              </a:spcAft>
+              <a:buClrTx/>
+              <a:buSzTx/>
+              <a:buFontTx/>
+              <a:buNone/>
+              <a:tabLst/>
+            </a:pPr>
+            <a:r>
+              <a:rPr kumimoji="0" lang="ko-KR" altLang="ko-KR" sz="1400" b="0" i="0" u="none" strike="noStrike" cap="none" normalizeH="0" baseline="0" dirty="0">
+                <a:ln>
+                  <a:noFill/>
+                </a:ln>
+                <a:solidFill>
+                  <a:srgbClr val="FF0000"/>
+                </a:solidFill>
+                <a:effectLst/>
+                <a:latin typeface="Arial" panose="020B0604020202020204" pitchFamily="34" charset="0"/>
+              </a:rPr>
+              <a:t>원본–근거–구조화 정보–검색 인덱스를 분리하여 데이터 레이크의 계층화와 lineage 원칙을 적용했으며, 향후 객체 저장소와 데이터 카탈로그로 확장 가능한 구조를 마련했습니다.</a:t>
+            </a:r>
+          </a:p>
+        </p:txBody>
+      </p:sp>
+    </p:spTree>
+    <p:extLst>
+      <p:ext uri="{BB962C8B-B14F-4D97-AF65-F5344CB8AC3E}">
+        <p14:creationId xmlns:p14="http://schemas.microsoft.com/office/powerpoint/2010/main" val="3822567409"/>
+      </p:ext>
+    </p:extLst>
+  </p:cSld>
+  <p:clrMapOvr>
+    <a:masterClrMapping/>
+  </p:clrMapOvr>
+</p:sld>
+</file>
+
+<file path=ppt/slides/slide25.xml><?xml version="1.0" encoding="utf-8"?>
+<p:sld xmlns:a="http://schemas.openxmlformats.org/drawingml/2006/main" xmlns:r="http://schemas.openxmlformats.org/officeDocument/2006/relationships" xmlns:p="http://schemas.openxmlformats.org/presentationml/2006/main">
+  <p:cSld>
+    <p:spTree>
+      <p:nvGrpSpPr>
+        <p:cNvPr id="1" name=""/>
+        <p:cNvGrpSpPr/>
+        <p:nvPr/>
+      </p:nvGrpSpPr>
+      <p:grpSpPr>
+        <a:xfrm>
+          <a:off x="0" y="0"/>
+          <a:ext cx="0" cy="0"/>
+          <a:chOff x="0" y="0"/>
+          <a:chExt cx="0" cy="0"/>
+        </a:xfrm>
+      </p:grpSpPr>
+      <p:graphicFrame>
+        <p:nvGraphicFramePr>
+          <p:cNvPr id="6" name="Object 5">
+            <a:extLst>
+              <a:ext uri="{FF2B5EF4-FFF2-40B4-BE49-F238E27FC236}">
+                <a16:creationId xmlns:a16="http://schemas.microsoft.com/office/drawing/2014/main" id="{C987540B-3972-4C5A-83E3-EB8A2C7BF0C7}"/>
+              </a:ext>
+            </a:extLst>
+          </p:cNvPr>
+          <p:cNvGraphicFramePr>
+            <a:graphicFrameLocks noChangeAspect="1"/>
+          </p:cNvGraphicFramePr>
+          <p:nvPr>
+            <p:extLst>
+              <p:ext uri="{D42A27DB-BD31-4B8C-83A1-F6EECF244321}">
+                <p14:modId xmlns:p14="http://schemas.microsoft.com/office/powerpoint/2010/main" val="2556279163"/>
+              </p:ext>
+            </p:extLst>
+          </p:nvPr>
+        </p:nvGraphicFramePr>
+        <p:xfrm>
+          <a:off x="-548981" y="2632074"/>
+          <a:ext cx="12908962" cy="2308225"/>
+        </p:xfrm>
+        <a:graphic>
+          <a:graphicData uri="http://schemas.openxmlformats.org/presentationml/2006/ole">
+            <mc:AlternateContent xmlns:mc="http://schemas.openxmlformats.org/markup-compatibility/2006">
+              <mc:Choice xmlns:v="urn:schemas-microsoft-com:vml" Requires="v">
+                <p:oleObj spid="_x0000_s16387" name="Packager Shell Object" showAsIcon="1" r:id="rId3" imgW="2876456" imgH="514350" progId="Package">
+                  <p:embed/>
+                </p:oleObj>
+              </mc:Choice>
+              <mc:Fallback>
+                <p:oleObj name="Packager Shell Object" showAsIcon="1" r:id="rId3" imgW="2876456" imgH="514350" progId="Package">
+                  <p:embed/>
+                  <p:pic>
+                    <p:nvPicPr>
+                      <p:cNvPr id="0" name=""/>
+                      <p:cNvPicPr/>
+                      <p:nvPr/>
+                    </p:nvPicPr>
+                    <p:blipFill>
+                      <a:blip r:embed="rId4"/>
+                      <a:stretch>
+                        <a:fillRect/>
+                      </a:stretch>
+                    </p:blipFill>
+                    <p:spPr>
+                      <a:xfrm>
+                        <a:off x="-548981" y="2632074"/>
+                        <a:ext cx="12908962" cy="2308225"/>
+                      </a:xfrm>
+                      <a:prstGeom prst="rect">
+                        <a:avLst/>
+                      </a:prstGeom>
+                    </p:spPr>
+                  </p:pic>
+                </p:oleObj>
+              </mc:Fallback>
+            </mc:AlternateContent>
+          </a:graphicData>
+        </a:graphic>
+      </p:graphicFrame>
+    </p:spTree>
+    <p:extLst>
+      <p:ext uri="{BB962C8B-B14F-4D97-AF65-F5344CB8AC3E}">
+        <p14:creationId xmlns:p14="http://schemas.microsoft.com/office/powerpoint/2010/main" val="3860033239"/>
+      </p:ext>
+    </p:extLst>
+  </p:cSld>
+  <p:clrMapOvr>
+    <a:masterClrMapping/>
+  </p:clrMapOvr>
+</p:sld>
+</file>
+
+<file path=ppt/slides/slide26.xml><?xml version="1.0" encoding="utf-8"?>
+<p:sld xmlns:a="http://schemas.openxmlformats.org/drawingml/2006/main" xmlns:r="http://schemas.openxmlformats.org/officeDocument/2006/relationships" xmlns:p="http://schemas.openxmlformats.org/presentationml/2006/main">
+  <p:cSld>
+    <p:spTree>
+      <p:nvGrpSpPr>
+        <p:cNvPr id="1" name=""/>
+        <p:cNvGrpSpPr/>
+        <p:nvPr/>
+      </p:nvGrpSpPr>
+      <p:grpSpPr>
+        <a:xfrm>
+          <a:off x="0" y="0"/>
+          <a:ext cx="0" cy="0"/>
+          <a:chOff x="0" y="0"/>
+          <a:chExt cx="0" cy="0"/>
+        </a:xfrm>
+      </p:grpSpPr>
+    </p:spTree>
+    <p:extLst>
+      <p:ext uri="{BB962C8B-B14F-4D97-AF65-F5344CB8AC3E}">
+        <p14:creationId xmlns:p14="http://schemas.microsoft.com/office/powerpoint/2010/main" val="2971742635"/>
+      </p:ext>
+    </p:extLst>
+  </p:cSld>
+  <p:clrMapOvr>
+    <a:masterClrMapping/>
+  </p:clrMapOvr>
+</p:sld>
+</file>
+
 <file path=ppt/slides/slide3.xml><?xml version="1.0" encoding="utf-8"?>
 <p:sld xmlns:a="http://schemas.openxmlformats.org/drawingml/2006/main" xmlns:r="http://schemas.openxmlformats.org/officeDocument/2006/relationships" xmlns:p="http://schemas.openxmlformats.org/presentationml/2006/main">
   <p:cSld>

--- a/포트폴리오 및 기타 raw 자료/커리어 메모리 개선 및 고도화.pptx
+++ b/포트폴리오 및 기타 raw 자료/커리어 메모리 개선 및 고도화.pptx
@@ -14,23 +14,24 @@
     <p:sldId id="264" r:id="rId8"/>
     <p:sldId id="263" r:id="rId9"/>
     <p:sldId id="262" r:id="rId10"/>
-    <p:sldId id="265" r:id="rId11"/>
-    <p:sldId id="268" r:id="rId12"/>
-    <p:sldId id="266" r:id="rId13"/>
-    <p:sldId id="267" r:id="rId14"/>
-    <p:sldId id="269" r:id="rId15"/>
-    <p:sldId id="270" r:id="rId16"/>
-    <p:sldId id="271" r:id="rId17"/>
-    <p:sldId id="272" r:id="rId18"/>
-    <p:sldId id="273" r:id="rId19"/>
-    <p:sldId id="274" r:id="rId20"/>
-    <p:sldId id="275" r:id="rId21"/>
-    <p:sldId id="276" r:id="rId22"/>
-    <p:sldId id="277" r:id="rId23"/>
-    <p:sldId id="278" r:id="rId24"/>
-    <p:sldId id="279" r:id="rId25"/>
-    <p:sldId id="280" r:id="rId26"/>
-    <p:sldId id="281" r:id="rId27"/>
+    <p:sldId id="282" r:id="rId11"/>
+    <p:sldId id="265" r:id="rId12"/>
+    <p:sldId id="268" r:id="rId13"/>
+    <p:sldId id="266" r:id="rId14"/>
+    <p:sldId id="267" r:id="rId15"/>
+    <p:sldId id="269" r:id="rId16"/>
+    <p:sldId id="270" r:id="rId17"/>
+    <p:sldId id="271" r:id="rId18"/>
+    <p:sldId id="272" r:id="rId19"/>
+    <p:sldId id="273" r:id="rId20"/>
+    <p:sldId id="274" r:id="rId21"/>
+    <p:sldId id="275" r:id="rId22"/>
+    <p:sldId id="276" r:id="rId23"/>
+    <p:sldId id="277" r:id="rId24"/>
+    <p:sldId id="278" r:id="rId25"/>
+    <p:sldId id="279" r:id="rId26"/>
+    <p:sldId id="280" r:id="rId27"/>
+    <p:sldId id="281" r:id="rId28"/>
   </p:sldIdLst>
   <p:sldSz cx="12192000" cy="6858000"/>
   <p:notesSz cx="6858000" cy="9144000"/>
@@ -3455,6 +3456,2849 @@
       </p:grpSpPr>
       <p:sp>
         <p:nvSpPr>
+          <p:cNvPr id="5" name="TextBox 4">
+            <a:extLst>
+              <a:ext uri="{FF2B5EF4-FFF2-40B4-BE49-F238E27FC236}">
+                <a16:creationId xmlns:a16="http://schemas.microsoft.com/office/drawing/2014/main" id="{E1B25569-1BCC-43CC-8801-5000BA425564}"/>
+              </a:ext>
+            </a:extLst>
+          </p:cNvPr>
+          <p:cNvSpPr txBox="1"/>
+          <p:nvPr/>
+        </p:nvSpPr>
+        <p:spPr>
+          <a:xfrm>
+            <a:off x="304800" y="240715"/>
+            <a:ext cx="6096000" cy="369332"/>
+          </a:xfrm>
+          <a:prstGeom prst="rect">
+            <a:avLst/>
+          </a:prstGeom>
+          <a:noFill/>
+        </p:spPr>
+        <p:txBody>
+          <a:bodyPr wrap="square">
+            <a:spAutoFit/>
+          </a:bodyPr>
+          <a:lstStyle/>
+          <a:p>
+            <a:r>
+              <a:rPr lang="ko-KR" altLang="en-US" b="1" dirty="0"/>
+              <a:t>효율성</a:t>
+            </a:r>
+            <a:endParaRPr lang="ko-KR" altLang="en-US" dirty="0"/>
+          </a:p>
+        </p:txBody>
+      </p:sp>
+      <p:graphicFrame>
+        <p:nvGraphicFramePr>
+          <p:cNvPr id="6" name="Table 5">
+            <a:extLst>
+              <a:ext uri="{FF2B5EF4-FFF2-40B4-BE49-F238E27FC236}">
+                <a16:creationId xmlns:a16="http://schemas.microsoft.com/office/drawing/2014/main" id="{F34AB414-C78A-4C00-A85F-485EDD442EC0}"/>
+              </a:ext>
+            </a:extLst>
+          </p:cNvPr>
+          <p:cNvGraphicFramePr>
+            <a:graphicFrameLocks noGrp="1"/>
+          </p:cNvGraphicFramePr>
+          <p:nvPr>
+            <p:extLst>
+              <p:ext uri="{D42A27DB-BD31-4B8C-83A1-F6EECF244321}">
+                <p14:modId xmlns:p14="http://schemas.microsoft.com/office/powerpoint/2010/main" val="474516384"/>
+              </p:ext>
+            </p:extLst>
+          </p:nvPr>
+        </p:nvGraphicFramePr>
+        <p:xfrm>
+          <a:off x="381000" y="622162"/>
+          <a:ext cx="10515600" cy="2194560"/>
+        </p:xfrm>
+        <a:graphic>
+          <a:graphicData uri="http://schemas.openxmlformats.org/drawingml/2006/table">
+            <a:tbl>
+              <a:tblPr/>
+              <a:tblGrid>
+                <a:gridCol w="2628900">
+                  <a:extLst>
+                    <a:ext uri="{9D8B030D-6E8A-4147-A177-3AD203B41FA5}">
+                      <a16:colId xmlns:a16="http://schemas.microsoft.com/office/drawing/2014/main" val="108511331"/>
+                    </a:ext>
+                  </a:extLst>
+                </a:gridCol>
+                <a:gridCol w="2628900">
+                  <a:extLst>
+                    <a:ext uri="{9D8B030D-6E8A-4147-A177-3AD203B41FA5}">
+                      <a16:colId xmlns:a16="http://schemas.microsoft.com/office/drawing/2014/main" val="2755839446"/>
+                    </a:ext>
+                  </a:extLst>
+                </a:gridCol>
+                <a:gridCol w="2628900">
+                  <a:extLst>
+                    <a:ext uri="{9D8B030D-6E8A-4147-A177-3AD203B41FA5}">
+                      <a16:colId xmlns:a16="http://schemas.microsoft.com/office/drawing/2014/main" val="4021207158"/>
+                    </a:ext>
+                  </a:extLst>
+                </a:gridCol>
+                <a:gridCol w="2628900">
+                  <a:extLst>
+                    <a:ext uri="{9D8B030D-6E8A-4147-A177-3AD203B41FA5}">
+                      <a16:colId xmlns:a16="http://schemas.microsoft.com/office/drawing/2014/main" val="2280444483"/>
+                    </a:ext>
+                  </a:extLst>
+                </a:gridCol>
+              </a:tblGrid>
+              <a:tr h="0">
+                <a:tc>
+                  <a:txBody>
+                    <a:bodyPr/>
+                    <a:lstStyle/>
+                    <a:p>
+                      <a:r>
+                        <a:rPr lang="en-US"/>
+                        <a:t>KPI</a:t>
+                      </a:r>
+                    </a:p>
+                  </a:txBody>
+                  <a:tcPr anchor="ctr">
+                    <a:lnL w="12700" cap="flat" cmpd="sng" algn="ctr">
+                      <a:solidFill>
+                        <a:schemeClr val="tx1"/>
+                      </a:solidFill>
+                      <a:prstDash val="solid"/>
+                      <a:round/>
+                      <a:headEnd type="none" w="med" len="med"/>
+                      <a:tailEnd type="none" w="med" len="med"/>
+                    </a:lnL>
+                    <a:lnR w="12700" cap="flat" cmpd="sng" algn="ctr">
+                      <a:solidFill>
+                        <a:schemeClr val="tx1"/>
+                      </a:solidFill>
+                      <a:prstDash val="solid"/>
+                      <a:round/>
+                      <a:headEnd type="none" w="med" len="med"/>
+                      <a:tailEnd type="none" w="med" len="med"/>
+                    </a:lnR>
+                    <a:lnT w="12700" cap="flat" cmpd="sng" algn="ctr">
+                      <a:solidFill>
+                        <a:schemeClr val="tx1"/>
+                      </a:solidFill>
+                      <a:prstDash val="solid"/>
+                      <a:round/>
+                      <a:headEnd type="none" w="med" len="med"/>
+                      <a:tailEnd type="none" w="med" len="med"/>
+                    </a:lnT>
+                    <a:lnB w="12700" cap="flat" cmpd="sng" algn="ctr">
+                      <a:solidFill>
+                        <a:schemeClr val="tx1"/>
+                      </a:solidFill>
+                      <a:prstDash val="solid"/>
+                      <a:round/>
+                      <a:headEnd type="none" w="med" len="med"/>
+                      <a:tailEnd type="none" w="med" len="med"/>
+                    </a:lnB>
+                  </a:tcPr>
+                </a:tc>
+                <a:tc>
+                  <a:txBody>
+                    <a:bodyPr/>
+                    <a:lstStyle/>
+                    <a:p>
+                      <a:pPr algn="r"/>
+                      <a:r>
+                        <a:rPr lang="ko-KR" altLang="en-US"/>
+                        <a:t>기존</a:t>
+                      </a:r>
+                    </a:p>
+                  </a:txBody>
+                  <a:tcPr anchor="ctr">
+                    <a:lnL w="12700" cap="flat" cmpd="sng" algn="ctr">
+                      <a:solidFill>
+                        <a:schemeClr val="tx1"/>
+                      </a:solidFill>
+                      <a:prstDash val="solid"/>
+                      <a:round/>
+                      <a:headEnd type="none" w="med" len="med"/>
+                      <a:tailEnd type="none" w="med" len="med"/>
+                    </a:lnL>
+                    <a:lnR w="12700" cap="flat" cmpd="sng" algn="ctr">
+                      <a:solidFill>
+                        <a:schemeClr val="tx1"/>
+                      </a:solidFill>
+                      <a:prstDash val="solid"/>
+                      <a:round/>
+                      <a:headEnd type="none" w="med" len="med"/>
+                      <a:tailEnd type="none" w="med" len="med"/>
+                    </a:lnR>
+                    <a:lnT w="12700" cap="flat" cmpd="sng" algn="ctr">
+                      <a:solidFill>
+                        <a:schemeClr val="tx1"/>
+                      </a:solidFill>
+                      <a:prstDash val="solid"/>
+                      <a:round/>
+                      <a:headEnd type="none" w="med" len="med"/>
+                      <a:tailEnd type="none" w="med" len="med"/>
+                    </a:lnT>
+                    <a:lnB w="12700" cap="flat" cmpd="sng" algn="ctr">
+                      <a:solidFill>
+                        <a:schemeClr val="tx1"/>
+                      </a:solidFill>
+                      <a:prstDash val="solid"/>
+                      <a:round/>
+                      <a:headEnd type="none" w="med" len="med"/>
+                      <a:tailEnd type="none" w="med" len="med"/>
+                    </a:lnB>
+                  </a:tcPr>
+                </a:tc>
+                <a:tc>
+                  <a:txBody>
+                    <a:bodyPr/>
+                    <a:lstStyle/>
+                    <a:p>
+                      <a:pPr algn="r"/>
+                      <a:r>
+                        <a:rPr lang="ko-KR" altLang="en-US"/>
+                        <a:t>개선</a:t>
+                      </a:r>
+                    </a:p>
+                  </a:txBody>
+                  <a:tcPr anchor="ctr">
+                    <a:lnL w="12700" cap="flat" cmpd="sng" algn="ctr">
+                      <a:solidFill>
+                        <a:schemeClr val="tx1"/>
+                      </a:solidFill>
+                      <a:prstDash val="solid"/>
+                      <a:round/>
+                      <a:headEnd type="none" w="med" len="med"/>
+                      <a:tailEnd type="none" w="med" len="med"/>
+                    </a:lnL>
+                    <a:lnR w="12700" cap="flat" cmpd="sng" algn="ctr">
+                      <a:solidFill>
+                        <a:schemeClr val="tx1"/>
+                      </a:solidFill>
+                      <a:prstDash val="solid"/>
+                      <a:round/>
+                      <a:headEnd type="none" w="med" len="med"/>
+                      <a:tailEnd type="none" w="med" len="med"/>
+                    </a:lnR>
+                    <a:lnT w="12700" cap="flat" cmpd="sng" algn="ctr">
+                      <a:solidFill>
+                        <a:schemeClr val="tx1"/>
+                      </a:solidFill>
+                      <a:prstDash val="solid"/>
+                      <a:round/>
+                      <a:headEnd type="none" w="med" len="med"/>
+                      <a:tailEnd type="none" w="med" len="med"/>
+                    </a:lnT>
+                    <a:lnB w="12700" cap="flat" cmpd="sng" algn="ctr">
+                      <a:solidFill>
+                        <a:schemeClr val="tx1"/>
+                      </a:solidFill>
+                      <a:prstDash val="solid"/>
+                      <a:round/>
+                      <a:headEnd type="none" w="med" len="med"/>
+                      <a:tailEnd type="none" w="med" len="med"/>
+                    </a:lnB>
+                  </a:tcPr>
+                </a:tc>
+                <a:tc>
+                  <a:txBody>
+                    <a:bodyPr/>
+                    <a:lstStyle/>
+                    <a:p>
+                      <a:pPr algn="r"/>
+                      <a:r>
+                        <a:rPr lang="ko-KR" altLang="en-US"/>
+                        <a:t>변화</a:t>
+                      </a:r>
+                    </a:p>
+                  </a:txBody>
+                  <a:tcPr anchor="ctr">
+                    <a:lnL w="12700" cap="flat" cmpd="sng" algn="ctr">
+                      <a:solidFill>
+                        <a:schemeClr val="tx1"/>
+                      </a:solidFill>
+                      <a:prstDash val="solid"/>
+                      <a:round/>
+                      <a:headEnd type="none" w="med" len="med"/>
+                      <a:tailEnd type="none" w="med" len="med"/>
+                    </a:lnL>
+                    <a:lnR w="12700" cap="flat" cmpd="sng" algn="ctr">
+                      <a:solidFill>
+                        <a:schemeClr val="tx1"/>
+                      </a:solidFill>
+                      <a:prstDash val="solid"/>
+                      <a:round/>
+                      <a:headEnd type="none" w="med" len="med"/>
+                      <a:tailEnd type="none" w="med" len="med"/>
+                    </a:lnR>
+                    <a:lnT w="12700" cap="flat" cmpd="sng" algn="ctr">
+                      <a:solidFill>
+                        <a:schemeClr val="tx1"/>
+                      </a:solidFill>
+                      <a:prstDash val="solid"/>
+                      <a:round/>
+                      <a:headEnd type="none" w="med" len="med"/>
+                      <a:tailEnd type="none" w="med" len="med"/>
+                    </a:lnT>
+                    <a:lnB w="12700" cap="flat" cmpd="sng" algn="ctr">
+                      <a:solidFill>
+                        <a:schemeClr val="tx1"/>
+                      </a:solidFill>
+                      <a:prstDash val="solid"/>
+                      <a:round/>
+                      <a:headEnd type="none" w="med" len="med"/>
+                      <a:tailEnd type="none" w="med" len="med"/>
+                    </a:lnB>
+                  </a:tcPr>
+                </a:tc>
+                <a:extLst>
+                  <a:ext uri="{0D108BD9-81ED-4DB2-BD59-A6C34878D82A}">
+                    <a16:rowId xmlns:a16="http://schemas.microsoft.com/office/drawing/2014/main" val="2850330303"/>
+                  </a:ext>
+                </a:extLst>
+              </a:tr>
+              <a:tr h="0">
+                <a:tc>
+                  <a:txBody>
+                    <a:bodyPr/>
+                    <a:lstStyle/>
+                    <a:p>
+                      <a:r>
+                        <a:rPr lang="en-US"/>
+                        <a:t>LLM </a:t>
+                      </a:r>
+                      <a:r>
+                        <a:rPr lang="ko-KR" altLang="en-US"/>
+                        <a:t>호출</a:t>
+                      </a:r>
+                    </a:p>
+                  </a:txBody>
+                  <a:tcPr anchor="ctr">
+                    <a:lnL w="12700" cap="flat" cmpd="sng" algn="ctr">
+                      <a:solidFill>
+                        <a:schemeClr val="tx1"/>
+                      </a:solidFill>
+                      <a:prstDash val="solid"/>
+                      <a:round/>
+                      <a:headEnd type="none" w="med" len="med"/>
+                      <a:tailEnd type="none" w="med" len="med"/>
+                    </a:lnL>
+                    <a:lnR w="12700" cap="flat" cmpd="sng" algn="ctr">
+                      <a:solidFill>
+                        <a:schemeClr val="tx1"/>
+                      </a:solidFill>
+                      <a:prstDash val="solid"/>
+                      <a:round/>
+                      <a:headEnd type="none" w="med" len="med"/>
+                      <a:tailEnd type="none" w="med" len="med"/>
+                    </a:lnR>
+                    <a:lnT w="12700" cap="flat" cmpd="sng" algn="ctr">
+                      <a:solidFill>
+                        <a:schemeClr val="tx1"/>
+                      </a:solidFill>
+                      <a:prstDash val="solid"/>
+                      <a:round/>
+                      <a:headEnd type="none" w="med" len="med"/>
+                      <a:tailEnd type="none" w="med" len="med"/>
+                    </a:lnT>
+                    <a:lnB w="12700" cap="flat" cmpd="sng" algn="ctr">
+                      <a:solidFill>
+                        <a:schemeClr val="tx1"/>
+                      </a:solidFill>
+                      <a:prstDash val="solid"/>
+                      <a:round/>
+                      <a:headEnd type="none" w="med" len="med"/>
+                      <a:tailEnd type="none" w="med" len="med"/>
+                    </a:lnB>
+                  </a:tcPr>
+                </a:tc>
+                <a:tc>
+                  <a:txBody>
+                    <a:bodyPr/>
+                    <a:lstStyle/>
+                    <a:p>
+                      <a:pPr algn="r"/>
+                      <a:r>
+                        <a:rPr lang="en-US" altLang="ko-KR"/>
+                        <a:t>7</a:t>
+                      </a:r>
+                      <a:r>
+                        <a:rPr lang="ko-KR" altLang="en-US"/>
+                        <a:t>회</a:t>
+                      </a:r>
+                    </a:p>
+                  </a:txBody>
+                  <a:tcPr anchor="ctr">
+                    <a:lnL w="12700" cap="flat" cmpd="sng" algn="ctr">
+                      <a:solidFill>
+                        <a:schemeClr val="tx1"/>
+                      </a:solidFill>
+                      <a:prstDash val="solid"/>
+                      <a:round/>
+                      <a:headEnd type="none" w="med" len="med"/>
+                      <a:tailEnd type="none" w="med" len="med"/>
+                    </a:lnL>
+                    <a:lnR w="12700" cap="flat" cmpd="sng" algn="ctr">
+                      <a:solidFill>
+                        <a:schemeClr val="tx1"/>
+                      </a:solidFill>
+                      <a:prstDash val="solid"/>
+                      <a:round/>
+                      <a:headEnd type="none" w="med" len="med"/>
+                      <a:tailEnd type="none" w="med" len="med"/>
+                    </a:lnR>
+                    <a:lnT w="12700" cap="flat" cmpd="sng" algn="ctr">
+                      <a:solidFill>
+                        <a:schemeClr val="tx1"/>
+                      </a:solidFill>
+                      <a:prstDash val="solid"/>
+                      <a:round/>
+                      <a:headEnd type="none" w="med" len="med"/>
+                      <a:tailEnd type="none" w="med" len="med"/>
+                    </a:lnT>
+                    <a:lnB w="12700" cap="flat" cmpd="sng" algn="ctr">
+                      <a:solidFill>
+                        <a:schemeClr val="tx1"/>
+                      </a:solidFill>
+                      <a:prstDash val="solid"/>
+                      <a:round/>
+                      <a:headEnd type="none" w="med" len="med"/>
+                      <a:tailEnd type="none" w="med" len="med"/>
+                    </a:lnB>
+                  </a:tcPr>
+                </a:tc>
+                <a:tc>
+                  <a:txBody>
+                    <a:bodyPr/>
+                    <a:lstStyle/>
+                    <a:p>
+                      <a:pPr algn="r"/>
+                      <a:r>
+                        <a:rPr lang="en-US" altLang="ko-KR"/>
+                        <a:t>2</a:t>
+                      </a:r>
+                      <a:r>
+                        <a:rPr lang="ko-KR" altLang="en-US"/>
+                        <a:t>회</a:t>
+                      </a:r>
+                    </a:p>
+                  </a:txBody>
+                  <a:tcPr anchor="ctr">
+                    <a:lnL w="12700" cap="flat" cmpd="sng" algn="ctr">
+                      <a:solidFill>
+                        <a:schemeClr val="tx1"/>
+                      </a:solidFill>
+                      <a:prstDash val="solid"/>
+                      <a:round/>
+                      <a:headEnd type="none" w="med" len="med"/>
+                      <a:tailEnd type="none" w="med" len="med"/>
+                    </a:lnL>
+                    <a:lnR w="12700" cap="flat" cmpd="sng" algn="ctr">
+                      <a:solidFill>
+                        <a:schemeClr val="tx1"/>
+                      </a:solidFill>
+                      <a:prstDash val="solid"/>
+                      <a:round/>
+                      <a:headEnd type="none" w="med" len="med"/>
+                      <a:tailEnd type="none" w="med" len="med"/>
+                    </a:lnR>
+                    <a:lnT w="12700" cap="flat" cmpd="sng" algn="ctr">
+                      <a:solidFill>
+                        <a:schemeClr val="tx1"/>
+                      </a:solidFill>
+                      <a:prstDash val="solid"/>
+                      <a:round/>
+                      <a:headEnd type="none" w="med" len="med"/>
+                      <a:tailEnd type="none" w="med" len="med"/>
+                    </a:lnT>
+                    <a:lnB w="12700" cap="flat" cmpd="sng" algn="ctr">
+                      <a:solidFill>
+                        <a:schemeClr val="tx1"/>
+                      </a:solidFill>
+                      <a:prstDash val="solid"/>
+                      <a:round/>
+                      <a:headEnd type="none" w="med" len="med"/>
+                      <a:tailEnd type="none" w="med" len="med"/>
+                    </a:lnB>
+                  </a:tcPr>
+                </a:tc>
+                <a:tc>
+                  <a:txBody>
+                    <a:bodyPr/>
+                    <a:lstStyle/>
+                    <a:p>
+                      <a:pPr algn="r"/>
+                      <a:r>
+                        <a:rPr lang="en-US" altLang="ko-KR" b="1"/>
+                        <a:t>-71.43%</a:t>
+                      </a:r>
+                      <a:endParaRPr lang="ko-KR" altLang="en-US"/>
+                    </a:p>
+                  </a:txBody>
+                  <a:tcPr anchor="ctr">
+                    <a:lnL w="12700" cap="flat" cmpd="sng" algn="ctr">
+                      <a:solidFill>
+                        <a:schemeClr val="tx1"/>
+                      </a:solidFill>
+                      <a:prstDash val="solid"/>
+                      <a:round/>
+                      <a:headEnd type="none" w="med" len="med"/>
+                      <a:tailEnd type="none" w="med" len="med"/>
+                    </a:lnL>
+                    <a:lnR w="12700" cap="flat" cmpd="sng" algn="ctr">
+                      <a:solidFill>
+                        <a:schemeClr val="tx1"/>
+                      </a:solidFill>
+                      <a:prstDash val="solid"/>
+                      <a:round/>
+                      <a:headEnd type="none" w="med" len="med"/>
+                      <a:tailEnd type="none" w="med" len="med"/>
+                    </a:lnR>
+                    <a:lnT w="12700" cap="flat" cmpd="sng" algn="ctr">
+                      <a:solidFill>
+                        <a:schemeClr val="tx1"/>
+                      </a:solidFill>
+                      <a:prstDash val="solid"/>
+                      <a:round/>
+                      <a:headEnd type="none" w="med" len="med"/>
+                      <a:tailEnd type="none" w="med" len="med"/>
+                    </a:lnT>
+                    <a:lnB w="12700" cap="flat" cmpd="sng" algn="ctr">
+                      <a:solidFill>
+                        <a:schemeClr val="tx1"/>
+                      </a:solidFill>
+                      <a:prstDash val="solid"/>
+                      <a:round/>
+                      <a:headEnd type="none" w="med" len="med"/>
+                      <a:tailEnd type="none" w="med" len="med"/>
+                    </a:lnB>
+                  </a:tcPr>
+                </a:tc>
+                <a:extLst>
+                  <a:ext uri="{0D108BD9-81ED-4DB2-BD59-A6C34878D82A}">
+                    <a16:rowId xmlns:a16="http://schemas.microsoft.com/office/drawing/2014/main" val="3952102992"/>
+                  </a:ext>
+                </a:extLst>
+              </a:tr>
+              <a:tr h="0">
+                <a:tc>
+                  <a:txBody>
+                    <a:bodyPr/>
+                    <a:lstStyle/>
+                    <a:p>
+                      <a:r>
+                        <a:rPr lang="ko-KR" altLang="en-US"/>
+                        <a:t>입력 토큰</a:t>
+                      </a:r>
+                    </a:p>
+                  </a:txBody>
+                  <a:tcPr anchor="ctr">
+                    <a:lnL w="12700" cap="flat" cmpd="sng" algn="ctr">
+                      <a:solidFill>
+                        <a:schemeClr val="tx1"/>
+                      </a:solidFill>
+                      <a:prstDash val="solid"/>
+                      <a:round/>
+                      <a:headEnd type="none" w="med" len="med"/>
+                      <a:tailEnd type="none" w="med" len="med"/>
+                    </a:lnL>
+                    <a:lnR w="12700" cap="flat" cmpd="sng" algn="ctr">
+                      <a:solidFill>
+                        <a:schemeClr val="tx1"/>
+                      </a:solidFill>
+                      <a:prstDash val="solid"/>
+                      <a:round/>
+                      <a:headEnd type="none" w="med" len="med"/>
+                      <a:tailEnd type="none" w="med" len="med"/>
+                    </a:lnR>
+                    <a:lnT w="12700" cap="flat" cmpd="sng" algn="ctr">
+                      <a:solidFill>
+                        <a:schemeClr val="tx1"/>
+                      </a:solidFill>
+                      <a:prstDash val="solid"/>
+                      <a:round/>
+                      <a:headEnd type="none" w="med" len="med"/>
+                      <a:tailEnd type="none" w="med" len="med"/>
+                    </a:lnT>
+                    <a:lnB w="12700" cap="flat" cmpd="sng" algn="ctr">
+                      <a:solidFill>
+                        <a:schemeClr val="tx1"/>
+                      </a:solidFill>
+                      <a:prstDash val="solid"/>
+                      <a:round/>
+                      <a:headEnd type="none" w="med" len="med"/>
+                      <a:tailEnd type="none" w="med" len="med"/>
+                    </a:lnB>
+                  </a:tcPr>
+                </a:tc>
+                <a:tc>
+                  <a:txBody>
+                    <a:bodyPr/>
+                    <a:lstStyle/>
+                    <a:p>
+                      <a:pPr algn="r"/>
+                      <a:r>
+                        <a:rPr lang="en-US" altLang="ko-KR"/>
+                        <a:t>8,533.5</a:t>
+                      </a:r>
+                    </a:p>
+                  </a:txBody>
+                  <a:tcPr anchor="ctr">
+                    <a:lnL w="12700" cap="flat" cmpd="sng" algn="ctr">
+                      <a:solidFill>
+                        <a:schemeClr val="tx1"/>
+                      </a:solidFill>
+                      <a:prstDash val="solid"/>
+                      <a:round/>
+                      <a:headEnd type="none" w="med" len="med"/>
+                      <a:tailEnd type="none" w="med" len="med"/>
+                    </a:lnL>
+                    <a:lnR w="12700" cap="flat" cmpd="sng" algn="ctr">
+                      <a:solidFill>
+                        <a:schemeClr val="tx1"/>
+                      </a:solidFill>
+                      <a:prstDash val="solid"/>
+                      <a:round/>
+                      <a:headEnd type="none" w="med" len="med"/>
+                      <a:tailEnd type="none" w="med" len="med"/>
+                    </a:lnR>
+                    <a:lnT w="12700" cap="flat" cmpd="sng" algn="ctr">
+                      <a:solidFill>
+                        <a:schemeClr val="tx1"/>
+                      </a:solidFill>
+                      <a:prstDash val="solid"/>
+                      <a:round/>
+                      <a:headEnd type="none" w="med" len="med"/>
+                      <a:tailEnd type="none" w="med" len="med"/>
+                    </a:lnT>
+                    <a:lnB w="12700" cap="flat" cmpd="sng" algn="ctr">
+                      <a:solidFill>
+                        <a:schemeClr val="tx1"/>
+                      </a:solidFill>
+                      <a:prstDash val="solid"/>
+                      <a:round/>
+                      <a:headEnd type="none" w="med" len="med"/>
+                      <a:tailEnd type="none" w="med" len="med"/>
+                    </a:lnB>
+                  </a:tcPr>
+                </a:tc>
+                <a:tc>
+                  <a:txBody>
+                    <a:bodyPr/>
+                    <a:lstStyle/>
+                    <a:p>
+                      <a:pPr algn="r"/>
+                      <a:r>
+                        <a:rPr lang="en-US" altLang="ko-KR"/>
+                        <a:t>7,329.5</a:t>
+                      </a:r>
+                    </a:p>
+                  </a:txBody>
+                  <a:tcPr anchor="ctr">
+                    <a:lnL w="12700" cap="flat" cmpd="sng" algn="ctr">
+                      <a:solidFill>
+                        <a:schemeClr val="tx1"/>
+                      </a:solidFill>
+                      <a:prstDash val="solid"/>
+                      <a:round/>
+                      <a:headEnd type="none" w="med" len="med"/>
+                      <a:tailEnd type="none" w="med" len="med"/>
+                    </a:lnL>
+                    <a:lnR w="12700" cap="flat" cmpd="sng" algn="ctr">
+                      <a:solidFill>
+                        <a:schemeClr val="tx1"/>
+                      </a:solidFill>
+                      <a:prstDash val="solid"/>
+                      <a:round/>
+                      <a:headEnd type="none" w="med" len="med"/>
+                      <a:tailEnd type="none" w="med" len="med"/>
+                    </a:lnR>
+                    <a:lnT w="12700" cap="flat" cmpd="sng" algn="ctr">
+                      <a:solidFill>
+                        <a:schemeClr val="tx1"/>
+                      </a:solidFill>
+                      <a:prstDash val="solid"/>
+                      <a:round/>
+                      <a:headEnd type="none" w="med" len="med"/>
+                      <a:tailEnd type="none" w="med" len="med"/>
+                    </a:lnT>
+                    <a:lnB w="12700" cap="flat" cmpd="sng" algn="ctr">
+                      <a:solidFill>
+                        <a:schemeClr val="tx1"/>
+                      </a:solidFill>
+                      <a:prstDash val="solid"/>
+                      <a:round/>
+                      <a:headEnd type="none" w="med" len="med"/>
+                      <a:tailEnd type="none" w="med" len="med"/>
+                    </a:lnB>
+                  </a:tcPr>
+                </a:tc>
+                <a:tc>
+                  <a:txBody>
+                    <a:bodyPr/>
+                    <a:lstStyle/>
+                    <a:p>
+                      <a:pPr algn="r"/>
+                      <a:r>
+                        <a:rPr lang="en-US" altLang="ko-KR" b="1"/>
+                        <a:t>-14.11%</a:t>
+                      </a:r>
+                      <a:endParaRPr lang="ko-KR" altLang="en-US"/>
+                    </a:p>
+                  </a:txBody>
+                  <a:tcPr anchor="ctr">
+                    <a:lnL w="12700" cap="flat" cmpd="sng" algn="ctr">
+                      <a:solidFill>
+                        <a:schemeClr val="tx1"/>
+                      </a:solidFill>
+                      <a:prstDash val="solid"/>
+                      <a:round/>
+                      <a:headEnd type="none" w="med" len="med"/>
+                      <a:tailEnd type="none" w="med" len="med"/>
+                    </a:lnL>
+                    <a:lnR w="12700" cap="flat" cmpd="sng" algn="ctr">
+                      <a:solidFill>
+                        <a:schemeClr val="tx1"/>
+                      </a:solidFill>
+                      <a:prstDash val="solid"/>
+                      <a:round/>
+                      <a:headEnd type="none" w="med" len="med"/>
+                      <a:tailEnd type="none" w="med" len="med"/>
+                    </a:lnR>
+                    <a:lnT w="12700" cap="flat" cmpd="sng" algn="ctr">
+                      <a:solidFill>
+                        <a:schemeClr val="tx1"/>
+                      </a:solidFill>
+                      <a:prstDash val="solid"/>
+                      <a:round/>
+                      <a:headEnd type="none" w="med" len="med"/>
+                      <a:tailEnd type="none" w="med" len="med"/>
+                    </a:lnT>
+                    <a:lnB w="12700" cap="flat" cmpd="sng" algn="ctr">
+                      <a:solidFill>
+                        <a:schemeClr val="tx1"/>
+                      </a:solidFill>
+                      <a:prstDash val="solid"/>
+                      <a:round/>
+                      <a:headEnd type="none" w="med" len="med"/>
+                      <a:tailEnd type="none" w="med" len="med"/>
+                    </a:lnB>
+                  </a:tcPr>
+                </a:tc>
+                <a:extLst>
+                  <a:ext uri="{0D108BD9-81ED-4DB2-BD59-A6C34878D82A}">
+                    <a16:rowId xmlns:a16="http://schemas.microsoft.com/office/drawing/2014/main" val="1442987395"/>
+                  </a:ext>
+                </a:extLst>
+              </a:tr>
+              <a:tr h="0">
+                <a:tc>
+                  <a:txBody>
+                    <a:bodyPr/>
+                    <a:lstStyle/>
+                    <a:p>
+                      <a:r>
+                        <a:rPr lang="ko-KR" altLang="en-US" dirty="0"/>
+                        <a:t>출력 토큰</a:t>
+                      </a:r>
+                    </a:p>
+                  </a:txBody>
+                  <a:tcPr anchor="ctr">
+                    <a:lnL w="12700" cap="flat" cmpd="sng" algn="ctr">
+                      <a:solidFill>
+                        <a:schemeClr val="tx1"/>
+                      </a:solidFill>
+                      <a:prstDash val="solid"/>
+                      <a:round/>
+                      <a:headEnd type="none" w="med" len="med"/>
+                      <a:tailEnd type="none" w="med" len="med"/>
+                    </a:lnL>
+                    <a:lnR w="12700" cap="flat" cmpd="sng" algn="ctr">
+                      <a:solidFill>
+                        <a:schemeClr val="tx1"/>
+                      </a:solidFill>
+                      <a:prstDash val="solid"/>
+                      <a:round/>
+                      <a:headEnd type="none" w="med" len="med"/>
+                      <a:tailEnd type="none" w="med" len="med"/>
+                    </a:lnR>
+                    <a:lnT w="12700" cap="flat" cmpd="sng" algn="ctr">
+                      <a:solidFill>
+                        <a:schemeClr val="tx1"/>
+                      </a:solidFill>
+                      <a:prstDash val="solid"/>
+                      <a:round/>
+                      <a:headEnd type="none" w="med" len="med"/>
+                      <a:tailEnd type="none" w="med" len="med"/>
+                    </a:lnT>
+                    <a:lnB w="12700" cap="flat" cmpd="sng" algn="ctr">
+                      <a:solidFill>
+                        <a:schemeClr val="tx1"/>
+                      </a:solidFill>
+                      <a:prstDash val="solid"/>
+                      <a:round/>
+                      <a:headEnd type="none" w="med" len="med"/>
+                      <a:tailEnd type="none" w="med" len="med"/>
+                    </a:lnB>
+                  </a:tcPr>
+                </a:tc>
+                <a:tc>
+                  <a:txBody>
+                    <a:bodyPr/>
+                    <a:lstStyle/>
+                    <a:p>
+                      <a:pPr algn="r"/>
+                      <a:r>
+                        <a:rPr lang="en-US" altLang="ko-KR"/>
+                        <a:t>255.0</a:t>
+                      </a:r>
+                    </a:p>
+                  </a:txBody>
+                  <a:tcPr anchor="ctr">
+                    <a:lnL w="12700" cap="flat" cmpd="sng" algn="ctr">
+                      <a:solidFill>
+                        <a:schemeClr val="tx1"/>
+                      </a:solidFill>
+                      <a:prstDash val="solid"/>
+                      <a:round/>
+                      <a:headEnd type="none" w="med" len="med"/>
+                      <a:tailEnd type="none" w="med" len="med"/>
+                    </a:lnL>
+                    <a:lnR w="12700" cap="flat" cmpd="sng" algn="ctr">
+                      <a:solidFill>
+                        <a:schemeClr val="tx1"/>
+                      </a:solidFill>
+                      <a:prstDash val="solid"/>
+                      <a:round/>
+                      <a:headEnd type="none" w="med" len="med"/>
+                      <a:tailEnd type="none" w="med" len="med"/>
+                    </a:lnR>
+                    <a:lnT w="12700" cap="flat" cmpd="sng" algn="ctr">
+                      <a:solidFill>
+                        <a:schemeClr val="tx1"/>
+                      </a:solidFill>
+                      <a:prstDash val="solid"/>
+                      <a:round/>
+                      <a:headEnd type="none" w="med" len="med"/>
+                      <a:tailEnd type="none" w="med" len="med"/>
+                    </a:lnT>
+                    <a:lnB w="12700" cap="flat" cmpd="sng" algn="ctr">
+                      <a:solidFill>
+                        <a:schemeClr val="tx1"/>
+                      </a:solidFill>
+                      <a:prstDash val="solid"/>
+                      <a:round/>
+                      <a:headEnd type="none" w="med" len="med"/>
+                      <a:tailEnd type="none" w="med" len="med"/>
+                    </a:lnB>
+                  </a:tcPr>
+                </a:tc>
+                <a:tc>
+                  <a:txBody>
+                    <a:bodyPr/>
+                    <a:lstStyle/>
+                    <a:p>
+                      <a:pPr algn="r"/>
+                      <a:r>
+                        <a:rPr lang="en-US" altLang="ko-KR"/>
+                        <a:t>121.5</a:t>
+                      </a:r>
+                    </a:p>
+                  </a:txBody>
+                  <a:tcPr anchor="ctr">
+                    <a:lnL w="12700" cap="flat" cmpd="sng" algn="ctr">
+                      <a:solidFill>
+                        <a:schemeClr val="tx1"/>
+                      </a:solidFill>
+                      <a:prstDash val="solid"/>
+                      <a:round/>
+                      <a:headEnd type="none" w="med" len="med"/>
+                      <a:tailEnd type="none" w="med" len="med"/>
+                    </a:lnL>
+                    <a:lnR w="12700" cap="flat" cmpd="sng" algn="ctr">
+                      <a:solidFill>
+                        <a:schemeClr val="tx1"/>
+                      </a:solidFill>
+                      <a:prstDash val="solid"/>
+                      <a:round/>
+                      <a:headEnd type="none" w="med" len="med"/>
+                      <a:tailEnd type="none" w="med" len="med"/>
+                    </a:lnR>
+                    <a:lnT w="12700" cap="flat" cmpd="sng" algn="ctr">
+                      <a:solidFill>
+                        <a:schemeClr val="tx1"/>
+                      </a:solidFill>
+                      <a:prstDash val="solid"/>
+                      <a:round/>
+                      <a:headEnd type="none" w="med" len="med"/>
+                      <a:tailEnd type="none" w="med" len="med"/>
+                    </a:lnT>
+                    <a:lnB w="12700" cap="flat" cmpd="sng" algn="ctr">
+                      <a:solidFill>
+                        <a:schemeClr val="tx1"/>
+                      </a:solidFill>
+                      <a:prstDash val="solid"/>
+                      <a:round/>
+                      <a:headEnd type="none" w="med" len="med"/>
+                      <a:tailEnd type="none" w="med" len="med"/>
+                    </a:lnB>
+                  </a:tcPr>
+                </a:tc>
+                <a:tc>
+                  <a:txBody>
+                    <a:bodyPr/>
+                    <a:lstStyle/>
+                    <a:p>
+                      <a:pPr algn="r"/>
+                      <a:r>
+                        <a:rPr lang="en-US" altLang="ko-KR" b="1"/>
+                        <a:t>-52.35%</a:t>
+                      </a:r>
+                      <a:endParaRPr lang="ko-KR" altLang="en-US"/>
+                    </a:p>
+                  </a:txBody>
+                  <a:tcPr anchor="ctr">
+                    <a:lnL w="12700" cap="flat" cmpd="sng" algn="ctr">
+                      <a:solidFill>
+                        <a:schemeClr val="tx1"/>
+                      </a:solidFill>
+                      <a:prstDash val="solid"/>
+                      <a:round/>
+                      <a:headEnd type="none" w="med" len="med"/>
+                      <a:tailEnd type="none" w="med" len="med"/>
+                    </a:lnL>
+                    <a:lnR w="12700" cap="flat" cmpd="sng" algn="ctr">
+                      <a:solidFill>
+                        <a:schemeClr val="tx1"/>
+                      </a:solidFill>
+                      <a:prstDash val="solid"/>
+                      <a:round/>
+                      <a:headEnd type="none" w="med" len="med"/>
+                      <a:tailEnd type="none" w="med" len="med"/>
+                    </a:lnR>
+                    <a:lnT w="12700" cap="flat" cmpd="sng" algn="ctr">
+                      <a:solidFill>
+                        <a:schemeClr val="tx1"/>
+                      </a:solidFill>
+                      <a:prstDash val="solid"/>
+                      <a:round/>
+                      <a:headEnd type="none" w="med" len="med"/>
+                      <a:tailEnd type="none" w="med" len="med"/>
+                    </a:lnT>
+                    <a:lnB w="12700" cap="flat" cmpd="sng" algn="ctr">
+                      <a:solidFill>
+                        <a:schemeClr val="tx1"/>
+                      </a:solidFill>
+                      <a:prstDash val="solid"/>
+                      <a:round/>
+                      <a:headEnd type="none" w="med" len="med"/>
+                      <a:tailEnd type="none" w="med" len="med"/>
+                    </a:lnB>
+                  </a:tcPr>
+                </a:tc>
+                <a:extLst>
+                  <a:ext uri="{0D108BD9-81ED-4DB2-BD59-A6C34878D82A}">
+                    <a16:rowId xmlns:a16="http://schemas.microsoft.com/office/drawing/2014/main" val="335468055"/>
+                  </a:ext>
+                </a:extLst>
+              </a:tr>
+              <a:tr h="0">
+                <a:tc>
+                  <a:txBody>
+                    <a:bodyPr/>
+                    <a:lstStyle/>
+                    <a:p>
+                      <a:r>
+                        <a:rPr lang="ko-KR" altLang="en-US"/>
+                        <a:t>실행 비용</a:t>
+                      </a:r>
+                    </a:p>
+                  </a:txBody>
+                  <a:tcPr anchor="ctr">
+                    <a:lnL w="12700" cap="flat" cmpd="sng" algn="ctr">
+                      <a:solidFill>
+                        <a:schemeClr val="tx1"/>
+                      </a:solidFill>
+                      <a:prstDash val="solid"/>
+                      <a:round/>
+                      <a:headEnd type="none" w="med" len="med"/>
+                      <a:tailEnd type="none" w="med" len="med"/>
+                    </a:lnL>
+                    <a:lnR w="12700" cap="flat" cmpd="sng" algn="ctr">
+                      <a:solidFill>
+                        <a:schemeClr val="tx1"/>
+                      </a:solidFill>
+                      <a:prstDash val="solid"/>
+                      <a:round/>
+                      <a:headEnd type="none" w="med" len="med"/>
+                      <a:tailEnd type="none" w="med" len="med"/>
+                    </a:lnR>
+                    <a:lnT w="12700" cap="flat" cmpd="sng" algn="ctr">
+                      <a:solidFill>
+                        <a:schemeClr val="tx1"/>
+                      </a:solidFill>
+                      <a:prstDash val="solid"/>
+                      <a:round/>
+                      <a:headEnd type="none" w="med" len="med"/>
+                      <a:tailEnd type="none" w="med" len="med"/>
+                    </a:lnT>
+                    <a:lnB w="12700" cap="flat" cmpd="sng" algn="ctr">
+                      <a:solidFill>
+                        <a:schemeClr val="tx1"/>
+                      </a:solidFill>
+                      <a:prstDash val="solid"/>
+                      <a:round/>
+                      <a:headEnd type="none" w="med" len="med"/>
+                      <a:tailEnd type="none" w="med" len="med"/>
+                    </a:lnB>
+                  </a:tcPr>
+                </a:tc>
+                <a:tc>
+                  <a:txBody>
+                    <a:bodyPr/>
+                    <a:lstStyle/>
+                    <a:p>
+                      <a:pPr algn="r"/>
+                      <a:r>
+                        <a:rPr lang="en-US" altLang="ko-KR"/>
+                        <a:t>$0.00143265</a:t>
+                      </a:r>
+                    </a:p>
+                  </a:txBody>
+                  <a:tcPr anchor="ctr">
+                    <a:lnL w="12700" cap="flat" cmpd="sng" algn="ctr">
+                      <a:solidFill>
+                        <a:schemeClr val="tx1"/>
+                      </a:solidFill>
+                      <a:prstDash val="solid"/>
+                      <a:round/>
+                      <a:headEnd type="none" w="med" len="med"/>
+                      <a:tailEnd type="none" w="med" len="med"/>
+                    </a:lnL>
+                    <a:lnR w="12700" cap="flat" cmpd="sng" algn="ctr">
+                      <a:solidFill>
+                        <a:schemeClr val="tx1"/>
+                      </a:solidFill>
+                      <a:prstDash val="solid"/>
+                      <a:round/>
+                      <a:headEnd type="none" w="med" len="med"/>
+                      <a:tailEnd type="none" w="med" len="med"/>
+                    </a:lnR>
+                    <a:lnT w="12700" cap="flat" cmpd="sng" algn="ctr">
+                      <a:solidFill>
+                        <a:schemeClr val="tx1"/>
+                      </a:solidFill>
+                      <a:prstDash val="solid"/>
+                      <a:round/>
+                      <a:headEnd type="none" w="med" len="med"/>
+                      <a:tailEnd type="none" w="med" len="med"/>
+                    </a:lnT>
+                    <a:lnB w="12700" cap="flat" cmpd="sng" algn="ctr">
+                      <a:solidFill>
+                        <a:schemeClr val="tx1"/>
+                      </a:solidFill>
+                      <a:prstDash val="solid"/>
+                      <a:round/>
+                      <a:headEnd type="none" w="med" len="med"/>
+                      <a:tailEnd type="none" w="med" len="med"/>
+                    </a:lnB>
+                  </a:tcPr>
+                </a:tc>
+                <a:tc>
+                  <a:txBody>
+                    <a:bodyPr/>
+                    <a:lstStyle/>
+                    <a:p>
+                      <a:pPr algn="r"/>
+                      <a:r>
+                        <a:rPr lang="en-US" altLang="ko-KR"/>
+                        <a:t>$0.00119168</a:t>
+                      </a:r>
+                    </a:p>
+                  </a:txBody>
+                  <a:tcPr anchor="ctr">
+                    <a:lnL w="12700" cap="flat" cmpd="sng" algn="ctr">
+                      <a:solidFill>
+                        <a:schemeClr val="tx1"/>
+                      </a:solidFill>
+                      <a:prstDash val="solid"/>
+                      <a:round/>
+                      <a:headEnd type="none" w="med" len="med"/>
+                      <a:tailEnd type="none" w="med" len="med"/>
+                    </a:lnL>
+                    <a:lnR w="12700" cap="flat" cmpd="sng" algn="ctr">
+                      <a:solidFill>
+                        <a:schemeClr val="tx1"/>
+                      </a:solidFill>
+                      <a:prstDash val="solid"/>
+                      <a:round/>
+                      <a:headEnd type="none" w="med" len="med"/>
+                      <a:tailEnd type="none" w="med" len="med"/>
+                    </a:lnR>
+                    <a:lnT w="12700" cap="flat" cmpd="sng" algn="ctr">
+                      <a:solidFill>
+                        <a:schemeClr val="tx1"/>
+                      </a:solidFill>
+                      <a:prstDash val="solid"/>
+                      <a:round/>
+                      <a:headEnd type="none" w="med" len="med"/>
+                      <a:tailEnd type="none" w="med" len="med"/>
+                    </a:lnT>
+                    <a:lnB w="12700" cap="flat" cmpd="sng" algn="ctr">
+                      <a:solidFill>
+                        <a:schemeClr val="tx1"/>
+                      </a:solidFill>
+                      <a:prstDash val="solid"/>
+                      <a:round/>
+                      <a:headEnd type="none" w="med" len="med"/>
+                      <a:tailEnd type="none" w="med" len="med"/>
+                    </a:lnB>
+                  </a:tcPr>
+                </a:tc>
+                <a:tc>
+                  <a:txBody>
+                    <a:bodyPr/>
+                    <a:lstStyle/>
+                    <a:p>
+                      <a:pPr algn="r"/>
+                      <a:r>
+                        <a:rPr lang="en-US" altLang="ko-KR" b="1"/>
+                        <a:t>-16.82%</a:t>
+                      </a:r>
+                      <a:endParaRPr lang="ko-KR" altLang="en-US"/>
+                    </a:p>
+                  </a:txBody>
+                  <a:tcPr anchor="ctr">
+                    <a:lnL w="12700" cap="flat" cmpd="sng" algn="ctr">
+                      <a:solidFill>
+                        <a:schemeClr val="tx1"/>
+                      </a:solidFill>
+                      <a:prstDash val="solid"/>
+                      <a:round/>
+                      <a:headEnd type="none" w="med" len="med"/>
+                      <a:tailEnd type="none" w="med" len="med"/>
+                    </a:lnL>
+                    <a:lnR w="12700" cap="flat" cmpd="sng" algn="ctr">
+                      <a:solidFill>
+                        <a:schemeClr val="tx1"/>
+                      </a:solidFill>
+                      <a:prstDash val="solid"/>
+                      <a:round/>
+                      <a:headEnd type="none" w="med" len="med"/>
+                      <a:tailEnd type="none" w="med" len="med"/>
+                    </a:lnR>
+                    <a:lnT w="12700" cap="flat" cmpd="sng" algn="ctr">
+                      <a:solidFill>
+                        <a:schemeClr val="tx1"/>
+                      </a:solidFill>
+                      <a:prstDash val="solid"/>
+                      <a:round/>
+                      <a:headEnd type="none" w="med" len="med"/>
+                      <a:tailEnd type="none" w="med" len="med"/>
+                    </a:lnT>
+                    <a:lnB w="12700" cap="flat" cmpd="sng" algn="ctr">
+                      <a:solidFill>
+                        <a:schemeClr val="tx1"/>
+                      </a:solidFill>
+                      <a:prstDash val="solid"/>
+                      <a:round/>
+                      <a:headEnd type="none" w="med" len="med"/>
+                      <a:tailEnd type="none" w="med" len="med"/>
+                    </a:lnB>
+                  </a:tcPr>
+                </a:tc>
+                <a:extLst>
+                  <a:ext uri="{0D108BD9-81ED-4DB2-BD59-A6C34878D82A}">
+                    <a16:rowId xmlns:a16="http://schemas.microsoft.com/office/drawing/2014/main" val="3735162755"/>
+                  </a:ext>
+                </a:extLst>
+              </a:tr>
+              <a:tr h="0">
+                <a:tc>
+                  <a:txBody>
+                    <a:bodyPr/>
+                    <a:lstStyle/>
+                    <a:p>
+                      <a:r>
+                        <a:rPr lang="ko-KR" altLang="en-US"/>
+                        <a:t>처리시간</a:t>
+                      </a:r>
+                    </a:p>
+                  </a:txBody>
+                  <a:tcPr anchor="ctr">
+                    <a:lnL w="12700" cap="flat" cmpd="sng" algn="ctr">
+                      <a:solidFill>
+                        <a:schemeClr val="tx1"/>
+                      </a:solidFill>
+                      <a:prstDash val="solid"/>
+                      <a:round/>
+                      <a:headEnd type="none" w="med" len="med"/>
+                      <a:tailEnd type="none" w="med" len="med"/>
+                    </a:lnL>
+                    <a:lnR w="12700" cap="flat" cmpd="sng" algn="ctr">
+                      <a:solidFill>
+                        <a:schemeClr val="tx1"/>
+                      </a:solidFill>
+                      <a:prstDash val="solid"/>
+                      <a:round/>
+                      <a:headEnd type="none" w="med" len="med"/>
+                      <a:tailEnd type="none" w="med" len="med"/>
+                    </a:lnR>
+                    <a:lnT w="12700" cap="flat" cmpd="sng" algn="ctr">
+                      <a:solidFill>
+                        <a:schemeClr val="tx1"/>
+                      </a:solidFill>
+                      <a:prstDash val="solid"/>
+                      <a:round/>
+                      <a:headEnd type="none" w="med" len="med"/>
+                      <a:tailEnd type="none" w="med" len="med"/>
+                    </a:lnT>
+                    <a:lnB w="12700" cap="flat" cmpd="sng" algn="ctr">
+                      <a:solidFill>
+                        <a:schemeClr val="tx1"/>
+                      </a:solidFill>
+                      <a:prstDash val="solid"/>
+                      <a:round/>
+                      <a:headEnd type="none" w="med" len="med"/>
+                      <a:tailEnd type="none" w="med" len="med"/>
+                    </a:lnB>
+                  </a:tcPr>
+                </a:tc>
+                <a:tc>
+                  <a:txBody>
+                    <a:bodyPr/>
+                    <a:lstStyle/>
+                    <a:p>
+                      <a:pPr algn="r"/>
+                      <a:r>
+                        <a:rPr lang="en-US" altLang="ko-KR"/>
+                        <a:t>13.151</a:t>
+                      </a:r>
+                      <a:r>
+                        <a:rPr lang="ko-KR" altLang="en-US"/>
+                        <a:t>초</a:t>
+                      </a:r>
+                    </a:p>
+                  </a:txBody>
+                  <a:tcPr anchor="ctr">
+                    <a:lnL w="12700" cap="flat" cmpd="sng" algn="ctr">
+                      <a:solidFill>
+                        <a:schemeClr val="tx1"/>
+                      </a:solidFill>
+                      <a:prstDash val="solid"/>
+                      <a:round/>
+                      <a:headEnd type="none" w="med" len="med"/>
+                      <a:tailEnd type="none" w="med" len="med"/>
+                    </a:lnL>
+                    <a:lnR w="12700" cap="flat" cmpd="sng" algn="ctr">
+                      <a:solidFill>
+                        <a:schemeClr val="tx1"/>
+                      </a:solidFill>
+                      <a:prstDash val="solid"/>
+                      <a:round/>
+                      <a:headEnd type="none" w="med" len="med"/>
+                      <a:tailEnd type="none" w="med" len="med"/>
+                    </a:lnR>
+                    <a:lnT w="12700" cap="flat" cmpd="sng" algn="ctr">
+                      <a:solidFill>
+                        <a:schemeClr val="tx1"/>
+                      </a:solidFill>
+                      <a:prstDash val="solid"/>
+                      <a:round/>
+                      <a:headEnd type="none" w="med" len="med"/>
+                      <a:tailEnd type="none" w="med" len="med"/>
+                    </a:lnT>
+                    <a:lnB w="12700" cap="flat" cmpd="sng" algn="ctr">
+                      <a:solidFill>
+                        <a:schemeClr val="tx1"/>
+                      </a:solidFill>
+                      <a:prstDash val="solid"/>
+                      <a:round/>
+                      <a:headEnd type="none" w="med" len="med"/>
+                      <a:tailEnd type="none" w="med" len="med"/>
+                    </a:lnB>
+                  </a:tcPr>
+                </a:tc>
+                <a:tc>
+                  <a:txBody>
+                    <a:bodyPr/>
+                    <a:lstStyle/>
+                    <a:p>
+                      <a:pPr algn="r"/>
+                      <a:r>
+                        <a:rPr lang="en-US" altLang="ko-KR"/>
+                        <a:t>4.665</a:t>
+                      </a:r>
+                      <a:r>
+                        <a:rPr lang="ko-KR" altLang="en-US"/>
+                        <a:t>초</a:t>
+                      </a:r>
+                    </a:p>
+                  </a:txBody>
+                  <a:tcPr anchor="ctr">
+                    <a:lnL w="12700" cap="flat" cmpd="sng" algn="ctr">
+                      <a:solidFill>
+                        <a:schemeClr val="tx1"/>
+                      </a:solidFill>
+                      <a:prstDash val="solid"/>
+                      <a:round/>
+                      <a:headEnd type="none" w="med" len="med"/>
+                      <a:tailEnd type="none" w="med" len="med"/>
+                    </a:lnL>
+                    <a:lnR w="12700" cap="flat" cmpd="sng" algn="ctr">
+                      <a:solidFill>
+                        <a:schemeClr val="tx1"/>
+                      </a:solidFill>
+                      <a:prstDash val="solid"/>
+                      <a:round/>
+                      <a:headEnd type="none" w="med" len="med"/>
+                      <a:tailEnd type="none" w="med" len="med"/>
+                    </a:lnR>
+                    <a:lnT w="12700" cap="flat" cmpd="sng" algn="ctr">
+                      <a:solidFill>
+                        <a:schemeClr val="tx1"/>
+                      </a:solidFill>
+                      <a:prstDash val="solid"/>
+                      <a:round/>
+                      <a:headEnd type="none" w="med" len="med"/>
+                      <a:tailEnd type="none" w="med" len="med"/>
+                    </a:lnT>
+                    <a:lnB w="12700" cap="flat" cmpd="sng" algn="ctr">
+                      <a:solidFill>
+                        <a:schemeClr val="tx1"/>
+                      </a:solidFill>
+                      <a:prstDash val="solid"/>
+                      <a:round/>
+                      <a:headEnd type="none" w="med" len="med"/>
+                      <a:tailEnd type="none" w="med" len="med"/>
+                    </a:lnB>
+                  </a:tcPr>
+                </a:tc>
+                <a:tc>
+                  <a:txBody>
+                    <a:bodyPr/>
+                    <a:lstStyle/>
+                    <a:p>
+                      <a:pPr algn="r"/>
+                      <a:r>
+                        <a:rPr lang="en-US" altLang="ko-KR" b="1" dirty="0"/>
+                        <a:t>-64.53%</a:t>
+                      </a:r>
+                      <a:endParaRPr lang="ko-KR" altLang="en-US" dirty="0"/>
+                    </a:p>
+                  </a:txBody>
+                  <a:tcPr anchor="ctr">
+                    <a:lnL w="12700" cap="flat" cmpd="sng" algn="ctr">
+                      <a:solidFill>
+                        <a:schemeClr val="tx1"/>
+                      </a:solidFill>
+                      <a:prstDash val="solid"/>
+                      <a:round/>
+                      <a:headEnd type="none" w="med" len="med"/>
+                      <a:tailEnd type="none" w="med" len="med"/>
+                    </a:lnL>
+                    <a:lnR w="12700" cap="flat" cmpd="sng" algn="ctr">
+                      <a:solidFill>
+                        <a:schemeClr val="tx1"/>
+                      </a:solidFill>
+                      <a:prstDash val="solid"/>
+                      <a:round/>
+                      <a:headEnd type="none" w="med" len="med"/>
+                      <a:tailEnd type="none" w="med" len="med"/>
+                    </a:lnR>
+                    <a:lnT w="12700" cap="flat" cmpd="sng" algn="ctr">
+                      <a:solidFill>
+                        <a:schemeClr val="tx1"/>
+                      </a:solidFill>
+                      <a:prstDash val="solid"/>
+                      <a:round/>
+                      <a:headEnd type="none" w="med" len="med"/>
+                      <a:tailEnd type="none" w="med" len="med"/>
+                    </a:lnT>
+                    <a:lnB w="12700" cap="flat" cmpd="sng" algn="ctr">
+                      <a:solidFill>
+                        <a:schemeClr val="tx1"/>
+                      </a:solidFill>
+                      <a:prstDash val="solid"/>
+                      <a:round/>
+                      <a:headEnd type="none" w="med" len="med"/>
+                      <a:tailEnd type="none" w="med" len="med"/>
+                    </a:lnB>
+                  </a:tcPr>
+                </a:tc>
+                <a:extLst>
+                  <a:ext uri="{0D108BD9-81ED-4DB2-BD59-A6C34878D82A}">
+                    <a16:rowId xmlns:a16="http://schemas.microsoft.com/office/drawing/2014/main" val="109628081"/>
+                  </a:ext>
+                </a:extLst>
+              </a:tr>
+            </a:tbl>
+          </a:graphicData>
+        </a:graphic>
+      </p:graphicFrame>
+      <p:sp>
+        <p:nvSpPr>
+          <p:cNvPr id="8" name="TextBox 7">
+            <a:extLst>
+              <a:ext uri="{FF2B5EF4-FFF2-40B4-BE49-F238E27FC236}">
+                <a16:creationId xmlns:a16="http://schemas.microsoft.com/office/drawing/2014/main" id="{C70429D6-8B4D-4B07-B637-B6BD969F41EB}"/>
+              </a:ext>
+            </a:extLst>
+          </p:cNvPr>
+          <p:cNvSpPr txBox="1"/>
+          <p:nvPr/>
+        </p:nvSpPr>
+        <p:spPr>
+          <a:xfrm>
+            <a:off x="381000" y="3244334"/>
+            <a:ext cx="6096000" cy="369332"/>
+          </a:xfrm>
+          <a:prstGeom prst="rect">
+            <a:avLst/>
+          </a:prstGeom>
+          <a:noFill/>
+        </p:spPr>
+        <p:txBody>
+          <a:bodyPr wrap="square">
+            <a:spAutoFit/>
+          </a:bodyPr>
+          <a:lstStyle/>
+          <a:p>
+            <a:r>
+              <a:rPr lang="ko-KR" altLang="en-US" dirty="0"/>
+              <a:t>품질</a:t>
+            </a:r>
+          </a:p>
+        </p:txBody>
+      </p:sp>
+      <p:graphicFrame>
+        <p:nvGraphicFramePr>
+          <p:cNvPr id="9" name="Table 8">
+            <a:extLst>
+              <a:ext uri="{FF2B5EF4-FFF2-40B4-BE49-F238E27FC236}">
+                <a16:creationId xmlns:a16="http://schemas.microsoft.com/office/drawing/2014/main" id="{E133FFE0-07A1-4C7B-B13B-56DCD63E0EFC}"/>
+              </a:ext>
+            </a:extLst>
+          </p:cNvPr>
+          <p:cNvGraphicFramePr>
+            <a:graphicFrameLocks noGrp="1"/>
+          </p:cNvGraphicFramePr>
+          <p:nvPr>
+            <p:extLst>
+              <p:ext uri="{D42A27DB-BD31-4B8C-83A1-F6EECF244321}">
+                <p14:modId xmlns:p14="http://schemas.microsoft.com/office/powerpoint/2010/main" val="974483733"/>
+              </p:ext>
+            </p:extLst>
+          </p:nvPr>
+        </p:nvGraphicFramePr>
+        <p:xfrm>
+          <a:off x="381000" y="3691205"/>
+          <a:ext cx="10515600" cy="2926080"/>
+        </p:xfrm>
+        <a:graphic>
+          <a:graphicData uri="http://schemas.openxmlformats.org/drawingml/2006/table">
+            <a:tbl>
+              <a:tblPr/>
+              <a:tblGrid>
+                <a:gridCol w="3505200">
+                  <a:extLst>
+                    <a:ext uri="{9D8B030D-6E8A-4147-A177-3AD203B41FA5}">
+                      <a16:colId xmlns:a16="http://schemas.microsoft.com/office/drawing/2014/main" val="2441398002"/>
+                    </a:ext>
+                  </a:extLst>
+                </a:gridCol>
+                <a:gridCol w="3505200">
+                  <a:extLst>
+                    <a:ext uri="{9D8B030D-6E8A-4147-A177-3AD203B41FA5}">
+                      <a16:colId xmlns:a16="http://schemas.microsoft.com/office/drawing/2014/main" val="2527966658"/>
+                    </a:ext>
+                  </a:extLst>
+                </a:gridCol>
+                <a:gridCol w="3505200">
+                  <a:extLst>
+                    <a:ext uri="{9D8B030D-6E8A-4147-A177-3AD203B41FA5}">
+                      <a16:colId xmlns:a16="http://schemas.microsoft.com/office/drawing/2014/main" val="1199708791"/>
+                    </a:ext>
+                  </a:extLst>
+                </a:gridCol>
+              </a:tblGrid>
+              <a:tr h="0">
+                <a:tc>
+                  <a:txBody>
+                    <a:bodyPr/>
+                    <a:lstStyle/>
+                    <a:p>
+                      <a:r>
+                        <a:rPr lang="en-US" dirty="0"/>
+                        <a:t>KPI</a:t>
+                      </a:r>
+                    </a:p>
+                  </a:txBody>
+                  <a:tcPr anchor="ctr">
+                    <a:lnL w="12700" cap="flat" cmpd="sng" algn="ctr">
+                      <a:solidFill>
+                        <a:schemeClr val="tx1"/>
+                      </a:solidFill>
+                      <a:prstDash val="solid"/>
+                      <a:round/>
+                      <a:headEnd type="none" w="med" len="med"/>
+                      <a:tailEnd type="none" w="med" len="med"/>
+                    </a:lnL>
+                    <a:lnR w="12700" cap="flat" cmpd="sng" algn="ctr">
+                      <a:solidFill>
+                        <a:schemeClr val="tx1"/>
+                      </a:solidFill>
+                      <a:prstDash val="solid"/>
+                      <a:round/>
+                      <a:headEnd type="none" w="med" len="med"/>
+                      <a:tailEnd type="none" w="med" len="med"/>
+                    </a:lnR>
+                    <a:lnT w="12700" cap="flat" cmpd="sng" algn="ctr">
+                      <a:solidFill>
+                        <a:schemeClr val="tx1"/>
+                      </a:solidFill>
+                      <a:prstDash val="solid"/>
+                      <a:round/>
+                      <a:headEnd type="none" w="med" len="med"/>
+                      <a:tailEnd type="none" w="med" len="med"/>
+                    </a:lnT>
+                    <a:lnB w="12700" cap="flat" cmpd="sng" algn="ctr">
+                      <a:solidFill>
+                        <a:schemeClr val="tx1"/>
+                      </a:solidFill>
+                      <a:prstDash val="solid"/>
+                      <a:round/>
+                      <a:headEnd type="none" w="med" len="med"/>
+                      <a:tailEnd type="none" w="med" len="med"/>
+                    </a:lnB>
+                  </a:tcPr>
+                </a:tc>
+                <a:tc>
+                  <a:txBody>
+                    <a:bodyPr/>
+                    <a:lstStyle/>
+                    <a:p>
+                      <a:pPr algn="r"/>
+                      <a:r>
+                        <a:rPr lang="ko-KR" altLang="en-US"/>
+                        <a:t>기존</a:t>
+                      </a:r>
+                    </a:p>
+                  </a:txBody>
+                  <a:tcPr anchor="ctr">
+                    <a:lnL w="12700" cap="flat" cmpd="sng" algn="ctr">
+                      <a:solidFill>
+                        <a:schemeClr val="tx1"/>
+                      </a:solidFill>
+                      <a:prstDash val="solid"/>
+                      <a:round/>
+                      <a:headEnd type="none" w="med" len="med"/>
+                      <a:tailEnd type="none" w="med" len="med"/>
+                    </a:lnL>
+                    <a:lnR w="12700" cap="flat" cmpd="sng" algn="ctr">
+                      <a:solidFill>
+                        <a:schemeClr val="tx1"/>
+                      </a:solidFill>
+                      <a:prstDash val="solid"/>
+                      <a:round/>
+                      <a:headEnd type="none" w="med" len="med"/>
+                      <a:tailEnd type="none" w="med" len="med"/>
+                    </a:lnR>
+                    <a:lnT w="12700" cap="flat" cmpd="sng" algn="ctr">
+                      <a:solidFill>
+                        <a:schemeClr val="tx1"/>
+                      </a:solidFill>
+                      <a:prstDash val="solid"/>
+                      <a:round/>
+                      <a:headEnd type="none" w="med" len="med"/>
+                      <a:tailEnd type="none" w="med" len="med"/>
+                    </a:lnT>
+                    <a:lnB w="12700" cap="flat" cmpd="sng" algn="ctr">
+                      <a:solidFill>
+                        <a:schemeClr val="tx1"/>
+                      </a:solidFill>
+                      <a:prstDash val="solid"/>
+                      <a:round/>
+                      <a:headEnd type="none" w="med" len="med"/>
+                      <a:tailEnd type="none" w="med" len="med"/>
+                    </a:lnB>
+                  </a:tcPr>
+                </a:tc>
+                <a:tc>
+                  <a:txBody>
+                    <a:bodyPr/>
+                    <a:lstStyle/>
+                    <a:p>
+                      <a:pPr algn="r"/>
+                      <a:r>
+                        <a:rPr lang="ko-KR" altLang="en-US"/>
+                        <a:t>개선</a:t>
+                      </a:r>
+                    </a:p>
+                  </a:txBody>
+                  <a:tcPr anchor="ctr">
+                    <a:lnL w="12700" cap="flat" cmpd="sng" algn="ctr">
+                      <a:solidFill>
+                        <a:schemeClr val="tx1"/>
+                      </a:solidFill>
+                      <a:prstDash val="solid"/>
+                      <a:round/>
+                      <a:headEnd type="none" w="med" len="med"/>
+                      <a:tailEnd type="none" w="med" len="med"/>
+                    </a:lnL>
+                    <a:lnR w="12700" cap="flat" cmpd="sng" algn="ctr">
+                      <a:solidFill>
+                        <a:schemeClr val="tx1"/>
+                      </a:solidFill>
+                      <a:prstDash val="solid"/>
+                      <a:round/>
+                      <a:headEnd type="none" w="med" len="med"/>
+                      <a:tailEnd type="none" w="med" len="med"/>
+                    </a:lnR>
+                    <a:lnT w="12700" cap="flat" cmpd="sng" algn="ctr">
+                      <a:solidFill>
+                        <a:schemeClr val="tx1"/>
+                      </a:solidFill>
+                      <a:prstDash val="solid"/>
+                      <a:round/>
+                      <a:headEnd type="none" w="med" len="med"/>
+                      <a:tailEnd type="none" w="med" len="med"/>
+                    </a:lnT>
+                    <a:lnB w="12700" cap="flat" cmpd="sng" algn="ctr">
+                      <a:solidFill>
+                        <a:schemeClr val="tx1"/>
+                      </a:solidFill>
+                      <a:prstDash val="solid"/>
+                      <a:round/>
+                      <a:headEnd type="none" w="med" len="med"/>
+                      <a:tailEnd type="none" w="med" len="med"/>
+                    </a:lnB>
+                  </a:tcPr>
+                </a:tc>
+                <a:extLst>
+                  <a:ext uri="{0D108BD9-81ED-4DB2-BD59-A6C34878D82A}">
+                    <a16:rowId xmlns:a16="http://schemas.microsoft.com/office/drawing/2014/main" val="904388186"/>
+                  </a:ext>
+                </a:extLst>
+              </a:tr>
+              <a:tr h="0">
+                <a:tc>
+                  <a:txBody>
+                    <a:bodyPr/>
+                    <a:lstStyle/>
+                    <a:p>
+                      <a:r>
+                        <a:rPr lang="ko-KR" altLang="en-US" dirty="0"/>
+                        <a:t>경험 사실 재현율</a:t>
+                      </a:r>
+                    </a:p>
+                  </a:txBody>
+                  <a:tcPr anchor="ctr">
+                    <a:lnL w="12700" cap="flat" cmpd="sng" algn="ctr">
+                      <a:solidFill>
+                        <a:schemeClr val="tx1"/>
+                      </a:solidFill>
+                      <a:prstDash val="solid"/>
+                      <a:round/>
+                      <a:headEnd type="none" w="med" len="med"/>
+                      <a:tailEnd type="none" w="med" len="med"/>
+                    </a:lnL>
+                    <a:lnR w="12700" cap="flat" cmpd="sng" algn="ctr">
+                      <a:solidFill>
+                        <a:schemeClr val="tx1"/>
+                      </a:solidFill>
+                      <a:prstDash val="solid"/>
+                      <a:round/>
+                      <a:headEnd type="none" w="med" len="med"/>
+                      <a:tailEnd type="none" w="med" len="med"/>
+                    </a:lnR>
+                    <a:lnT w="12700" cap="flat" cmpd="sng" algn="ctr">
+                      <a:solidFill>
+                        <a:schemeClr val="tx1"/>
+                      </a:solidFill>
+                      <a:prstDash val="solid"/>
+                      <a:round/>
+                      <a:headEnd type="none" w="med" len="med"/>
+                      <a:tailEnd type="none" w="med" len="med"/>
+                    </a:lnT>
+                    <a:lnB w="12700" cap="flat" cmpd="sng" algn="ctr">
+                      <a:solidFill>
+                        <a:schemeClr val="tx1"/>
+                      </a:solidFill>
+                      <a:prstDash val="solid"/>
+                      <a:round/>
+                      <a:headEnd type="none" w="med" len="med"/>
+                      <a:tailEnd type="none" w="med" len="med"/>
+                    </a:lnB>
+                  </a:tcPr>
+                </a:tc>
+                <a:tc>
+                  <a:txBody>
+                    <a:bodyPr/>
+                    <a:lstStyle/>
+                    <a:p>
+                      <a:pPr algn="r"/>
+                      <a:r>
+                        <a:rPr lang="en-US" altLang="ko-KR"/>
+                        <a:t>66.7%</a:t>
+                      </a:r>
+                    </a:p>
+                  </a:txBody>
+                  <a:tcPr anchor="ctr">
+                    <a:lnL w="12700" cap="flat" cmpd="sng" algn="ctr">
+                      <a:solidFill>
+                        <a:schemeClr val="tx1"/>
+                      </a:solidFill>
+                      <a:prstDash val="solid"/>
+                      <a:round/>
+                      <a:headEnd type="none" w="med" len="med"/>
+                      <a:tailEnd type="none" w="med" len="med"/>
+                    </a:lnL>
+                    <a:lnR w="12700" cap="flat" cmpd="sng" algn="ctr">
+                      <a:solidFill>
+                        <a:schemeClr val="tx1"/>
+                      </a:solidFill>
+                      <a:prstDash val="solid"/>
+                      <a:round/>
+                      <a:headEnd type="none" w="med" len="med"/>
+                      <a:tailEnd type="none" w="med" len="med"/>
+                    </a:lnR>
+                    <a:lnT w="12700" cap="flat" cmpd="sng" algn="ctr">
+                      <a:solidFill>
+                        <a:schemeClr val="tx1"/>
+                      </a:solidFill>
+                      <a:prstDash val="solid"/>
+                      <a:round/>
+                      <a:headEnd type="none" w="med" len="med"/>
+                      <a:tailEnd type="none" w="med" len="med"/>
+                    </a:lnT>
+                    <a:lnB w="12700" cap="flat" cmpd="sng" algn="ctr">
+                      <a:solidFill>
+                        <a:schemeClr val="tx1"/>
+                      </a:solidFill>
+                      <a:prstDash val="solid"/>
+                      <a:round/>
+                      <a:headEnd type="none" w="med" len="med"/>
+                      <a:tailEnd type="none" w="med" len="med"/>
+                    </a:lnB>
+                  </a:tcPr>
+                </a:tc>
+                <a:tc>
+                  <a:txBody>
+                    <a:bodyPr/>
+                    <a:lstStyle/>
+                    <a:p>
+                      <a:pPr algn="r"/>
+                      <a:r>
+                        <a:rPr lang="en-US" altLang="ko-KR" b="1"/>
+                        <a:t>100%</a:t>
+                      </a:r>
+                      <a:endParaRPr lang="ko-KR" altLang="en-US"/>
+                    </a:p>
+                  </a:txBody>
+                  <a:tcPr anchor="ctr">
+                    <a:lnL w="12700" cap="flat" cmpd="sng" algn="ctr">
+                      <a:solidFill>
+                        <a:schemeClr val="tx1"/>
+                      </a:solidFill>
+                      <a:prstDash val="solid"/>
+                      <a:round/>
+                      <a:headEnd type="none" w="med" len="med"/>
+                      <a:tailEnd type="none" w="med" len="med"/>
+                    </a:lnL>
+                    <a:lnR w="12700" cap="flat" cmpd="sng" algn="ctr">
+                      <a:solidFill>
+                        <a:schemeClr val="tx1"/>
+                      </a:solidFill>
+                      <a:prstDash val="solid"/>
+                      <a:round/>
+                      <a:headEnd type="none" w="med" len="med"/>
+                      <a:tailEnd type="none" w="med" len="med"/>
+                    </a:lnR>
+                    <a:lnT w="12700" cap="flat" cmpd="sng" algn="ctr">
+                      <a:solidFill>
+                        <a:schemeClr val="tx1"/>
+                      </a:solidFill>
+                      <a:prstDash val="solid"/>
+                      <a:round/>
+                      <a:headEnd type="none" w="med" len="med"/>
+                      <a:tailEnd type="none" w="med" len="med"/>
+                    </a:lnT>
+                    <a:lnB w="12700" cap="flat" cmpd="sng" algn="ctr">
+                      <a:solidFill>
+                        <a:schemeClr val="tx1"/>
+                      </a:solidFill>
+                      <a:prstDash val="solid"/>
+                      <a:round/>
+                      <a:headEnd type="none" w="med" len="med"/>
+                      <a:tailEnd type="none" w="med" len="med"/>
+                    </a:lnB>
+                  </a:tcPr>
+                </a:tc>
+                <a:extLst>
+                  <a:ext uri="{0D108BD9-81ED-4DB2-BD59-A6C34878D82A}">
+                    <a16:rowId xmlns:a16="http://schemas.microsoft.com/office/drawing/2014/main" val="2242704962"/>
+                  </a:ext>
+                </a:extLst>
+              </a:tr>
+              <a:tr h="0">
+                <a:tc>
+                  <a:txBody>
+                    <a:bodyPr/>
+                    <a:lstStyle/>
+                    <a:p>
+                      <a:r>
+                        <a:rPr lang="ko-KR" altLang="en-US"/>
+                        <a:t>문맥 의존 사실 재현율</a:t>
+                      </a:r>
+                    </a:p>
+                  </a:txBody>
+                  <a:tcPr anchor="ctr">
+                    <a:lnL w="12700" cap="flat" cmpd="sng" algn="ctr">
+                      <a:solidFill>
+                        <a:schemeClr val="tx1"/>
+                      </a:solidFill>
+                      <a:prstDash val="solid"/>
+                      <a:round/>
+                      <a:headEnd type="none" w="med" len="med"/>
+                      <a:tailEnd type="none" w="med" len="med"/>
+                    </a:lnL>
+                    <a:lnR w="12700" cap="flat" cmpd="sng" algn="ctr">
+                      <a:solidFill>
+                        <a:schemeClr val="tx1"/>
+                      </a:solidFill>
+                      <a:prstDash val="solid"/>
+                      <a:round/>
+                      <a:headEnd type="none" w="med" len="med"/>
+                      <a:tailEnd type="none" w="med" len="med"/>
+                    </a:lnR>
+                    <a:lnT w="12700" cap="flat" cmpd="sng" algn="ctr">
+                      <a:solidFill>
+                        <a:schemeClr val="tx1"/>
+                      </a:solidFill>
+                      <a:prstDash val="solid"/>
+                      <a:round/>
+                      <a:headEnd type="none" w="med" len="med"/>
+                      <a:tailEnd type="none" w="med" len="med"/>
+                    </a:lnT>
+                    <a:lnB w="12700" cap="flat" cmpd="sng" algn="ctr">
+                      <a:solidFill>
+                        <a:schemeClr val="tx1"/>
+                      </a:solidFill>
+                      <a:prstDash val="solid"/>
+                      <a:round/>
+                      <a:headEnd type="none" w="med" len="med"/>
+                      <a:tailEnd type="none" w="med" len="med"/>
+                    </a:lnB>
+                  </a:tcPr>
+                </a:tc>
+                <a:tc>
+                  <a:txBody>
+                    <a:bodyPr/>
+                    <a:lstStyle/>
+                    <a:p>
+                      <a:pPr algn="r"/>
+                      <a:r>
+                        <a:rPr lang="en-US" altLang="ko-KR"/>
+                        <a:t>0%</a:t>
+                      </a:r>
+                    </a:p>
+                  </a:txBody>
+                  <a:tcPr anchor="ctr">
+                    <a:lnL w="12700" cap="flat" cmpd="sng" algn="ctr">
+                      <a:solidFill>
+                        <a:schemeClr val="tx1"/>
+                      </a:solidFill>
+                      <a:prstDash val="solid"/>
+                      <a:round/>
+                      <a:headEnd type="none" w="med" len="med"/>
+                      <a:tailEnd type="none" w="med" len="med"/>
+                    </a:lnL>
+                    <a:lnR w="12700" cap="flat" cmpd="sng" algn="ctr">
+                      <a:solidFill>
+                        <a:schemeClr val="tx1"/>
+                      </a:solidFill>
+                      <a:prstDash val="solid"/>
+                      <a:round/>
+                      <a:headEnd type="none" w="med" len="med"/>
+                      <a:tailEnd type="none" w="med" len="med"/>
+                    </a:lnR>
+                    <a:lnT w="12700" cap="flat" cmpd="sng" algn="ctr">
+                      <a:solidFill>
+                        <a:schemeClr val="tx1"/>
+                      </a:solidFill>
+                      <a:prstDash val="solid"/>
+                      <a:round/>
+                      <a:headEnd type="none" w="med" len="med"/>
+                      <a:tailEnd type="none" w="med" len="med"/>
+                    </a:lnT>
+                    <a:lnB w="12700" cap="flat" cmpd="sng" algn="ctr">
+                      <a:solidFill>
+                        <a:schemeClr val="tx1"/>
+                      </a:solidFill>
+                      <a:prstDash val="solid"/>
+                      <a:round/>
+                      <a:headEnd type="none" w="med" len="med"/>
+                      <a:tailEnd type="none" w="med" len="med"/>
+                    </a:lnB>
+                  </a:tcPr>
+                </a:tc>
+                <a:tc>
+                  <a:txBody>
+                    <a:bodyPr/>
+                    <a:lstStyle/>
+                    <a:p>
+                      <a:pPr algn="r"/>
+                      <a:r>
+                        <a:rPr lang="en-US" altLang="ko-KR" b="1"/>
+                        <a:t>100%</a:t>
+                      </a:r>
+                      <a:endParaRPr lang="ko-KR" altLang="en-US"/>
+                    </a:p>
+                  </a:txBody>
+                  <a:tcPr anchor="ctr">
+                    <a:lnL w="12700" cap="flat" cmpd="sng" algn="ctr">
+                      <a:solidFill>
+                        <a:schemeClr val="tx1"/>
+                      </a:solidFill>
+                      <a:prstDash val="solid"/>
+                      <a:round/>
+                      <a:headEnd type="none" w="med" len="med"/>
+                      <a:tailEnd type="none" w="med" len="med"/>
+                    </a:lnL>
+                    <a:lnR w="12700" cap="flat" cmpd="sng" algn="ctr">
+                      <a:solidFill>
+                        <a:schemeClr val="tx1"/>
+                      </a:solidFill>
+                      <a:prstDash val="solid"/>
+                      <a:round/>
+                      <a:headEnd type="none" w="med" len="med"/>
+                      <a:tailEnd type="none" w="med" len="med"/>
+                    </a:lnR>
+                    <a:lnT w="12700" cap="flat" cmpd="sng" algn="ctr">
+                      <a:solidFill>
+                        <a:schemeClr val="tx1"/>
+                      </a:solidFill>
+                      <a:prstDash val="solid"/>
+                      <a:round/>
+                      <a:headEnd type="none" w="med" len="med"/>
+                      <a:tailEnd type="none" w="med" len="med"/>
+                    </a:lnT>
+                    <a:lnB w="12700" cap="flat" cmpd="sng" algn="ctr">
+                      <a:solidFill>
+                        <a:schemeClr val="tx1"/>
+                      </a:solidFill>
+                      <a:prstDash val="solid"/>
+                      <a:round/>
+                      <a:headEnd type="none" w="med" len="med"/>
+                      <a:tailEnd type="none" w="med" len="med"/>
+                    </a:lnB>
+                  </a:tcPr>
+                </a:tc>
+                <a:extLst>
+                  <a:ext uri="{0D108BD9-81ED-4DB2-BD59-A6C34878D82A}">
+                    <a16:rowId xmlns:a16="http://schemas.microsoft.com/office/drawing/2014/main" val="3557336685"/>
+                  </a:ext>
+                </a:extLst>
+              </a:tr>
+              <a:tr h="0">
+                <a:tc>
+                  <a:txBody>
+                    <a:bodyPr/>
+                    <a:lstStyle/>
+                    <a:p>
+                      <a:r>
+                        <a:rPr lang="ko-KR" altLang="en-US"/>
+                        <a:t>공고 요구사항 키워드 재현율</a:t>
+                      </a:r>
+                    </a:p>
+                  </a:txBody>
+                  <a:tcPr anchor="ctr">
+                    <a:lnL w="12700" cap="flat" cmpd="sng" algn="ctr">
+                      <a:solidFill>
+                        <a:schemeClr val="tx1"/>
+                      </a:solidFill>
+                      <a:prstDash val="solid"/>
+                      <a:round/>
+                      <a:headEnd type="none" w="med" len="med"/>
+                      <a:tailEnd type="none" w="med" len="med"/>
+                    </a:lnL>
+                    <a:lnR w="12700" cap="flat" cmpd="sng" algn="ctr">
+                      <a:solidFill>
+                        <a:schemeClr val="tx1"/>
+                      </a:solidFill>
+                      <a:prstDash val="solid"/>
+                      <a:round/>
+                      <a:headEnd type="none" w="med" len="med"/>
+                      <a:tailEnd type="none" w="med" len="med"/>
+                    </a:lnR>
+                    <a:lnT w="12700" cap="flat" cmpd="sng" algn="ctr">
+                      <a:solidFill>
+                        <a:schemeClr val="tx1"/>
+                      </a:solidFill>
+                      <a:prstDash val="solid"/>
+                      <a:round/>
+                      <a:headEnd type="none" w="med" len="med"/>
+                      <a:tailEnd type="none" w="med" len="med"/>
+                    </a:lnT>
+                    <a:lnB w="12700" cap="flat" cmpd="sng" algn="ctr">
+                      <a:solidFill>
+                        <a:schemeClr val="tx1"/>
+                      </a:solidFill>
+                      <a:prstDash val="solid"/>
+                      <a:round/>
+                      <a:headEnd type="none" w="med" len="med"/>
+                      <a:tailEnd type="none" w="med" len="med"/>
+                    </a:lnB>
+                  </a:tcPr>
+                </a:tc>
+                <a:tc>
+                  <a:txBody>
+                    <a:bodyPr/>
+                    <a:lstStyle/>
+                    <a:p>
+                      <a:pPr algn="r"/>
+                      <a:r>
+                        <a:rPr lang="en-US" altLang="ko-KR"/>
+                        <a:t>50%</a:t>
+                      </a:r>
+                    </a:p>
+                  </a:txBody>
+                  <a:tcPr anchor="ctr">
+                    <a:lnL w="12700" cap="flat" cmpd="sng" algn="ctr">
+                      <a:solidFill>
+                        <a:schemeClr val="tx1"/>
+                      </a:solidFill>
+                      <a:prstDash val="solid"/>
+                      <a:round/>
+                      <a:headEnd type="none" w="med" len="med"/>
+                      <a:tailEnd type="none" w="med" len="med"/>
+                    </a:lnL>
+                    <a:lnR w="12700" cap="flat" cmpd="sng" algn="ctr">
+                      <a:solidFill>
+                        <a:schemeClr val="tx1"/>
+                      </a:solidFill>
+                      <a:prstDash val="solid"/>
+                      <a:round/>
+                      <a:headEnd type="none" w="med" len="med"/>
+                      <a:tailEnd type="none" w="med" len="med"/>
+                    </a:lnR>
+                    <a:lnT w="12700" cap="flat" cmpd="sng" algn="ctr">
+                      <a:solidFill>
+                        <a:schemeClr val="tx1"/>
+                      </a:solidFill>
+                      <a:prstDash val="solid"/>
+                      <a:round/>
+                      <a:headEnd type="none" w="med" len="med"/>
+                      <a:tailEnd type="none" w="med" len="med"/>
+                    </a:lnT>
+                    <a:lnB w="12700" cap="flat" cmpd="sng" algn="ctr">
+                      <a:solidFill>
+                        <a:schemeClr val="tx1"/>
+                      </a:solidFill>
+                      <a:prstDash val="solid"/>
+                      <a:round/>
+                      <a:headEnd type="none" w="med" len="med"/>
+                      <a:tailEnd type="none" w="med" len="med"/>
+                    </a:lnB>
+                  </a:tcPr>
+                </a:tc>
+                <a:tc>
+                  <a:txBody>
+                    <a:bodyPr/>
+                    <a:lstStyle/>
+                    <a:p>
+                      <a:pPr algn="r"/>
+                      <a:r>
+                        <a:rPr lang="en-US" altLang="ko-KR" b="1"/>
+                        <a:t>100%</a:t>
+                      </a:r>
+                      <a:endParaRPr lang="ko-KR" altLang="en-US"/>
+                    </a:p>
+                  </a:txBody>
+                  <a:tcPr anchor="ctr">
+                    <a:lnL w="12700" cap="flat" cmpd="sng" algn="ctr">
+                      <a:solidFill>
+                        <a:schemeClr val="tx1"/>
+                      </a:solidFill>
+                      <a:prstDash val="solid"/>
+                      <a:round/>
+                      <a:headEnd type="none" w="med" len="med"/>
+                      <a:tailEnd type="none" w="med" len="med"/>
+                    </a:lnL>
+                    <a:lnR w="12700" cap="flat" cmpd="sng" algn="ctr">
+                      <a:solidFill>
+                        <a:schemeClr val="tx1"/>
+                      </a:solidFill>
+                      <a:prstDash val="solid"/>
+                      <a:round/>
+                      <a:headEnd type="none" w="med" len="med"/>
+                      <a:tailEnd type="none" w="med" len="med"/>
+                    </a:lnR>
+                    <a:lnT w="12700" cap="flat" cmpd="sng" algn="ctr">
+                      <a:solidFill>
+                        <a:schemeClr val="tx1"/>
+                      </a:solidFill>
+                      <a:prstDash val="solid"/>
+                      <a:round/>
+                      <a:headEnd type="none" w="med" len="med"/>
+                      <a:tailEnd type="none" w="med" len="med"/>
+                    </a:lnT>
+                    <a:lnB w="12700" cap="flat" cmpd="sng" algn="ctr">
+                      <a:solidFill>
+                        <a:schemeClr val="tx1"/>
+                      </a:solidFill>
+                      <a:prstDash val="solid"/>
+                      <a:round/>
+                      <a:headEnd type="none" w="med" len="med"/>
+                      <a:tailEnd type="none" w="med" len="med"/>
+                    </a:lnB>
+                  </a:tcPr>
+                </a:tc>
+                <a:extLst>
+                  <a:ext uri="{0D108BD9-81ED-4DB2-BD59-A6C34878D82A}">
+                    <a16:rowId xmlns:a16="http://schemas.microsoft.com/office/drawing/2014/main" val="2622891919"/>
+                  </a:ext>
+                </a:extLst>
+              </a:tr>
+              <a:tr h="0">
+                <a:tc>
+                  <a:txBody>
+                    <a:bodyPr/>
+                    <a:lstStyle/>
+                    <a:p>
+                      <a:r>
+                        <a:rPr lang="ko-KR" altLang="en-US"/>
+                        <a:t>정확 인용 유효성</a:t>
+                      </a:r>
+                    </a:p>
+                  </a:txBody>
+                  <a:tcPr anchor="ctr">
+                    <a:lnL w="12700" cap="flat" cmpd="sng" algn="ctr">
+                      <a:solidFill>
+                        <a:schemeClr val="tx1"/>
+                      </a:solidFill>
+                      <a:prstDash val="solid"/>
+                      <a:round/>
+                      <a:headEnd type="none" w="med" len="med"/>
+                      <a:tailEnd type="none" w="med" len="med"/>
+                    </a:lnL>
+                    <a:lnR w="12700" cap="flat" cmpd="sng" algn="ctr">
+                      <a:solidFill>
+                        <a:schemeClr val="tx1"/>
+                      </a:solidFill>
+                      <a:prstDash val="solid"/>
+                      <a:round/>
+                      <a:headEnd type="none" w="med" len="med"/>
+                      <a:tailEnd type="none" w="med" len="med"/>
+                    </a:lnR>
+                    <a:lnT w="12700" cap="flat" cmpd="sng" algn="ctr">
+                      <a:solidFill>
+                        <a:schemeClr val="tx1"/>
+                      </a:solidFill>
+                      <a:prstDash val="solid"/>
+                      <a:round/>
+                      <a:headEnd type="none" w="med" len="med"/>
+                      <a:tailEnd type="none" w="med" len="med"/>
+                    </a:lnT>
+                    <a:lnB w="12700" cap="flat" cmpd="sng" algn="ctr">
+                      <a:solidFill>
+                        <a:schemeClr val="tx1"/>
+                      </a:solidFill>
+                      <a:prstDash val="solid"/>
+                      <a:round/>
+                      <a:headEnd type="none" w="med" len="med"/>
+                      <a:tailEnd type="none" w="med" len="med"/>
+                    </a:lnB>
+                  </a:tcPr>
+                </a:tc>
+                <a:tc>
+                  <a:txBody>
+                    <a:bodyPr/>
+                    <a:lstStyle/>
+                    <a:p>
+                      <a:pPr algn="r"/>
+                      <a:r>
+                        <a:rPr lang="en-US" altLang="ko-KR"/>
+                        <a:t>100%</a:t>
+                      </a:r>
+                    </a:p>
+                  </a:txBody>
+                  <a:tcPr anchor="ctr">
+                    <a:lnL w="12700" cap="flat" cmpd="sng" algn="ctr">
+                      <a:solidFill>
+                        <a:schemeClr val="tx1"/>
+                      </a:solidFill>
+                      <a:prstDash val="solid"/>
+                      <a:round/>
+                      <a:headEnd type="none" w="med" len="med"/>
+                      <a:tailEnd type="none" w="med" len="med"/>
+                    </a:lnL>
+                    <a:lnR w="12700" cap="flat" cmpd="sng" algn="ctr">
+                      <a:solidFill>
+                        <a:schemeClr val="tx1"/>
+                      </a:solidFill>
+                      <a:prstDash val="solid"/>
+                      <a:round/>
+                      <a:headEnd type="none" w="med" len="med"/>
+                      <a:tailEnd type="none" w="med" len="med"/>
+                    </a:lnR>
+                    <a:lnT w="12700" cap="flat" cmpd="sng" algn="ctr">
+                      <a:solidFill>
+                        <a:schemeClr val="tx1"/>
+                      </a:solidFill>
+                      <a:prstDash val="solid"/>
+                      <a:round/>
+                      <a:headEnd type="none" w="med" len="med"/>
+                      <a:tailEnd type="none" w="med" len="med"/>
+                    </a:lnT>
+                    <a:lnB w="12700" cap="flat" cmpd="sng" algn="ctr">
+                      <a:solidFill>
+                        <a:schemeClr val="tx1"/>
+                      </a:solidFill>
+                      <a:prstDash val="solid"/>
+                      <a:round/>
+                      <a:headEnd type="none" w="med" len="med"/>
+                      <a:tailEnd type="none" w="med" len="med"/>
+                    </a:lnB>
+                  </a:tcPr>
+                </a:tc>
+                <a:tc>
+                  <a:txBody>
+                    <a:bodyPr/>
+                    <a:lstStyle/>
+                    <a:p>
+                      <a:pPr algn="r"/>
+                      <a:r>
+                        <a:rPr lang="en-US" altLang="ko-KR" b="1"/>
+                        <a:t>100%</a:t>
+                      </a:r>
+                      <a:endParaRPr lang="ko-KR" altLang="en-US"/>
+                    </a:p>
+                  </a:txBody>
+                  <a:tcPr anchor="ctr">
+                    <a:lnL w="12700" cap="flat" cmpd="sng" algn="ctr">
+                      <a:solidFill>
+                        <a:schemeClr val="tx1"/>
+                      </a:solidFill>
+                      <a:prstDash val="solid"/>
+                      <a:round/>
+                      <a:headEnd type="none" w="med" len="med"/>
+                      <a:tailEnd type="none" w="med" len="med"/>
+                    </a:lnL>
+                    <a:lnR w="12700" cap="flat" cmpd="sng" algn="ctr">
+                      <a:solidFill>
+                        <a:schemeClr val="tx1"/>
+                      </a:solidFill>
+                      <a:prstDash val="solid"/>
+                      <a:round/>
+                      <a:headEnd type="none" w="med" len="med"/>
+                      <a:tailEnd type="none" w="med" len="med"/>
+                    </a:lnR>
+                    <a:lnT w="12700" cap="flat" cmpd="sng" algn="ctr">
+                      <a:solidFill>
+                        <a:schemeClr val="tx1"/>
+                      </a:solidFill>
+                      <a:prstDash val="solid"/>
+                      <a:round/>
+                      <a:headEnd type="none" w="med" len="med"/>
+                      <a:tailEnd type="none" w="med" len="med"/>
+                    </a:lnT>
+                    <a:lnB w="12700" cap="flat" cmpd="sng" algn="ctr">
+                      <a:solidFill>
+                        <a:schemeClr val="tx1"/>
+                      </a:solidFill>
+                      <a:prstDash val="solid"/>
+                      <a:round/>
+                      <a:headEnd type="none" w="med" len="med"/>
+                      <a:tailEnd type="none" w="med" len="med"/>
+                    </a:lnB>
+                  </a:tcPr>
+                </a:tc>
+                <a:extLst>
+                  <a:ext uri="{0D108BD9-81ED-4DB2-BD59-A6C34878D82A}">
+                    <a16:rowId xmlns:a16="http://schemas.microsoft.com/office/drawing/2014/main" val="1919375911"/>
+                  </a:ext>
+                </a:extLst>
+              </a:tr>
+              <a:tr h="0">
+                <a:tc>
+                  <a:txBody>
+                    <a:bodyPr/>
+                    <a:lstStyle/>
+                    <a:p>
+                      <a:r>
+                        <a:rPr lang="en-US"/>
+                        <a:t>AI </a:t>
+                      </a:r>
+                      <a:r>
+                        <a:rPr lang="ko-KR" altLang="en-US"/>
+                        <a:t>답변 오염률</a:t>
+                      </a:r>
+                    </a:p>
+                  </a:txBody>
+                  <a:tcPr anchor="ctr">
+                    <a:lnL w="12700" cap="flat" cmpd="sng" algn="ctr">
+                      <a:solidFill>
+                        <a:schemeClr val="tx1"/>
+                      </a:solidFill>
+                      <a:prstDash val="solid"/>
+                      <a:round/>
+                      <a:headEnd type="none" w="med" len="med"/>
+                      <a:tailEnd type="none" w="med" len="med"/>
+                    </a:lnL>
+                    <a:lnR w="12700" cap="flat" cmpd="sng" algn="ctr">
+                      <a:solidFill>
+                        <a:schemeClr val="tx1"/>
+                      </a:solidFill>
+                      <a:prstDash val="solid"/>
+                      <a:round/>
+                      <a:headEnd type="none" w="med" len="med"/>
+                      <a:tailEnd type="none" w="med" len="med"/>
+                    </a:lnR>
+                    <a:lnT w="12700" cap="flat" cmpd="sng" algn="ctr">
+                      <a:solidFill>
+                        <a:schemeClr val="tx1"/>
+                      </a:solidFill>
+                      <a:prstDash val="solid"/>
+                      <a:round/>
+                      <a:headEnd type="none" w="med" len="med"/>
+                      <a:tailEnd type="none" w="med" len="med"/>
+                    </a:lnT>
+                    <a:lnB w="12700" cap="flat" cmpd="sng" algn="ctr">
+                      <a:solidFill>
+                        <a:schemeClr val="tx1"/>
+                      </a:solidFill>
+                      <a:prstDash val="solid"/>
+                      <a:round/>
+                      <a:headEnd type="none" w="med" len="med"/>
+                      <a:tailEnd type="none" w="med" len="med"/>
+                    </a:lnB>
+                  </a:tcPr>
+                </a:tc>
+                <a:tc>
+                  <a:txBody>
+                    <a:bodyPr/>
+                    <a:lstStyle/>
+                    <a:p>
+                      <a:pPr algn="r"/>
+                      <a:r>
+                        <a:rPr lang="en-US" altLang="ko-KR"/>
+                        <a:t>0%</a:t>
+                      </a:r>
+                    </a:p>
+                  </a:txBody>
+                  <a:tcPr anchor="ctr">
+                    <a:lnL w="12700" cap="flat" cmpd="sng" algn="ctr">
+                      <a:solidFill>
+                        <a:schemeClr val="tx1"/>
+                      </a:solidFill>
+                      <a:prstDash val="solid"/>
+                      <a:round/>
+                      <a:headEnd type="none" w="med" len="med"/>
+                      <a:tailEnd type="none" w="med" len="med"/>
+                    </a:lnL>
+                    <a:lnR w="12700" cap="flat" cmpd="sng" algn="ctr">
+                      <a:solidFill>
+                        <a:schemeClr val="tx1"/>
+                      </a:solidFill>
+                      <a:prstDash val="solid"/>
+                      <a:round/>
+                      <a:headEnd type="none" w="med" len="med"/>
+                      <a:tailEnd type="none" w="med" len="med"/>
+                    </a:lnR>
+                    <a:lnT w="12700" cap="flat" cmpd="sng" algn="ctr">
+                      <a:solidFill>
+                        <a:schemeClr val="tx1"/>
+                      </a:solidFill>
+                      <a:prstDash val="solid"/>
+                      <a:round/>
+                      <a:headEnd type="none" w="med" len="med"/>
+                      <a:tailEnd type="none" w="med" len="med"/>
+                    </a:lnT>
+                    <a:lnB w="12700" cap="flat" cmpd="sng" algn="ctr">
+                      <a:solidFill>
+                        <a:schemeClr val="tx1"/>
+                      </a:solidFill>
+                      <a:prstDash val="solid"/>
+                      <a:round/>
+                      <a:headEnd type="none" w="med" len="med"/>
+                      <a:tailEnd type="none" w="med" len="med"/>
+                    </a:lnB>
+                  </a:tcPr>
+                </a:tc>
+                <a:tc>
+                  <a:txBody>
+                    <a:bodyPr/>
+                    <a:lstStyle/>
+                    <a:p>
+                      <a:pPr algn="r"/>
+                      <a:r>
+                        <a:rPr lang="en-US" altLang="ko-KR" b="1"/>
+                        <a:t>0%</a:t>
+                      </a:r>
+                      <a:endParaRPr lang="ko-KR" altLang="en-US"/>
+                    </a:p>
+                  </a:txBody>
+                  <a:tcPr anchor="ctr">
+                    <a:lnL w="12700" cap="flat" cmpd="sng" algn="ctr">
+                      <a:solidFill>
+                        <a:schemeClr val="tx1"/>
+                      </a:solidFill>
+                      <a:prstDash val="solid"/>
+                      <a:round/>
+                      <a:headEnd type="none" w="med" len="med"/>
+                      <a:tailEnd type="none" w="med" len="med"/>
+                    </a:lnL>
+                    <a:lnR w="12700" cap="flat" cmpd="sng" algn="ctr">
+                      <a:solidFill>
+                        <a:schemeClr val="tx1"/>
+                      </a:solidFill>
+                      <a:prstDash val="solid"/>
+                      <a:round/>
+                      <a:headEnd type="none" w="med" len="med"/>
+                      <a:tailEnd type="none" w="med" len="med"/>
+                    </a:lnR>
+                    <a:lnT w="12700" cap="flat" cmpd="sng" algn="ctr">
+                      <a:solidFill>
+                        <a:schemeClr val="tx1"/>
+                      </a:solidFill>
+                      <a:prstDash val="solid"/>
+                      <a:round/>
+                      <a:headEnd type="none" w="med" len="med"/>
+                      <a:tailEnd type="none" w="med" len="med"/>
+                    </a:lnT>
+                    <a:lnB w="12700" cap="flat" cmpd="sng" algn="ctr">
+                      <a:solidFill>
+                        <a:schemeClr val="tx1"/>
+                      </a:solidFill>
+                      <a:prstDash val="solid"/>
+                      <a:round/>
+                      <a:headEnd type="none" w="med" len="med"/>
+                      <a:tailEnd type="none" w="med" len="med"/>
+                    </a:lnB>
+                  </a:tcPr>
+                </a:tc>
+                <a:extLst>
+                  <a:ext uri="{0D108BD9-81ED-4DB2-BD59-A6C34878D82A}">
+                    <a16:rowId xmlns:a16="http://schemas.microsoft.com/office/drawing/2014/main" val="4215323247"/>
+                  </a:ext>
+                </a:extLst>
+              </a:tr>
+              <a:tr h="0">
+                <a:tc>
+                  <a:txBody>
+                    <a:bodyPr/>
+                    <a:lstStyle/>
+                    <a:p>
+                      <a:r>
+                        <a:rPr lang="ko-KR" altLang="en-US"/>
+                        <a:t>무관 대화 누출률</a:t>
+                      </a:r>
+                    </a:p>
+                  </a:txBody>
+                  <a:tcPr anchor="ctr">
+                    <a:lnL w="12700" cap="flat" cmpd="sng" algn="ctr">
+                      <a:solidFill>
+                        <a:schemeClr val="tx1"/>
+                      </a:solidFill>
+                      <a:prstDash val="solid"/>
+                      <a:round/>
+                      <a:headEnd type="none" w="med" len="med"/>
+                      <a:tailEnd type="none" w="med" len="med"/>
+                    </a:lnL>
+                    <a:lnR w="12700" cap="flat" cmpd="sng" algn="ctr">
+                      <a:solidFill>
+                        <a:schemeClr val="tx1"/>
+                      </a:solidFill>
+                      <a:prstDash val="solid"/>
+                      <a:round/>
+                      <a:headEnd type="none" w="med" len="med"/>
+                      <a:tailEnd type="none" w="med" len="med"/>
+                    </a:lnR>
+                    <a:lnT w="12700" cap="flat" cmpd="sng" algn="ctr">
+                      <a:solidFill>
+                        <a:schemeClr val="tx1"/>
+                      </a:solidFill>
+                      <a:prstDash val="solid"/>
+                      <a:round/>
+                      <a:headEnd type="none" w="med" len="med"/>
+                      <a:tailEnd type="none" w="med" len="med"/>
+                    </a:lnT>
+                    <a:lnB w="12700" cap="flat" cmpd="sng" algn="ctr">
+                      <a:solidFill>
+                        <a:schemeClr val="tx1"/>
+                      </a:solidFill>
+                      <a:prstDash val="solid"/>
+                      <a:round/>
+                      <a:headEnd type="none" w="med" len="med"/>
+                      <a:tailEnd type="none" w="med" len="med"/>
+                    </a:lnB>
+                  </a:tcPr>
+                </a:tc>
+                <a:tc>
+                  <a:txBody>
+                    <a:bodyPr/>
+                    <a:lstStyle/>
+                    <a:p>
+                      <a:pPr algn="r"/>
+                      <a:r>
+                        <a:rPr lang="en-US" altLang="ko-KR"/>
+                        <a:t>0%</a:t>
+                      </a:r>
+                    </a:p>
+                  </a:txBody>
+                  <a:tcPr anchor="ctr">
+                    <a:lnL w="12700" cap="flat" cmpd="sng" algn="ctr">
+                      <a:solidFill>
+                        <a:schemeClr val="tx1"/>
+                      </a:solidFill>
+                      <a:prstDash val="solid"/>
+                      <a:round/>
+                      <a:headEnd type="none" w="med" len="med"/>
+                      <a:tailEnd type="none" w="med" len="med"/>
+                    </a:lnL>
+                    <a:lnR w="12700" cap="flat" cmpd="sng" algn="ctr">
+                      <a:solidFill>
+                        <a:schemeClr val="tx1"/>
+                      </a:solidFill>
+                      <a:prstDash val="solid"/>
+                      <a:round/>
+                      <a:headEnd type="none" w="med" len="med"/>
+                      <a:tailEnd type="none" w="med" len="med"/>
+                    </a:lnR>
+                    <a:lnT w="12700" cap="flat" cmpd="sng" algn="ctr">
+                      <a:solidFill>
+                        <a:schemeClr val="tx1"/>
+                      </a:solidFill>
+                      <a:prstDash val="solid"/>
+                      <a:round/>
+                      <a:headEnd type="none" w="med" len="med"/>
+                      <a:tailEnd type="none" w="med" len="med"/>
+                    </a:lnT>
+                    <a:lnB w="12700" cap="flat" cmpd="sng" algn="ctr">
+                      <a:solidFill>
+                        <a:schemeClr val="tx1"/>
+                      </a:solidFill>
+                      <a:prstDash val="solid"/>
+                      <a:round/>
+                      <a:headEnd type="none" w="med" len="med"/>
+                      <a:tailEnd type="none" w="med" len="med"/>
+                    </a:lnB>
+                  </a:tcPr>
+                </a:tc>
+                <a:tc>
+                  <a:txBody>
+                    <a:bodyPr/>
+                    <a:lstStyle/>
+                    <a:p>
+                      <a:pPr algn="r"/>
+                      <a:r>
+                        <a:rPr lang="en-US" altLang="ko-KR" b="1"/>
+                        <a:t>0%</a:t>
+                      </a:r>
+                      <a:endParaRPr lang="ko-KR" altLang="en-US"/>
+                    </a:p>
+                  </a:txBody>
+                  <a:tcPr anchor="ctr">
+                    <a:lnL w="12700" cap="flat" cmpd="sng" algn="ctr">
+                      <a:solidFill>
+                        <a:schemeClr val="tx1"/>
+                      </a:solidFill>
+                      <a:prstDash val="solid"/>
+                      <a:round/>
+                      <a:headEnd type="none" w="med" len="med"/>
+                      <a:tailEnd type="none" w="med" len="med"/>
+                    </a:lnL>
+                    <a:lnR w="12700" cap="flat" cmpd="sng" algn="ctr">
+                      <a:solidFill>
+                        <a:schemeClr val="tx1"/>
+                      </a:solidFill>
+                      <a:prstDash val="solid"/>
+                      <a:round/>
+                      <a:headEnd type="none" w="med" len="med"/>
+                      <a:tailEnd type="none" w="med" len="med"/>
+                    </a:lnR>
+                    <a:lnT w="12700" cap="flat" cmpd="sng" algn="ctr">
+                      <a:solidFill>
+                        <a:schemeClr val="tx1"/>
+                      </a:solidFill>
+                      <a:prstDash val="solid"/>
+                      <a:round/>
+                      <a:headEnd type="none" w="med" len="med"/>
+                      <a:tailEnd type="none" w="med" len="med"/>
+                    </a:lnT>
+                    <a:lnB w="12700" cap="flat" cmpd="sng" algn="ctr">
+                      <a:solidFill>
+                        <a:schemeClr val="tx1"/>
+                      </a:solidFill>
+                      <a:prstDash val="solid"/>
+                      <a:round/>
+                      <a:headEnd type="none" w="med" len="med"/>
+                      <a:tailEnd type="none" w="med" len="med"/>
+                    </a:lnB>
+                  </a:tcPr>
+                </a:tc>
+                <a:extLst>
+                  <a:ext uri="{0D108BD9-81ED-4DB2-BD59-A6C34878D82A}">
+                    <a16:rowId xmlns:a16="http://schemas.microsoft.com/office/drawing/2014/main" val="1600193034"/>
+                  </a:ext>
+                </a:extLst>
+              </a:tr>
+              <a:tr h="0">
+                <a:tc>
+                  <a:txBody>
+                    <a:bodyPr/>
+                    <a:lstStyle/>
+                    <a:p>
+                      <a:r>
+                        <a:rPr lang="ko-KR" altLang="en-US"/>
+                        <a:t>공고 오탐</a:t>
+                      </a:r>
+                    </a:p>
+                  </a:txBody>
+                  <a:tcPr anchor="ctr">
+                    <a:lnL w="12700" cap="flat" cmpd="sng" algn="ctr">
+                      <a:solidFill>
+                        <a:schemeClr val="tx1"/>
+                      </a:solidFill>
+                      <a:prstDash val="solid"/>
+                      <a:round/>
+                      <a:headEnd type="none" w="med" len="med"/>
+                      <a:tailEnd type="none" w="med" len="med"/>
+                    </a:lnL>
+                    <a:lnR w="12700" cap="flat" cmpd="sng" algn="ctr">
+                      <a:solidFill>
+                        <a:schemeClr val="tx1"/>
+                      </a:solidFill>
+                      <a:prstDash val="solid"/>
+                      <a:round/>
+                      <a:headEnd type="none" w="med" len="med"/>
+                      <a:tailEnd type="none" w="med" len="med"/>
+                    </a:lnR>
+                    <a:lnT w="12700" cap="flat" cmpd="sng" algn="ctr">
+                      <a:solidFill>
+                        <a:schemeClr val="tx1"/>
+                      </a:solidFill>
+                      <a:prstDash val="solid"/>
+                      <a:round/>
+                      <a:headEnd type="none" w="med" len="med"/>
+                      <a:tailEnd type="none" w="med" len="med"/>
+                    </a:lnT>
+                    <a:lnB w="12700" cap="flat" cmpd="sng" algn="ctr">
+                      <a:solidFill>
+                        <a:schemeClr val="tx1"/>
+                      </a:solidFill>
+                      <a:prstDash val="solid"/>
+                      <a:round/>
+                      <a:headEnd type="none" w="med" len="med"/>
+                      <a:tailEnd type="none" w="med" len="med"/>
+                    </a:lnB>
+                  </a:tcPr>
+                </a:tc>
+                <a:tc>
+                  <a:txBody>
+                    <a:bodyPr/>
+                    <a:lstStyle/>
+                    <a:p>
+                      <a:pPr algn="r"/>
+                      <a:r>
+                        <a:rPr lang="en-US" altLang="ko-KR"/>
+                        <a:t>1</a:t>
+                      </a:r>
+                      <a:r>
+                        <a:rPr lang="ko-KR" altLang="en-US"/>
+                        <a:t>건</a:t>
+                      </a:r>
+                    </a:p>
+                  </a:txBody>
+                  <a:tcPr anchor="ctr">
+                    <a:lnL w="12700" cap="flat" cmpd="sng" algn="ctr">
+                      <a:solidFill>
+                        <a:schemeClr val="tx1"/>
+                      </a:solidFill>
+                      <a:prstDash val="solid"/>
+                      <a:round/>
+                      <a:headEnd type="none" w="med" len="med"/>
+                      <a:tailEnd type="none" w="med" len="med"/>
+                    </a:lnL>
+                    <a:lnR w="12700" cap="flat" cmpd="sng" algn="ctr">
+                      <a:solidFill>
+                        <a:schemeClr val="tx1"/>
+                      </a:solidFill>
+                      <a:prstDash val="solid"/>
+                      <a:round/>
+                      <a:headEnd type="none" w="med" len="med"/>
+                      <a:tailEnd type="none" w="med" len="med"/>
+                    </a:lnR>
+                    <a:lnT w="12700" cap="flat" cmpd="sng" algn="ctr">
+                      <a:solidFill>
+                        <a:schemeClr val="tx1"/>
+                      </a:solidFill>
+                      <a:prstDash val="solid"/>
+                      <a:round/>
+                      <a:headEnd type="none" w="med" len="med"/>
+                      <a:tailEnd type="none" w="med" len="med"/>
+                    </a:lnT>
+                    <a:lnB w="12700" cap="flat" cmpd="sng" algn="ctr">
+                      <a:solidFill>
+                        <a:schemeClr val="tx1"/>
+                      </a:solidFill>
+                      <a:prstDash val="solid"/>
+                      <a:round/>
+                      <a:headEnd type="none" w="med" len="med"/>
+                      <a:tailEnd type="none" w="med" len="med"/>
+                    </a:lnB>
+                  </a:tcPr>
+                </a:tc>
+                <a:tc>
+                  <a:txBody>
+                    <a:bodyPr/>
+                    <a:lstStyle/>
+                    <a:p>
+                      <a:pPr algn="r"/>
+                      <a:r>
+                        <a:rPr lang="en-US" altLang="ko-KR" b="1" dirty="0"/>
+                        <a:t>0</a:t>
+                      </a:r>
+                      <a:r>
+                        <a:rPr lang="ko-KR" altLang="en-US" b="1" dirty="0"/>
+                        <a:t>건</a:t>
+                      </a:r>
+                      <a:endParaRPr lang="ko-KR" altLang="en-US" dirty="0"/>
+                    </a:p>
+                  </a:txBody>
+                  <a:tcPr anchor="ctr">
+                    <a:lnL w="12700" cap="flat" cmpd="sng" algn="ctr">
+                      <a:solidFill>
+                        <a:schemeClr val="tx1"/>
+                      </a:solidFill>
+                      <a:prstDash val="solid"/>
+                      <a:round/>
+                      <a:headEnd type="none" w="med" len="med"/>
+                      <a:tailEnd type="none" w="med" len="med"/>
+                    </a:lnL>
+                    <a:lnR w="12700" cap="flat" cmpd="sng" algn="ctr">
+                      <a:solidFill>
+                        <a:schemeClr val="tx1"/>
+                      </a:solidFill>
+                      <a:prstDash val="solid"/>
+                      <a:round/>
+                      <a:headEnd type="none" w="med" len="med"/>
+                      <a:tailEnd type="none" w="med" len="med"/>
+                    </a:lnR>
+                    <a:lnT w="12700" cap="flat" cmpd="sng" algn="ctr">
+                      <a:solidFill>
+                        <a:schemeClr val="tx1"/>
+                      </a:solidFill>
+                      <a:prstDash val="solid"/>
+                      <a:round/>
+                      <a:headEnd type="none" w="med" len="med"/>
+                      <a:tailEnd type="none" w="med" len="med"/>
+                    </a:lnT>
+                    <a:lnB w="12700" cap="flat" cmpd="sng" algn="ctr">
+                      <a:solidFill>
+                        <a:schemeClr val="tx1"/>
+                      </a:solidFill>
+                      <a:prstDash val="solid"/>
+                      <a:round/>
+                      <a:headEnd type="none" w="med" len="med"/>
+                      <a:tailEnd type="none" w="med" len="med"/>
+                    </a:lnB>
+                  </a:tcPr>
+                </a:tc>
+                <a:extLst>
+                  <a:ext uri="{0D108BD9-81ED-4DB2-BD59-A6C34878D82A}">
+                    <a16:rowId xmlns:a16="http://schemas.microsoft.com/office/drawing/2014/main" val="1701591747"/>
+                  </a:ext>
+                </a:extLst>
+              </a:tr>
+            </a:tbl>
+          </a:graphicData>
+        </a:graphic>
+      </p:graphicFrame>
+      <p:sp>
+        <p:nvSpPr>
+          <p:cNvPr id="10" name="Oval 9">
+            <a:extLst>
+              <a:ext uri="{FF2B5EF4-FFF2-40B4-BE49-F238E27FC236}">
+                <a16:creationId xmlns:a16="http://schemas.microsoft.com/office/drawing/2014/main" id="{C8F1A33C-1A3D-482A-9B33-48C5566F6721}"/>
+              </a:ext>
+            </a:extLst>
+          </p:cNvPr>
+          <p:cNvSpPr/>
+          <p:nvPr/>
+        </p:nvSpPr>
+        <p:spPr>
+          <a:xfrm>
+            <a:off x="11277600" y="366598"/>
+            <a:ext cx="609600" cy="621099"/>
+          </a:xfrm>
+          <a:prstGeom prst="ellipse">
+            <a:avLst/>
+          </a:prstGeom>
+          <a:solidFill>
+            <a:srgbClr val="FF0000"/>
+          </a:solidFill>
+        </p:spPr>
+        <p:style>
+          <a:lnRef idx="2">
+            <a:schemeClr val="accent1">
+              <a:shade val="50000"/>
+            </a:schemeClr>
+          </a:lnRef>
+          <a:fillRef idx="1">
+            <a:schemeClr val="accent1"/>
+          </a:fillRef>
+          <a:effectRef idx="0">
+            <a:schemeClr val="accent1"/>
+          </a:effectRef>
+          <a:fontRef idx="minor">
+            <a:schemeClr val="lt1"/>
+          </a:fontRef>
+        </p:style>
+        <p:txBody>
+          <a:bodyPr rtlCol="0" anchor="ctr"/>
+          <a:lstStyle/>
+          <a:p>
+            <a:pPr algn="ctr"/>
+            <a:endParaRPr lang="ko-KR" altLang="en-US"/>
+          </a:p>
+        </p:txBody>
+      </p:sp>
+    </p:spTree>
+    <p:extLst>
+      <p:ext uri="{BB962C8B-B14F-4D97-AF65-F5344CB8AC3E}">
+        <p14:creationId xmlns:p14="http://schemas.microsoft.com/office/powerpoint/2010/main" val="931953199"/>
+      </p:ext>
+    </p:extLst>
+  </p:cSld>
+  <p:clrMapOvr>
+    <a:masterClrMapping/>
+  </p:clrMapOvr>
+</p:sld>
+</file>
+
+<file path=ppt/slides/slide11.xml><?xml version="1.0" encoding="utf-8"?>
+<p:sld xmlns:a="http://schemas.openxmlformats.org/drawingml/2006/main" xmlns:r="http://schemas.openxmlformats.org/officeDocument/2006/relationships" xmlns:p="http://schemas.openxmlformats.org/presentationml/2006/main">
+  <p:cSld>
+    <p:spTree>
+      <p:nvGrpSpPr>
+        <p:cNvPr id="1" name=""/>
+        <p:cNvGrpSpPr/>
+        <p:nvPr/>
+      </p:nvGrpSpPr>
+      <p:grpSpPr>
+        <a:xfrm>
+          <a:off x="0" y="0"/>
+          <a:ext cx="0" cy="0"/>
+          <a:chOff x="0" y="0"/>
+          <a:chExt cx="0" cy="0"/>
+        </a:xfrm>
+      </p:grpSpPr>
+      <p:sp>
+        <p:nvSpPr>
           <p:cNvPr id="7" name="Rectangle 6">
             <a:extLst>
               <a:ext uri="{FF2B5EF4-FFF2-40B4-BE49-F238E27FC236}">
@@ -3712,7 +6556,7 @@
 </p:sld>
 </file>
 
-<file path=ppt/slides/slide11.xml><?xml version="1.0" encoding="utf-8"?>
+<file path=ppt/slides/slide12.xml><?xml version="1.0" encoding="utf-8"?>
 <p:sld xmlns:a="http://schemas.openxmlformats.org/drawingml/2006/main" xmlns:r="http://schemas.openxmlformats.org/officeDocument/2006/relationships" xmlns:p="http://schemas.openxmlformats.org/presentationml/2006/main">
   <p:cSld>
     <p:spTree>
@@ -5447,7 +8291,7 @@
 </p:sld>
 </file>
 
-<file path=ppt/slides/slide12.xml><?xml version="1.0" encoding="utf-8"?>
+<file path=ppt/slides/slide13.xml><?xml version="1.0" encoding="utf-8"?>
 <p:sld xmlns:a="http://schemas.openxmlformats.org/drawingml/2006/main" xmlns:r="http://schemas.openxmlformats.org/officeDocument/2006/relationships" xmlns:p="http://schemas.openxmlformats.org/presentationml/2006/main">
   <p:cSld>
     <p:spTree>
@@ -8061,7 +10905,7 @@
 </p:sld>
 </file>
 
-<file path=ppt/slides/slide13.xml><?xml version="1.0" encoding="utf-8"?>
+<file path=ppt/slides/slide14.xml><?xml version="1.0" encoding="utf-8"?>
 <p:sld xmlns:a="http://schemas.openxmlformats.org/drawingml/2006/main" xmlns:r="http://schemas.openxmlformats.org/officeDocument/2006/relationships" xmlns:p="http://schemas.openxmlformats.org/presentationml/2006/main">
   <p:cSld>
     <p:spTree>
@@ -9463,7 +12307,7 @@
 </p:sld>
 </file>
 
-<file path=ppt/slides/slide14.xml><?xml version="1.0" encoding="utf-8"?>
+<file path=ppt/slides/slide15.xml><?xml version="1.0" encoding="utf-8"?>
 <p:sld xmlns:a="http://schemas.openxmlformats.org/drawingml/2006/main" xmlns:r="http://schemas.openxmlformats.org/officeDocument/2006/relationships" xmlns:p="http://schemas.openxmlformats.org/presentationml/2006/main">
   <p:cSld>
     <p:spTree>
@@ -9817,7 +12661,7 @@
 </p:sld>
 </file>
 
-<file path=ppt/slides/slide15.xml><?xml version="1.0" encoding="utf-8"?>
+<file path=ppt/slides/slide16.xml><?xml version="1.0" encoding="utf-8"?>
 <p:sld xmlns:a="http://schemas.openxmlformats.org/drawingml/2006/main" xmlns:r="http://schemas.openxmlformats.org/officeDocument/2006/relationships" xmlns:p="http://schemas.openxmlformats.org/presentationml/2006/main">
   <p:cSld>
     <p:spTree>
@@ -9907,7 +12751,7 @@
 </p:sld>
 </file>
 
-<file path=ppt/slides/slide16.xml><?xml version="1.0" encoding="utf-8"?>
+<file path=ppt/slides/slide17.xml><?xml version="1.0" encoding="utf-8"?>
 <p:sld xmlns:a="http://schemas.openxmlformats.org/drawingml/2006/main" xmlns:r="http://schemas.openxmlformats.org/officeDocument/2006/relationships" xmlns:p="http://schemas.openxmlformats.org/presentationml/2006/main">
   <p:cSld>
     <p:spTree>
@@ -10018,7 +12862,7 @@
 </p:sld>
 </file>
 
-<file path=ppt/slides/slide17.xml><?xml version="1.0" encoding="utf-8"?>
+<file path=ppt/slides/slide18.xml><?xml version="1.0" encoding="utf-8"?>
 <p:sld xmlns:a="http://schemas.openxmlformats.org/drawingml/2006/main" xmlns:r="http://schemas.openxmlformats.org/officeDocument/2006/relationships" xmlns:p="http://schemas.openxmlformats.org/presentationml/2006/main">
   <p:cSld>
     <p:spTree>
@@ -10138,7 +12982,7 @@
 </p:sld>
 </file>
 
-<file path=ppt/slides/slide18.xml><?xml version="1.0" encoding="utf-8"?>
+<file path=ppt/slides/slide19.xml><?xml version="1.0" encoding="utf-8"?>
 <p:sld xmlns:a="http://schemas.openxmlformats.org/drawingml/2006/main" xmlns:r="http://schemas.openxmlformats.org/officeDocument/2006/relationships" xmlns:p="http://schemas.openxmlformats.org/presentationml/2006/main">
   <p:cSld>
     <p:spTree>
@@ -10258,66 +13102,6 @@
 </p:sld>
 </file>
 
-<file path=ppt/slides/slide19.xml><?xml version="1.0" encoding="utf-8"?>
-<p:sld xmlns:a="http://schemas.openxmlformats.org/drawingml/2006/main" xmlns:r="http://schemas.openxmlformats.org/officeDocument/2006/relationships" xmlns:p="http://schemas.openxmlformats.org/presentationml/2006/main">
-  <p:cSld>
-    <p:spTree>
-      <p:nvGrpSpPr>
-        <p:cNvPr id="1" name=""/>
-        <p:cNvGrpSpPr/>
-        <p:nvPr/>
-      </p:nvGrpSpPr>
-      <p:grpSpPr>
-        <a:xfrm>
-          <a:off x="0" y="0"/>
-          <a:ext cx="0" cy="0"/>
-          <a:chOff x="0" y="0"/>
-          <a:chExt cx="0" cy="0"/>
-        </a:xfrm>
-      </p:grpSpPr>
-      <p:pic>
-        <p:nvPicPr>
-          <p:cNvPr id="5" name="Picture 4">
-            <a:extLst>
-              <a:ext uri="{FF2B5EF4-FFF2-40B4-BE49-F238E27FC236}">
-                <a16:creationId xmlns:a16="http://schemas.microsoft.com/office/drawing/2014/main" id="{8C92EB33-8FB5-4897-BA48-A059EA79D523}"/>
-              </a:ext>
-            </a:extLst>
-          </p:cNvPr>
-          <p:cNvPicPr>
-            <a:picLocks noChangeAspect="1"/>
-          </p:cNvPicPr>
-          <p:nvPr/>
-        </p:nvPicPr>
-        <p:blipFill>
-          <a:blip r:embed="rId2"/>
-          <a:stretch>
-            <a:fillRect/>
-          </a:stretch>
-        </p:blipFill>
-        <p:spPr>
-          <a:xfrm>
-            <a:off x="328709" y="156706"/>
-            <a:ext cx="3162741" cy="6544588"/>
-          </a:xfrm>
-          <a:prstGeom prst="rect">
-            <a:avLst/>
-          </a:prstGeom>
-        </p:spPr>
-      </p:pic>
-    </p:spTree>
-    <p:extLst>
-      <p:ext uri="{BB962C8B-B14F-4D97-AF65-F5344CB8AC3E}">
-        <p14:creationId xmlns:p14="http://schemas.microsoft.com/office/powerpoint/2010/main" val="3999806523"/>
-      </p:ext>
-    </p:extLst>
-  </p:cSld>
-  <p:clrMapOvr>
-    <a:masterClrMapping/>
-  </p:clrMapOvr>
-</p:sld>
-</file>
-
 <file path=ppt/slides/slide2.xml><?xml version="1.0" encoding="utf-8"?>
 <p:sld xmlns:a="http://schemas.openxmlformats.org/drawingml/2006/main" xmlns:r="http://schemas.openxmlformats.org/officeDocument/2006/relationships" xmlns:p="http://schemas.openxmlformats.org/presentationml/2006/main">
   <p:cSld>
@@ -10616,6 +13400,66 @@
           <a:chExt cx="0" cy="0"/>
         </a:xfrm>
       </p:grpSpPr>
+      <p:pic>
+        <p:nvPicPr>
+          <p:cNvPr id="5" name="Picture 4">
+            <a:extLst>
+              <a:ext uri="{FF2B5EF4-FFF2-40B4-BE49-F238E27FC236}">
+                <a16:creationId xmlns:a16="http://schemas.microsoft.com/office/drawing/2014/main" id="{8C92EB33-8FB5-4897-BA48-A059EA79D523}"/>
+              </a:ext>
+            </a:extLst>
+          </p:cNvPr>
+          <p:cNvPicPr>
+            <a:picLocks noChangeAspect="1"/>
+          </p:cNvPicPr>
+          <p:nvPr/>
+        </p:nvPicPr>
+        <p:blipFill>
+          <a:blip r:embed="rId2"/>
+          <a:stretch>
+            <a:fillRect/>
+          </a:stretch>
+        </p:blipFill>
+        <p:spPr>
+          <a:xfrm>
+            <a:off x="328709" y="156706"/>
+            <a:ext cx="3162741" cy="6544588"/>
+          </a:xfrm>
+          <a:prstGeom prst="rect">
+            <a:avLst/>
+          </a:prstGeom>
+        </p:spPr>
+      </p:pic>
+    </p:spTree>
+    <p:extLst>
+      <p:ext uri="{BB962C8B-B14F-4D97-AF65-F5344CB8AC3E}">
+        <p14:creationId xmlns:p14="http://schemas.microsoft.com/office/powerpoint/2010/main" val="3999806523"/>
+      </p:ext>
+    </p:extLst>
+  </p:cSld>
+  <p:clrMapOvr>
+    <a:masterClrMapping/>
+  </p:clrMapOvr>
+</p:sld>
+</file>
+
+<file path=ppt/slides/slide21.xml><?xml version="1.0" encoding="utf-8"?>
+<p:sld xmlns:a="http://schemas.openxmlformats.org/drawingml/2006/main" xmlns:r="http://schemas.openxmlformats.org/officeDocument/2006/relationships" xmlns:p="http://schemas.openxmlformats.org/presentationml/2006/main">
+  <p:cSld>
+    <p:spTree>
+      <p:nvGrpSpPr>
+        <p:cNvPr id="1" name=""/>
+        <p:cNvGrpSpPr/>
+        <p:nvPr/>
+      </p:nvGrpSpPr>
+      <p:grpSpPr>
+        <a:xfrm>
+          <a:off x="0" y="0"/>
+          <a:ext cx="0" cy="0"/>
+          <a:chOff x="0" y="0"/>
+          <a:chExt cx="0" cy="0"/>
+        </a:xfrm>
+      </p:grpSpPr>
       <p:sp>
         <p:nvSpPr>
           <p:cNvPr id="7" name="Rectangle 6">
@@ -11123,7 +13967,7 @@
 </p:sld>
 </file>
 
-<file path=ppt/slides/slide21.xml><?xml version="1.0" encoding="utf-8"?>
+<file path=ppt/slides/slide22.xml><?xml version="1.0" encoding="utf-8"?>
 <p:sld xmlns:a="http://schemas.openxmlformats.org/drawingml/2006/main" xmlns:r="http://schemas.openxmlformats.org/officeDocument/2006/relationships" xmlns:p="http://schemas.openxmlformats.org/presentationml/2006/main">
   <p:cSld>
     <p:spTree>
@@ -12682,7 +15526,7 @@
 </p:sld>
 </file>
 
-<file path=ppt/slides/slide22.xml><?xml version="1.0" encoding="utf-8"?>
+<file path=ppt/slides/slide23.xml><?xml version="1.0" encoding="utf-8"?>
 <p:sld xmlns:a="http://schemas.openxmlformats.org/drawingml/2006/main" xmlns:r="http://schemas.openxmlformats.org/officeDocument/2006/relationships" xmlns:p="http://schemas.openxmlformats.org/presentationml/2006/main">
   <p:cSld>
     <p:spTree>
@@ -13652,7 +16496,7 @@
 </p:sld>
 </file>
 
-<file path=ppt/slides/slide23.xml><?xml version="1.0" encoding="utf-8"?>
+<file path=ppt/slides/slide24.xml><?xml version="1.0" encoding="utf-8"?>
 <p:sld xmlns:a="http://schemas.openxmlformats.org/drawingml/2006/main" xmlns:r="http://schemas.openxmlformats.org/officeDocument/2006/relationships" xmlns:p="http://schemas.openxmlformats.org/presentationml/2006/main">
   <p:cSld>
     <p:spTree>
@@ -14007,7 +16851,7 @@
 </p:sld>
 </file>
 
-<file path=ppt/slides/slide24.xml><?xml version="1.0" encoding="utf-8"?>
+<file path=ppt/slides/slide25.xml><?xml version="1.0" encoding="utf-8"?>
 <p:sld xmlns:a="http://schemas.openxmlformats.org/drawingml/2006/main" xmlns:r="http://schemas.openxmlformats.org/officeDocument/2006/relationships" xmlns:p="http://schemas.openxmlformats.org/presentationml/2006/main">
   <p:cSld>
     <p:spTree>
@@ -14614,7 +17458,7 @@
 </p:sld>
 </file>
 
-<file path=ppt/slides/slide25.xml><?xml version="1.0" encoding="utf-8"?>
+<file path=ppt/slides/slide26.xml><?xml version="1.0" encoding="utf-8"?>
 <p:sld xmlns:a="http://schemas.openxmlformats.org/drawingml/2006/main" xmlns:r="http://schemas.openxmlformats.org/officeDocument/2006/relationships" xmlns:p="http://schemas.openxmlformats.org/presentationml/2006/main">
   <p:cSld>
     <p:spTree>
@@ -14659,7 +17503,7 @@
           <a:graphicData uri="http://schemas.openxmlformats.org/presentationml/2006/ole">
             <mc:AlternateContent xmlns:mc="http://schemas.openxmlformats.org/markup-compatibility/2006">
               <mc:Choice xmlns:v="urn:schemas-microsoft-com:vml" Requires="v">
-                <p:oleObj spid="_x0000_s16387" name="Packager Shell Object" showAsIcon="1" r:id="rId3" imgW="2876456" imgH="514350" progId="Package">
+                <p:oleObj spid="_x0000_s16392" name="Packager Shell Object" showAsIcon="1" r:id="rId3" imgW="2876456" imgH="514350" progId="Package">
                   <p:embed/>
                 </p:oleObj>
               </mc:Choice>
@@ -14707,7 +17551,7 @@
 </p:sld>
 </file>
 
-<file path=ppt/slides/slide26.xml><?xml version="1.0" encoding="utf-8"?>
+<file path=ppt/slides/slide27.xml><?xml version="1.0" encoding="utf-8"?>
 <p:sld xmlns:a="http://schemas.openxmlformats.org/drawingml/2006/main" xmlns:r="http://schemas.openxmlformats.org/officeDocument/2006/relationships" xmlns:p="http://schemas.openxmlformats.org/presentationml/2006/main">
   <p:cSld>
     <p:spTree>
